--- a/reports/auto_research/2026-10-02/Research_State_Briefing.pptx
+++ b/reports/auto_research/2026-10-02/Research_State_Briefing.pptx
@@ -2,22 +2,22 @@
 <file path=ppt/presentation.xml><?xml version="1.0" encoding="utf-8"?>
 <p:presentation xmlns:p="http://schemas.openxmlformats.org/presentationml/2006/main">
   <p:sldMasterIdLst>
-    <p:sldMasterId xmlns:r="http://schemas.openxmlformats.org/officeDocument/2006/relationships" id="2147483648" r:id="R3bc8751153e14321"/>
+    <p:sldMasterId xmlns:r="http://schemas.openxmlformats.org/officeDocument/2006/relationships" id="2147483648" r:id="Re53d5f67e9004c87"/>
   </p:sldMasterIdLst>
   <p:notesMasterIdLst>
-    <p:notesMasterId xmlns:r="http://schemas.openxmlformats.org/officeDocument/2006/relationships" r:id="R879748d050d34fa3"/>
+    <p:notesMasterId xmlns:r="http://schemas.openxmlformats.org/officeDocument/2006/relationships" r:id="R47e51797b01e4228"/>
   </p:notesMasterIdLst>
   <p:sldIdLst>
-    <p:sldId xmlns:r="http://schemas.openxmlformats.org/officeDocument/2006/relationships" id="256" r:id="Re076c6b3f1e64711"/>
-    <p:sldId xmlns:r="http://schemas.openxmlformats.org/officeDocument/2006/relationships" id="257" r:id="R0a7b4773141c48ae"/>
-    <p:sldId xmlns:r="http://schemas.openxmlformats.org/officeDocument/2006/relationships" id="258" r:id="R71423621359849ed"/>
-    <p:sldId xmlns:r="http://schemas.openxmlformats.org/officeDocument/2006/relationships" id="259" r:id="R3dc1666b0d534d9e"/>
-    <p:sldId xmlns:r="http://schemas.openxmlformats.org/officeDocument/2006/relationships" id="260" r:id="R3bc8a40886d74519"/>
-    <p:sldId xmlns:r="http://schemas.openxmlformats.org/officeDocument/2006/relationships" id="261" r:id="R45e163064ad544a1"/>
-    <p:sldId xmlns:r="http://schemas.openxmlformats.org/officeDocument/2006/relationships" id="262" r:id="Rc5d7fa64a27242bf"/>
-    <p:sldId xmlns:r="http://schemas.openxmlformats.org/officeDocument/2006/relationships" id="263" r:id="R5f6cea036f624715"/>
-    <p:sldId xmlns:r="http://schemas.openxmlformats.org/officeDocument/2006/relationships" id="264" r:id="Rbda879f2360c4535"/>
-    <p:sldId xmlns:r="http://schemas.openxmlformats.org/officeDocument/2006/relationships" id="265" r:id="Rdbc70231bc5141a2"/>
+    <p:sldId xmlns:r="http://schemas.openxmlformats.org/officeDocument/2006/relationships" id="256" r:id="R78c4ef66ec674b2f"/>
+    <p:sldId xmlns:r="http://schemas.openxmlformats.org/officeDocument/2006/relationships" id="257" r:id="R12486b69ed6b4bff"/>
+    <p:sldId xmlns:r="http://schemas.openxmlformats.org/officeDocument/2006/relationships" id="258" r:id="R2e95f503f6a44a21"/>
+    <p:sldId xmlns:r="http://schemas.openxmlformats.org/officeDocument/2006/relationships" id="259" r:id="R615e307fc2d9424b"/>
+    <p:sldId xmlns:r="http://schemas.openxmlformats.org/officeDocument/2006/relationships" id="260" r:id="Rd69effa377dc48a4"/>
+    <p:sldId xmlns:r="http://schemas.openxmlformats.org/officeDocument/2006/relationships" id="261" r:id="R4507559c7dc74774"/>
+    <p:sldId xmlns:r="http://schemas.openxmlformats.org/officeDocument/2006/relationships" id="262" r:id="R0a33c60918ff4aca"/>
+    <p:sldId xmlns:r="http://schemas.openxmlformats.org/officeDocument/2006/relationships" id="263" r:id="Rb6b9f616fa524e46"/>
+    <p:sldId xmlns:r="http://schemas.openxmlformats.org/officeDocument/2006/relationships" id="264" r:id="Rc9851a2ccb4f41f0"/>
+    <p:sldId xmlns:r="http://schemas.openxmlformats.org/officeDocument/2006/relationships" id="265" r:id="Rb520823f3f6b4c9e"/>
   </p:sldIdLst>
   <p:sldSz cx="12192000" cy="6858000"/>
   <p:notesSz cx="6858000" cy="9144000"/>
@@ -451,37 +451,22 @@
           <a:lstStyle xmlns:a="http://schemas.openxmlformats.org/drawingml/2006/main"/>
           <a:p xmlns:a="http://schemas.openxmlformats.org/drawingml/2006/main">
             <a:r>
-              <a:t>Internal exploratory briefing. Gate 3 open; no new health fits.</a:t>
-            </a:r>
-          </a:p>
-          <a:p xmlns:a="http://schemas.openxmlformats.org/drawingml/2006/main">
-            <a:r>
-              <a:t>C02: https://github.com/bobshenruililin/Laidlaw-Heat-Project/blob/b103e96c6761f3409fab6f116c6675b43fdb2ee3/reports/data_receipt_2026-08-07.md</a:t>
-            </a:r>
-          </a:p>
-          <a:p xmlns:a="http://schemas.openxmlformats.org/drawingml/2006/main">
-            <a:r>
-              <a:t>C07: https://github.com/bobshenruililin/Laidlaw-Heat-Project/blob/b103e96c6761f3409fab6f116c6675b43fdb2ee3/scripts/32_cvd_trend_depletion_lag.R</a:t>
-            </a:r>
-          </a:p>
-          <a:p xmlns:a="http://schemas.openxmlformats.org/drawingml/2006/main">
-            <a:r>
-              <a:t>C08: https://github.com/bobshenruililin/Laidlaw-Heat-Project/blob/b103e96c6761f3409fab6f116c6675b43fdb2ee3/manuscript/covid_period/Manuscript_covid_period_draft.md</a:t>
-            </a:r>
-          </a:p>
-          <a:p xmlns:a="http://schemas.openxmlformats.org/drawingml/2006/main">
-            <a:r>
-              <a:t>C09: https://github.com/bobshenruililin/Laidlaw-Heat-Project/blob/b103e96c6761f3409fab6f116c6675b43fdb2ee3/outputs/release_chd_hf/tables/table2_core_models.csv</a:t>
+              <a:t>receipt: https://github.com/bobshenruililin/Laidlaw-Heat-Project/blob/b103e96c6761f3409fab6f116c6675b43fdb2ee3/reports/data_receipt_2026-08-07.md</a:t>
+            </a:r>
+          </a:p>
+          <a:p xmlns:a="http://schemas.openxmlformats.org/drawingml/2006/main">
+            <a:r>
+              <a:t>core: https://github.com/bobshenruililin/Laidlaw-Heat-Project/blob/b103e96c6761f3409fab6f116c6675b43fdb2ee3/outputs/release_chd_hf/tables/table2_core_models.csv</a:t>
+            </a:r>
+          </a:p>
+          <a:p xmlns:a="http://schemas.openxmlformats.org/drawingml/2006/main">
+            <a:r>
+              <a:t>journal: https://www.nature.com/natcardiovascres/aims</a:t>
             </a:r>
           </a:p>
           <a:p xmlns:a="http://schemas.openxmlformats.org/drawingml/2006/main">
             <a:r>
               <a:t/>
-            </a:r>
-          </a:p>
-          <a:p xmlns:a="http://schemas.openxmlformats.org/drawingml/2006/main">
-            <a:r>
-              <a:t>Read RESEARCH_STATE.md and EVIDENCE_REGISTER.yml for claim status and uncertainty.</a:t>
             </a:r>
           </a:p>
         </p:txBody>
@@ -551,42 +536,17 @@
           <a:lstStyle xmlns:a="http://schemas.openxmlformats.org/drawingml/2006/main"/>
           <a:p xmlns:a="http://schemas.openxmlformats.org/drawingml/2006/main">
             <a:r>
-              <a:t>Internal exploratory briefing. Gate 3 open; no new health fits.</a:t>
-            </a:r>
-          </a:p>
-          <a:p xmlns:a="http://schemas.openxmlformats.org/drawingml/2006/main">
-            <a:r>
-              <a:t>C08: https://github.com/bobshenruililin/Laidlaw-Heat-Project/blob/b103e96c6761f3409fab6f116c6675b43fdb2ee3/manuscript/covid_period/Manuscript_covid_period_draft.md</a:t>
-            </a:r>
-          </a:p>
-          <a:p xmlns:a="http://schemas.openxmlformats.org/drawingml/2006/main">
-            <a:r>
-              <a:t>C09: https://github.com/bobshenruililin/Laidlaw-Heat-Project/blob/b103e96c6761f3409fab6f116c6675b43fdb2ee3/outputs/release_chd_hf/tables/table2_core_models.csv</a:t>
-            </a:r>
-          </a:p>
-          <a:p xmlns:a="http://schemas.openxmlformats.org/drawingml/2006/main">
-            <a:r>
-              <a:t>C13: https://github.com/bobshenruililin/Laidlaw-Heat-Project/blob/b103e96c6761f3409fab6f116c6675b43fdb2ee3/analysis_plan/covid_period/ha_metadata_inventory.md</a:t>
-            </a:r>
-          </a:p>
-          <a:p xmlns:a="http://schemas.openxmlformats.org/drawingml/2006/main">
-            <a:r>
-              <a:t>C14: https://github.com/bobshenruililin/Laidlaw-Heat-Project/blob/b103e96c6761f3409fab6f116c6675b43fdb2ee3/analysis_plan/covid_period/ha_metadata_inventory.md</a:t>
-            </a:r>
-          </a:p>
-          <a:p xmlns:a="http://schemas.openxmlformats.org/drawingml/2006/main">
-            <a:r>
-              <a:t>C19: https://github.com/bobshenruililin/Laidlaw-Heat-Project/blob/b103e96c6761f3409fab6f116c6675b43fdb2ee3/manuscript/covid_period/Manuscript_covid_period_draft.md</a:t>
-            </a:r>
-          </a:p>
-          <a:p xmlns:a="http://schemas.openxmlformats.org/drawingml/2006/main">
-            <a:r>
-              <a:t/>
-            </a:r>
-          </a:p>
-          <a:p xmlns:a="http://schemas.openxmlformats.org/drawingml/2006/main">
-            <a:r>
-              <a:t>Read RESEARCH_STATE.md and EVIDENCE_REGISTER.yml for claim status and uncertainty.</a:t>
+              <a:t>No journal submission, author contact or data-transfer approval follows from this briefing. Nature Cardiovascular Research is a fit benchmark, not an acceptance claim.</a:t>
+            </a:r>
+          </a:p>
+          <a:p xmlns:a="http://schemas.openxmlformats.org/drawingml/2006/main">
+            <a:r>
+              <a:t>https://www.nature.com/natcardiovascres/aims</a:t>
+            </a:r>
+          </a:p>
+          <a:p xmlns:a="http://schemas.openxmlformats.org/drawingml/2006/main">
+            <a:r>
+              <a:t>https://github.com/EvoScientist/EvoSkills</a:t>
             </a:r>
           </a:p>
         </p:txBody>
@@ -656,32 +616,12 @@
           <a:lstStyle xmlns:a="http://schemas.openxmlformats.org/drawingml/2006/main"/>
           <a:p xmlns:a="http://schemas.openxmlformats.org/drawingml/2006/main">
             <a:r>
-              <a:t>Internal exploratory briefing. Gate 3 open; no new health fits.</a:t>
-            </a:r>
-          </a:p>
-          <a:p xmlns:a="http://schemas.openxmlformats.org/drawingml/2006/main">
-            <a:r>
-              <a:t>C02: https://github.com/bobshenruililin/Laidlaw-Heat-Project/blob/b103e96c6761f3409fab6f116c6675b43fdb2ee3/reports/data_receipt_2026-08-07.md</a:t>
-            </a:r>
-          </a:p>
-          <a:p xmlns:a="http://schemas.openxmlformats.org/drawingml/2006/main">
-            <a:r>
-              <a:t>C13: https://github.com/bobshenruililin/Laidlaw-Heat-Project/blob/b103e96c6761f3409fab6f116c6675b43fdb2ee3/analysis_plan/covid_period/ha_metadata_inventory.md</a:t>
-            </a:r>
-          </a:p>
-          <a:p xmlns:a="http://schemas.openxmlformats.org/drawingml/2006/main">
-            <a:r>
-              <a:t>C14: https://github.com/bobshenruililin/Laidlaw-Heat-Project/blob/b103e96c6761f3409fab6f116c6675b43fdb2ee3/analysis_plan/covid_period/ha_metadata_inventory.md</a:t>
+              <a:t>receipt: https://github.com/bobshenruililin/Laidlaw-Heat-Project/blob/b103e96c6761f3409fab6f116c6675b43fdb2ee3/reports/data_receipt_2026-08-07.md</a:t>
             </a:r>
           </a:p>
           <a:p xmlns:a="http://schemas.openxmlformats.org/drawingml/2006/main">
             <a:r>
               <a:t/>
-            </a:r>
-          </a:p>
-          <a:p xmlns:a="http://schemas.openxmlformats.org/drawingml/2006/main">
-            <a:r>
-              <a:t>Read RESEARCH_STATE.md and EVIDENCE_REGISTER.yml for claim status and uncertainty.</a:t>
             </a:r>
           </a:p>
         </p:txBody>
@@ -751,47 +691,22 @@
           <a:lstStyle xmlns:a="http://schemas.openxmlformats.org/drawingml/2006/main"/>
           <a:p xmlns:a="http://schemas.openxmlformats.org/drawingml/2006/main">
             <a:r>
-              <a:t>Internal exploratory briefing. Gate 3 open; no new health fits.</a:t>
-            </a:r>
-          </a:p>
-          <a:p xmlns:a="http://schemas.openxmlformats.org/drawingml/2006/main">
-            <a:r>
-              <a:t>C01: https://github.com/bobshenruililin/Laidlaw-Heat-Project/blob/b103e96c6761f3409fab6f116c6675b43fdb2ee3/reports/meeting_debrief_2026-07-17.md</a:t>
-            </a:r>
-          </a:p>
-          <a:p xmlns:a="http://schemas.openxmlformats.org/drawingml/2006/main">
-            <a:r>
-              <a:t>C03: https://github.com/bobshenruililin/Laidlaw-Heat-Project/blob/b103e96c6761f3409fab6f116c6675b43fdb2ee3/scripts/31_cvd_core_robustness.R</a:t>
-            </a:r>
-          </a:p>
-          <a:p xmlns:a="http://schemas.openxmlformats.org/drawingml/2006/main">
-            <a:r>
-              <a:t>C10: https://github.com/bobshenruililin/Laidlaw-Heat-Project/blob/b103e96c6761f3409fab6f116c6675b43fdb2ee3/outputs/calibration_md/md_calibration_f1_2_decision_report.md</a:t>
-            </a:r>
-          </a:p>
-          <a:p xmlns:a="http://schemas.openxmlformats.org/drawingml/2006/main">
-            <a:r>
-              <a:t>C12: https://github.com/bobshenruililin/Laidlaw-Heat-Project/blob/b103e96c6761f3409fab6f116c6675b43fdb2ee3/knowledge/2026-08-27_crown_df_physiology_policy.md</a:t>
-            </a:r>
-          </a:p>
-          <a:p xmlns:a="http://schemas.openxmlformats.org/drawingml/2006/main">
-            <a:r>
-              <a:t>C05: https://github.com/bobshenruililin/Laidlaw-Heat-Project/blob/b103e96c6761f3409fab6f116c6675b43fdb2ee3/reports/meeting_debrief_2026-09-10.md</a:t>
-            </a:r>
-          </a:p>
-          <a:p xmlns:a="http://schemas.openxmlformats.org/drawingml/2006/main">
-            <a:r>
-              <a:t>C06: https://github.com/bobshenruililin/Laidlaw-Heat-Project/blob/b103e96c6761f3409fab6f116c6675b43fdb2ee3/manuscript/covid_period/INDEPENDENT_REVIEW.md</a:t>
-            </a:r>
-          </a:p>
-          <a:p xmlns:a="http://schemas.openxmlformats.org/drawingml/2006/main">
-            <a:r>
-              <a:t/>
-            </a:r>
-          </a:p>
-          <a:p xmlns:a="http://schemas.openxmlformats.org/drawingml/2006/main">
-            <a:r>
-              <a:t>Read RESEARCH_STATE.md and EVIDENCE_REGISTER.yml for claim status and uncertainty.</a:t>
+              <a:t>diabetes: https://pubmed.ncbi.nlm.nih.gov/41049877/</a:t>
+            </a:r>
+          </a:p>
+          <a:p xmlns:a="http://schemas.openxmlformats.org/drawingml/2006/main">
+            <a:r>
+              <a:t>hypertension: https://pubmed.ncbi.nlm.nih.gov/40410292/</a:t>
+            </a:r>
+          </a:p>
+          <a:p xmlns:a="http://schemas.openxmlformats.org/drawingml/2006/main">
+            <a:r>
+              <a:t>continuity: https://doi.org/10.1111/dom.70984</a:t>
+            </a:r>
+          </a:p>
+          <a:p xmlns:a="http://schemas.openxmlformats.org/drawingml/2006/main">
+            <a:r>
+              <a:t>Youn2025 and Hu2025: abstracts checked only. Yau2026: full main text checked, supplements not checked. Record-specific locators and unresolved definitions appear in literature/covid_novelty_audit_2026-10-02.md. No reported coefficients are imported.</a:t>
             </a:r>
           </a:p>
         </p:txBody>
@@ -861,37 +776,17 @@
           <a:lstStyle xmlns:a="http://schemas.openxmlformats.org/drawingml/2006/main"/>
           <a:p xmlns:a="http://schemas.openxmlformats.org/drawingml/2006/main">
             <a:r>
-              <a:t>Internal exploratory briefing. Gate 3 open; no new health fits.</a:t>
-            </a:r>
-          </a:p>
-          <a:p xmlns:a="http://schemas.openxmlformats.org/drawingml/2006/main">
-            <a:r>
-              <a:t>C02: https://github.com/bobshenruililin/Laidlaw-Heat-Project/blob/b103e96c6761f3409fab6f116c6675b43fdb2ee3/reports/data_receipt_2026-08-07.md</a:t>
-            </a:r>
-          </a:p>
-          <a:p xmlns:a="http://schemas.openxmlformats.org/drawingml/2006/main">
-            <a:r>
-              <a:t>C03: https://github.com/bobshenruililin/Laidlaw-Heat-Project/blob/b103e96c6761f3409fab6f116c6675b43fdb2ee3/scripts/31_cvd_core_robustness.R</a:t>
-            </a:r>
-          </a:p>
-          <a:p xmlns:a="http://schemas.openxmlformats.org/drawingml/2006/main">
-            <a:r>
-              <a:t>C07: https://github.com/bobshenruililin/Laidlaw-Heat-Project/blob/b103e96c6761f3409fab6f116c6675b43fdb2ee3/scripts/32_cvd_trend_depletion_lag.R</a:t>
-            </a:r>
-          </a:p>
-          <a:p xmlns:a="http://schemas.openxmlformats.org/drawingml/2006/main">
-            <a:r>
-              <a:t>C08: https://github.com/bobshenruililin/Laidlaw-Heat-Project/blob/b103e96c6761f3409fab6f116c6675b43fdb2ee3/manuscript/covid_period/Manuscript_covid_period_draft.md</a:t>
+              <a:t>receipt: https://github.com/bobshenruililin/Laidlaw-Heat-Project/blob/b103e96c6761f3409fab6f116c6675b43fdb2ee3/reports/data_receipt_2026-08-07.md</a:t>
+            </a:r>
+          </a:p>
+          <a:p xmlns:a="http://schemas.openxmlformats.org/drawingml/2006/main">
+            <a:r>
+              <a:t>core: https://github.com/bobshenruililin/Laidlaw-Heat-Project/blob/b103e96c6761f3409fab6f116c6675b43fdb2ee3/outputs/release_chd_hf/tables/table2_core_models.csv</a:t>
             </a:r>
           </a:p>
           <a:p xmlns:a="http://schemas.openxmlformats.org/drawingml/2006/main">
             <a:r>
               <a:t/>
-            </a:r>
-          </a:p>
-          <a:p xmlns:a="http://schemas.openxmlformats.org/drawingml/2006/main">
-            <a:r>
-              <a:t>Read RESEARCH_STATE.md and EVIDENCE_REGISTER.yml for claim status and uncertainty.</a:t>
             </a:r>
           </a:p>
         </p:txBody>
@@ -961,17 +856,12 @@
           <a:lstStyle xmlns:a="http://schemas.openxmlformats.org/drawingml/2006/main"/>
           <a:p xmlns:a="http://schemas.openxmlformats.org/drawingml/2006/main">
             <a:r>
-              <a:t>https://github.com/bobshenruililin/Laidlaw-Heat-Project/blob/b103e96c6761f3409fab6f116c6675b43fdb2ee3/outputs/tables/cvd_descriptive_annual_totals.csv</a:t>
-            </a:r>
-          </a:p>
-          <a:p xmlns:a="http://schemas.openxmlformats.org/drawingml/2006/main">
-            <a:r>
-              <a:t>HA_APPROVED_AGGREGATE label inherited from public release. Values=100*annual_total/2013_total; rounded to six decimals in chart data. No monthly reconstruction or health modelling. Count/index, not incidence. CHD:2013=23830,2019=12396,2020=10237,2023=12323. HF:4336,2344,1964,2296.</a:t>
-            </a:r>
-          </a:p>
-          <a:p xmlns:a="http://schemas.openxmlformats.org/drawingml/2006/main">
-            <a:r>
-              <a:t>Claim C15; register contains source hash.</a:t>
+              <a:t>annual: https://github.com/bobshenruililin/Laidlaw-Heat-Project/blob/b103e96c6761f3409fab6f116c6675b43fdb2ee3/outputs/tables/cvd_descriptive_annual_totals.csv</a:t>
+            </a:r>
+          </a:p>
+          <a:p xmlns:a="http://schemas.openxmlformats.org/drawingml/2006/main">
+            <a:r>
+              <a:t>HA_APPROVED_AGGREGATE. Annual index = 100 * count / 2013 count, rounded to six decimals for the editable workbook. No population denominator used. An index compares trajectories, not cohort incidence.</a:t>
             </a:r>
           </a:p>
         </p:txBody>
@@ -1041,37 +931,17 @@
           <a:lstStyle xmlns:a="http://schemas.openxmlformats.org/drawingml/2006/main"/>
           <a:p xmlns:a="http://schemas.openxmlformats.org/drawingml/2006/main">
             <a:r>
-              <a:t>Internal exploratory briefing. Gate 3 open; no new health fits.</a:t>
-            </a:r>
-          </a:p>
-          <a:p xmlns:a="http://schemas.openxmlformats.org/drawingml/2006/main">
-            <a:r>
-              <a:t>C07: https://github.com/bobshenruililin/Laidlaw-Heat-Project/blob/b103e96c6761f3409fab6f116c6675b43fdb2ee3/scripts/32_cvd_trend_depletion_lag.R</a:t>
-            </a:r>
-          </a:p>
-          <a:p xmlns:a="http://schemas.openxmlformats.org/drawingml/2006/main">
-            <a:r>
-              <a:t>C09: https://github.com/bobshenruililin/Laidlaw-Heat-Project/blob/b103e96c6761f3409fab6f116c6675b43fdb2ee3/outputs/release_chd_hf/tables/table2_core_models.csv</a:t>
-            </a:r>
-          </a:p>
-          <a:p xmlns:a="http://schemas.openxmlformats.org/drawingml/2006/main">
-            <a:r>
-              <a:t>C16: https://github.com/bobshenruililin/Laidlaw-Heat-Project/blob/b103e96c6761f3409fab6f116c6675b43fdb2ee3/outputs/tables/cvd_trend_depletion_sensitivity.csv</a:t>
-            </a:r>
-          </a:p>
-          <a:p xmlns:a="http://schemas.openxmlformats.org/drawingml/2006/main">
-            <a:r>
-              <a:t>C17: https://github.com/bobshenruililin/Laidlaw-Heat-Project/blob/b103e96c6761f3409fab6f116c6675b43fdb2ee3/outputs/release_chd_hf/tables/table4_uncertainty_ladder.csv</a:t>
+              <a:t>sensitivity: https://github.com/bobshenruililin/Laidlaw-Heat-Project/blob/b103e96c6761f3409fab6f116c6675b43fdb2ee3/outputs/tables/cvd_trend_depletion_sensitivity.csv</a:t>
+            </a:r>
+          </a:p>
+          <a:p xmlns:a="http://schemas.openxmlformats.org/drawingml/2006/main">
+            <a:r>
+              <a:t>core: https://github.com/bobshenruililin/Laidlaw-Heat-Project/blob/b103e96c6761f3409fab6f116c6675b43fdb2ee3/outputs/release_chd_hf/tables/table2_core_models.csv</a:t>
             </a:r>
           </a:p>
           <a:p xmlns:a="http://schemas.openxmlformats.org/drawingml/2006/main">
             <a:r>
               <a:t/>
-            </a:r>
-          </a:p>
-          <a:p xmlns:a="http://schemas.openxmlformats.org/drawingml/2006/main">
-            <a:r>
-              <a:t>Read RESEARCH_STATE.md and EVIDENCE_REGISTER.yml for claim status and uncertainty.</a:t>
             </a:r>
           </a:p>
         </p:txBody>
@@ -1141,42 +1011,17 @@
           <a:lstStyle xmlns:a="http://schemas.openxmlformats.org/drawingml/2006/main"/>
           <a:p xmlns:a="http://schemas.openxmlformats.org/drawingml/2006/main">
             <a:r>
-              <a:t>Internal exploratory briefing. Gate 3 open; no new health fits.</a:t>
-            </a:r>
-          </a:p>
-          <a:p xmlns:a="http://schemas.openxmlformats.org/drawingml/2006/main">
-            <a:r>
-              <a:t>C09: https://github.com/bobshenruililin/Laidlaw-Heat-Project/blob/b103e96c6761f3409fab6f116c6675b43fdb2ee3/outputs/release_chd_hf/tables/table2_core_models.csv</a:t>
-            </a:r>
-          </a:p>
-          <a:p xmlns:a="http://schemas.openxmlformats.org/drawingml/2006/main">
-            <a:r>
-              <a:t>C10: https://github.com/bobshenruililin/Laidlaw-Heat-Project/blob/b103e96c6761f3409fab6f116c6675b43fdb2ee3/outputs/calibration_md/md_calibration_f1_2_decision_report.md</a:t>
-            </a:r>
-          </a:p>
-          <a:p xmlns:a="http://schemas.openxmlformats.org/drawingml/2006/main">
-            <a:r>
-              <a:t>C12: https://github.com/bobshenruililin/Laidlaw-Heat-Project/blob/b103e96c6761f3409fab6f116c6675b43fdb2ee3/knowledge/2026-08-27_crown_df_physiology_policy.md</a:t>
-            </a:r>
-          </a:p>
-          <a:p xmlns:a="http://schemas.openxmlformats.org/drawingml/2006/main">
-            <a:r>
-              <a:t>C18: https://github.com/bobshenruililin/Laidlaw-Heat-Project/blob/b103e96c6761f3409fab6f116c6675b43fdb2ee3/analysis_plan/covid_period/hypothesis_registry.yml</a:t>
-            </a:r>
-          </a:p>
-          <a:p xmlns:a="http://schemas.openxmlformats.org/drawingml/2006/main">
-            <a:r>
-              <a:t>C20: https://github.com/bobshenruililin/Laidlaw-Heat-Project/blob/b103e96c6761f3409fab6f116c6675b43fdb2ee3/scripts/79_covid_period_rails_checks.py</a:t>
+              <a:t>sensitivity: https://github.com/bobshenruililin/Laidlaw-Heat-Project/blob/b103e96c6761f3409fab6f116c6675b43fdb2ee3/outputs/tables/cvd_trend_depletion_sensitivity.csv</a:t>
+            </a:r>
+          </a:p>
+          <a:p xmlns:a="http://schemas.openxmlformats.org/drawingml/2006/main">
+            <a:r>
+              <a:t>core: https://github.com/bobshenruililin/Laidlaw-Heat-Project/blob/b103e96c6761f3409fab6f116c6675b43fdb2ee3/outputs/release_chd_hf/tables/table2_core_models.csv</a:t>
             </a:r>
           </a:p>
           <a:p xmlns:a="http://schemas.openxmlformats.org/drawingml/2006/main">
             <a:r>
               <a:t/>
-            </a:r>
-          </a:p>
-          <a:p xmlns:a="http://schemas.openxmlformats.org/drawingml/2006/main">
-            <a:r>
-              <a:t>Read RESEARCH_STATE.md and EVIDENCE_REGISTER.yml for claim status and uncertainty.</a:t>
             </a:r>
           </a:p>
         </p:txBody>
@@ -1246,37 +1091,17 @@
           <a:lstStyle xmlns:a="http://schemas.openxmlformats.org/drawingml/2006/main"/>
           <a:p xmlns:a="http://schemas.openxmlformats.org/drawingml/2006/main">
             <a:r>
-              <a:t>Internal exploratory briefing. Gate 3 open; no new health fits.</a:t>
-            </a:r>
-          </a:p>
-          <a:p xmlns:a="http://schemas.openxmlformats.org/drawingml/2006/main">
-            <a:r>
-              <a:t>C13: https://github.com/bobshenruililin/Laidlaw-Heat-Project/blob/b103e96c6761f3409fab6f116c6675b43fdb2ee3/analysis_plan/covid_period/ha_metadata_inventory.md</a:t>
-            </a:r>
-          </a:p>
-          <a:p xmlns:a="http://schemas.openxmlformats.org/drawingml/2006/main">
-            <a:r>
-              <a:t>C14: https://github.com/bobshenruililin/Laidlaw-Heat-Project/blob/b103e96c6761f3409fab6f116c6675b43fdb2ee3/analysis_plan/covid_period/ha_metadata_inventory.md</a:t>
-            </a:r>
-          </a:p>
-          <a:p xmlns:a="http://schemas.openxmlformats.org/drawingml/2006/main">
-            <a:r>
-              <a:t>C19: https://github.com/bobshenruililin/Laidlaw-Heat-Project/blob/b103e96c6761f3409fab6f116c6675b43fdb2ee3/manuscript/covid_period/Manuscript_covid_period_draft.md</a:t>
-            </a:r>
-          </a:p>
-          <a:p xmlns:a="http://schemas.openxmlformats.org/drawingml/2006/main">
-            <a:r>
-              <a:t>C08: https://github.com/bobshenruililin/Laidlaw-Heat-Project/blob/b103e96c6761f3409fab6f116c6675b43fdb2ee3/manuscript/covid_period/Manuscript_covid_period_draft.md</a:t>
+              <a:t>receipt: https://github.com/bobshenruililin/Laidlaw-Heat-Project/blob/b103e96c6761f3409fab6f116c6675b43fdb2ee3/reports/data_receipt_2026-08-07.md</a:t>
+            </a:r>
+          </a:p>
+          <a:p xmlns:a="http://schemas.openxmlformats.org/drawingml/2006/main">
+            <a:r>
+              <a:t>continuity: https://doi.org/10.1111/dom.70984</a:t>
             </a:r>
           </a:p>
           <a:p xmlns:a="http://schemas.openxmlformats.org/drawingml/2006/main">
             <a:r>
               <a:t/>
-            </a:r>
-          </a:p>
-          <a:p xmlns:a="http://schemas.openxmlformats.org/drawingml/2006/main">
-            <a:r>
-              <a:t>Read RESEARCH_STATE.md and EVIDENCE_REGISTER.yml for claim status and uncertainty.</a:t>
             </a:r>
           </a:p>
         </p:txBody>
@@ -1346,47 +1171,22 @@
           <a:lstStyle xmlns:a="http://schemas.openxmlformats.org/drawingml/2006/main"/>
           <a:p xmlns:a="http://schemas.openxmlformats.org/drawingml/2006/main">
             <a:r>
-              <a:t>Internal exploratory briefing. Gate 3 open; no new health fits.</a:t>
-            </a:r>
-          </a:p>
-          <a:p xmlns:a="http://schemas.openxmlformats.org/drawingml/2006/main">
-            <a:r>
-              <a:t>C02: https://github.com/bobshenruililin/Laidlaw-Heat-Project/blob/b103e96c6761f3409fab6f116c6675b43fdb2ee3/reports/data_receipt_2026-08-07.md</a:t>
-            </a:r>
-          </a:p>
-          <a:p xmlns:a="http://schemas.openxmlformats.org/drawingml/2006/main">
-            <a:r>
-              <a:t>C05: https://github.com/bobshenruililin/Laidlaw-Heat-Project/blob/b103e96c6761f3409fab6f116c6675b43fdb2ee3/reports/meeting_debrief_2026-09-10.md</a:t>
-            </a:r>
-          </a:p>
-          <a:p xmlns:a="http://schemas.openxmlformats.org/drawingml/2006/main">
-            <a:r>
-              <a:t>C06: https://github.com/bobshenruililin/Laidlaw-Heat-Project/blob/b103e96c6761f3409fab6f116c6675b43fdb2ee3/manuscript/covid_period/INDEPENDENT_REVIEW.md</a:t>
-            </a:r>
-          </a:p>
-          <a:p xmlns:a="http://schemas.openxmlformats.org/drawingml/2006/main">
-            <a:r>
-              <a:t>C07: https://github.com/bobshenruililin/Laidlaw-Heat-Project/blob/b103e96c6761f3409fab6f116c6675b43fdb2ee3/scripts/32_cvd_trend_depletion_lag.R</a:t>
-            </a:r>
-          </a:p>
-          <a:p xmlns:a="http://schemas.openxmlformats.org/drawingml/2006/main">
-            <a:r>
-              <a:t>C13: https://github.com/bobshenruililin/Laidlaw-Heat-Project/blob/b103e96c6761f3409fab6f116c6675b43fdb2ee3/analysis_plan/covid_period/ha_metadata_inventory.md</a:t>
-            </a:r>
-          </a:p>
-          <a:p xmlns:a="http://schemas.openxmlformats.org/drawingml/2006/main">
-            <a:r>
-              <a:t>C14: https://github.com/bobshenruililin/Laidlaw-Heat-Project/blob/b103e96c6761f3409fab6f116c6675b43fdb2ee3/analysis_plan/covid_period/ha_metadata_inventory.md</a:t>
+              <a:t>receipt: https://github.com/bobshenruililin/Laidlaw-Heat-Project/blob/b103e96c6761f3409fab6f116c6675b43fdb2ee3/reports/data_receipt_2026-08-07.md</a:t>
+            </a:r>
+          </a:p>
+          <a:p xmlns:a="http://schemas.openxmlformats.org/drawingml/2006/main">
+            <a:r>
+              <a:t>journal: https://www.nature.com/natcardiovascres/aims</a:t>
+            </a:r>
+          </a:p>
+          <a:p xmlns:a="http://schemas.openxmlformats.org/drawingml/2006/main">
+            <a:r>
+              <a:t>workflows: https://github.com/EvoScientist/EvoSkills</a:t>
             </a:r>
           </a:p>
           <a:p xmlns:a="http://schemas.openxmlformats.org/drawingml/2006/main">
             <a:r>
               <a:t/>
-            </a:r>
-          </a:p>
-          <a:p xmlns:a="http://schemas.openxmlformats.org/drawingml/2006/main">
-            <a:r>
-              <a:t>Read RESEARCH_STATE.md and EVIDENCE_REGISTER.yml for claim status and uncertainty.</a:t>
             </a:r>
           </a:p>
         </p:txBody>
@@ -1454,7 +1254,7 @@
   </p:cSld>
   <p:clrMap bg1="lt1" tx1="dk1" bg2="lt2" tx2="dk2" accent1="accent1" accent2="accent2" accent3="accent3" accent4="accent4" accent5="accent5" accent6="accent6" hlink="hlink" folHlink="folHlink"/>
   <p:sldLayoutIdLst>
-    <p:sldLayoutId xmlns:r="http://schemas.openxmlformats.org/officeDocument/2006/relationships" id="2147483649" r:id="Rb35efe6a92b549a5"/>
+    <p:sldLayoutId xmlns:r="http://schemas.openxmlformats.org/officeDocument/2006/relationships" id="2147483649" r:id="Rd2b5ec08b61b4cb5"/>
   </p:sldLayoutIdLst>
   <p:txStyles>
     <p:titleStyle>
@@ -2000,7 +1800,7 @@
                 <a:ea typeface="Arial"/>
                 <a:cs typeface="Arial"/>
               </a:rPr>
-              <a:t>Annual recorded first-event totals · index (2013 = 100)</a:t>
+              <a:t>Annual recorded first-hospitalisation counts (2013 = 100)</a:t>
             </a:r>
           </a:p>
         </c:rich>
@@ -2399,7 +2199,7 @@
           <p:cNvPr id="8" name="">
             <a:extLst xmlns:a="http://schemas.openxmlformats.org/drawingml/2006/main">
               <a:ext uri="{FF2B5EF4-FFF2-40B4-BE49-F238E27FC236}">
-                <a16:creationId xmlns:a16="http://schemas.microsoft.com/office/drawing/2014/main" id="{49C51645-A3A0-415C-BB2B-CF5E113A229D}"/>
+                <a16:creationId xmlns:a16="http://schemas.microsoft.com/office/drawing/2014/main" id="{5EE9161A-C895-476C-815E-E356AB2F5610}"/>
               </a:ext>
             </a:extLst>
           </p:cNvPr>
@@ -2456,7 +2256,7 @@
           <p:cNvPr id="2" name="">
             <a:extLst xmlns:a="http://schemas.openxmlformats.org/drawingml/2006/main">
               <a:ext uri="{FF2B5EF4-FFF2-40B4-BE49-F238E27FC236}">
-                <a16:creationId xmlns:a16="http://schemas.microsoft.com/office/drawing/2014/main" id="{F32F33D1-6637-448D-9544-8985C11DBE36}"/>
+                <a16:creationId xmlns:a16="http://schemas.microsoft.com/office/drawing/2014/main" id="{113D2B89-95DD-43C5-9E00-8AB9BCDD4E89}"/>
               </a:ext>
             </a:extLst>
           </p:cNvPr>
@@ -2468,7 +2268,7 @@
         <p:spPr>
           <a:xfrm xmlns:a="http://schemas.openxmlformats.org/drawingml/2006/main">
             <a:off x="609600" y="6448425"/>
-            <a:ext cx="6953250" cy="209550"/>
+            <a:ext cx="8572500" cy="209550"/>
           </a:xfrm>
           <a:prstGeom xmlns:a="http://schemas.openxmlformats.org/drawingml/2006/main" prst="rect">
             <a:avLst/>
@@ -2503,7 +2303,7 @@
                 <a:ea typeface="Arial"/>
                 <a:cs typeface="Arial"/>
               </a:rPr>
-              <a:t>LAIDLAW · INTERNAL RESEARCH STATE · 2 OCT 2026</a:t>
+              <a:t>LAIDLAW  INTERNAL RESEARCH STATE  2 OCT 2026</a:t>
             </a:r>
           </a:p>
         </p:txBody>
@@ -2513,7 +2313,7 @@
           <p:cNvPr id="3" name="">
             <a:extLst xmlns:a="http://schemas.openxmlformats.org/drawingml/2006/main">
               <a:ext uri="{FF2B5EF4-FFF2-40B4-BE49-F238E27FC236}">
-                <a16:creationId xmlns:a16="http://schemas.microsoft.com/office/drawing/2014/main" id="{A530FFCE-7FEC-4A73-ADEA-47436A4FD713}"/>
+                <a16:creationId xmlns:a16="http://schemas.microsoft.com/office/drawing/2014/main" id="{EF36867B-4A0B-4487-ADBF-A82BD1865A26}"/>
               </a:ext>
             </a:extLst>
           </p:cNvPr>
@@ -2570,7 +2370,7 @@
           <p:cNvPr id="4" name="">
             <a:extLst xmlns:a="http://schemas.openxmlformats.org/drawingml/2006/main">
               <a:ext uri="{FF2B5EF4-FFF2-40B4-BE49-F238E27FC236}">
-                <a16:creationId xmlns:a16="http://schemas.microsoft.com/office/drawing/2014/main" id="{645F5FA0-4FBD-46AC-B9CC-BBF5E880D390}"/>
+                <a16:creationId xmlns:a16="http://schemas.microsoft.com/office/drawing/2014/main" id="{6924BBA5-39E2-446E-BE51-9348E038B533}"/>
               </a:ext>
             </a:extLst>
           </p:cNvPr>
@@ -2617,7 +2417,7 @@
                 <a:ea typeface="Arial"/>
                 <a:cs typeface="Arial"/>
               </a:rPr>
-              <a:t>Sources: C02, C07, C08, C09 · source links and limits in notes/register</a:t>
+              <a:t>Sources: receipt, core, journal. Links and scientific limits in notes.</a:t>
             </a:r>
           </a:p>
         </p:txBody>
@@ -2627,7 +2427,7 @@
           <p:cNvPr id="5" name="">
             <a:extLst xmlns:a="http://schemas.openxmlformats.org/drawingml/2006/main">
               <a:ext uri="{FF2B5EF4-FFF2-40B4-BE49-F238E27FC236}">
-                <a16:creationId xmlns:a16="http://schemas.microsoft.com/office/drawing/2014/main" id="{B430139C-FAA8-4F83-A722-73F10A38A081}"/>
+                <a16:creationId xmlns:a16="http://schemas.microsoft.com/office/drawing/2014/main" id="{434D899F-8FEB-4903-B823-A7025DA70A92}"/>
               </a:ext>
             </a:extLst>
           </p:cNvPr>
@@ -2638,8 +2438,8 @@
         </p:nvSpPr>
         <p:spPr>
           <a:xfrm xmlns:a="http://schemas.openxmlformats.org/drawingml/2006/main">
-            <a:off x="609600" y="1866900"/>
-            <a:ext cx="10972800" cy="1714500"/>
+            <a:off x="609600" y="1809750"/>
+            <a:ext cx="10972800" cy="1524000"/>
           </a:xfrm>
           <a:prstGeom xmlns:a="http://schemas.openxmlformats.org/drawingml/2006/main" prst="rect">
             <a:avLst/>
@@ -2656,7 +2456,7 @@
           <a:lstStyle xmlns:a="http://schemas.openxmlformats.org/drawingml/2006/main"/>
           <a:p xmlns:a="http://schemas.openxmlformats.org/drawingml/2006/main">
             <a:pPr>
-              <a:defRPr sz="3900" b="1">
+              <a:defRPr sz="4050" b="1">
                 <a:solidFill>
                   <a:srgbClr val="183343"/>
                 </a:solidFill>
@@ -2666,7 +2466,7 @@
               </a:defRPr>
             </a:pPr>
             <a:r>
-              <a:rPr sz="3900" b="1">
+              <a:rPr sz="4050" b="1">
                 <a:solidFill>
                   <a:srgbClr val="183343"/>
                 </a:solidFill>
@@ -2674,12 +2474,12 @@
                 <a:ea typeface="Arial"/>
                 <a:cs typeface="Arial"/>
               </a:rPr>
-              <a:t>Recorded hospitalisations can fall</a:t>
+              <a:t>Why did recorded</a:t>
             </a:r>
           </a:p>
           <a:p xmlns:a="http://schemas.openxmlformats.org/drawingml/2006/main">
             <a:pPr>
-              <a:defRPr sz="3900" b="1">
+              <a:defRPr sz="4050" b="1">
                 <a:solidFill>
                   <a:srgbClr val="183343"/>
                 </a:solidFill>
@@ -2689,7 +2489,7 @@
               </a:defRPr>
             </a:pPr>
             <a:r>
-              <a:rPr sz="3900" b="1">
+              <a:rPr sz="4050" b="1">
                 <a:solidFill>
                   <a:srgbClr val="183343"/>
                 </a:solidFill>
@@ -2697,7 +2497,7 @@
                 <a:ea typeface="Arial"/>
                 <a:cs typeface="Arial"/>
               </a:rPr>
-              <a:t>without cardiovascular health improving.</a:t>
+              <a:t>hospitalisations change?</a:t>
             </a:r>
           </a:p>
         </p:txBody>
@@ -2707,7 +2507,7 @@
           <p:cNvPr id="6" name="">
             <a:extLst xmlns:a="http://schemas.openxmlformats.org/drawingml/2006/main">
               <a:ext uri="{FF2B5EF4-FFF2-40B4-BE49-F238E27FC236}">
-                <a16:creationId xmlns:a16="http://schemas.microsoft.com/office/drawing/2014/main" id="{F5F23DDE-F635-4408-82B6-341F8C0F0E77}"/>
+                <a16:creationId xmlns:a16="http://schemas.microsoft.com/office/drawing/2014/main" id="{7A970AC8-BAA8-4E48-B85C-999DD01BE9CB}"/>
               </a:ext>
             </a:extLst>
           </p:cNvPr>
@@ -2718,8 +2518,8 @@
         </p:nvSpPr>
         <p:spPr>
           <a:xfrm xmlns:a="http://schemas.openxmlformats.org/drawingml/2006/main">
-            <a:off x="609600" y="4000500"/>
-            <a:ext cx="10972800" cy="457200"/>
+            <a:off x="609600" y="3876675"/>
+            <a:ext cx="10972800" cy="495300"/>
           </a:xfrm>
           <a:prstGeom xmlns:a="http://schemas.openxmlformats.org/drawingml/2006/main" prst="rect">
             <a:avLst/>
@@ -2736,7 +2536,7 @@
           <a:lstStyle xmlns:a="http://schemas.openxmlformats.org/drawingml/2006/main"/>
           <a:p xmlns:a="http://schemas.openxmlformats.org/drawingml/2006/main">
             <a:pPr>
-              <a:defRPr sz="2250" b="0">
+              <a:defRPr sz="2325" b="0">
                 <a:solidFill>
                   <a:srgbClr val="14685F"/>
                 </a:solidFill>
@@ -2746,7 +2546,7 @@
               </a:defRPr>
             </a:pPr>
             <a:r>
-              <a:rPr sz="2250" b="0">
+              <a:rPr sz="2325" b="0">
                 <a:solidFill>
                   <a:srgbClr val="14685F"/>
                 </a:solidFill>
@@ -2754,7 +2554,7 @@
                 <a:ea typeface="Arial"/>
                 <a:cs typeface="Arial"/>
               </a:rPr>
-              <a:t>First Auto Research run: epistemic reconstruction</a:t>
+              <a:t>Evidence-supported manuscript and next-study design</a:t>
             </a:r>
           </a:p>
         </p:txBody>
@@ -2764,7 +2564,7 @@
           <p:cNvPr id="7" name="">
             <a:extLst xmlns:a="http://schemas.openxmlformats.org/drawingml/2006/main">
               <a:ext uri="{FF2B5EF4-FFF2-40B4-BE49-F238E27FC236}">
-                <a16:creationId xmlns:a16="http://schemas.microsoft.com/office/drawing/2014/main" id="{4728620B-B8EA-49F3-9EE1-61E27DCEA3DD}"/>
+                <a16:creationId xmlns:a16="http://schemas.microsoft.com/office/drawing/2014/main" id="{5FADA09B-ADF5-41EE-82F6-9712F4828546}"/>
               </a:ext>
             </a:extLst>
           </p:cNvPr>
@@ -2775,8 +2575,8 @@
         </p:nvSpPr>
         <p:spPr>
           <a:xfrm xmlns:a="http://schemas.openxmlformats.org/drawingml/2006/main">
-            <a:off x="609600" y="4619625"/>
-            <a:ext cx="10972800" cy="914400"/>
+            <a:off x="609600" y="4676775"/>
+            <a:ext cx="10972800" cy="1000125"/>
           </a:xfrm>
           <a:prstGeom xmlns:a="http://schemas.openxmlformats.org/drawingml/2006/main" prst="rect">
             <a:avLst/>
@@ -2793,7 +2593,7 @@
           <a:lstStyle xmlns:a="http://schemas.openxmlformats.org/drawingml/2006/main"/>
           <a:p xmlns:a="http://schemas.openxmlformats.org/drawingml/2006/main">
             <a:pPr>
-              <a:defRPr sz="2175" b="0">
+              <a:defRPr sz="2100" b="0">
                 <a:solidFill>
                   <a:srgbClr val="283D47"/>
                 </a:solidFill>
@@ -2803,7 +2603,7 @@
               </a:defRPr>
             </a:pPr>
             <a:r>
-              <a:rPr sz="2175" b="0">
+              <a:rPr sz="2100" b="0">
                 <a:solidFill>
                   <a:srgbClr val="283D47"/>
                 </a:solidFill>
@@ -2811,12 +2611,12 @@
                 <a:ea typeface="Arial"/>
                 <a:cs typeface="Arial"/>
               </a:rPr>
-              <a:t>Current boundary: descriptive counts and exploratory model sensitivity.</a:t>
+              <a:t>Available evidence: count trajectories and exploratory weather models.</a:t>
             </a:r>
           </a:p>
           <a:p xmlns:a="http://schemas.openxmlformats.org/drawingml/2006/main">
             <a:pPr>
-              <a:defRPr sz="2175" b="0">
+              <a:defRPr sz="2100" b="0">
                 <a:solidFill>
                   <a:srgbClr val="283D47"/>
                 </a:solidFill>
@@ -2826,7 +2626,7 @@
               </a:defRPr>
             </a:pPr>
             <a:r>
-              <a:rPr sz="2175" b="0">
+              <a:rPr sz="2100" b="0">
                 <a:solidFill>
                   <a:srgbClr val="283D47"/>
                 </a:solidFill>
@@ -2834,7 +2634,7 @@
                 <a:ea typeface="Arial"/>
                 <a:cs typeface="Arial"/>
               </a:rPr>
-              <a:t>COVID mechanisms and the causal target remain unresolved.</a:t>
+              <a:t>Clinical mechanisms, cohort incidence and causal COVID effects remain unresolved.</a:t>
             </a:r>
           </a:p>
         </p:txBody>
@@ -2842,7 +2642,7 @@
     </p:spTree>
     <p:extLst>
       <p:ext uri="{BB962C8B-B14F-4D97-AF65-F5344CB8AC3E}">
-        <p14:creationId xmlns:p14="http://schemas.microsoft.com/office/powerpoint/2010/main" val="864174205"/>
+        <p14:creationId xmlns:p14="http://schemas.microsoft.com/office/powerpoint/2010/main" val="357654640"/>
       </p:ext>
     </p:extLst>
   </p:cSld>
@@ -2870,10 +2670,10 @@
       </p:grpSpPr>
       <p:sp>
         <p:nvSpPr>
-          <p:cNvPr id="11" name="">
+          <p:cNvPr id="15" name="">
             <a:extLst xmlns:a="http://schemas.openxmlformats.org/drawingml/2006/main">
               <a:ext uri="{FF2B5EF4-FFF2-40B4-BE49-F238E27FC236}">
-                <a16:creationId xmlns:a16="http://schemas.microsoft.com/office/drawing/2014/main" id="{1EBF12D8-74C2-4DF4-BB77-728C6D6D362B}"/>
+                <a16:creationId xmlns:a16="http://schemas.microsoft.com/office/drawing/2014/main" id="{76D0F51D-AE4C-4820-9EB2-BED7DB41E227}"/>
               </a:ext>
             </a:extLst>
           </p:cNvPr>
@@ -2920,7 +2720,7 @@
                 <a:ea typeface="Arial"/>
                 <a:cs typeface="Arial"/>
               </a:rPr>
-              <a:t>Phase 2 begins with discriminating predictions</a:t>
+              <a:t>Next sequence and submission boundary</a:t>
             </a:r>
           </a:p>
         </p:txBody>
@@ -2930,7 +2730,7 @@
           <p:cNvPr id="2" name="">
             <a:extLst xmlns:a="http://schemas.openxmlformats.org/drawingml/2006/main">
               <a:ext uri="{FF2B5EF4-FFF2-40B4-BE49-F238E27FC236}">
-                <a16:creationId xmlns:a16="http://schemas.microsoft.com/office/drawing/2014/main" id="{D4AB54F2-181D-4945-87B1-63ACF061238F}"/>
+                <a16:creationId xmlns:a16="http://schemas.microsoft.com/office/drawing/2014/main" id="{9F527B30-D11C-44A6-AD05-A8207F9A5FD7}"/>
               </a:ext>
             </a:extLst>
           </p:cNvPr>
@@ -2942,7 +2742,7 @@
         <p:spPr>
           <a:xfrm xmlns:a="http://schemas.openxmlformats.org/drawingml/2006/main">
             <a:off x="609600" y="6448425"/>
-            <a:ext cx="6953250" cy="209550"/>
+            <a:ext cx="8572500" cy="209550"/>
           </a:xfrm>
           <a:prstGeom xmlns:a="http://schemas.openxmlformats.org/drawingml/2006/main" prst="rect">
             <a:avLst/>
@@ -2977,7 +2777,7 @@
                 <a:ea typeface="Arial"/>
                 <a:cs typeface="Arial"/>
               </a:rPr>
-              <a:t>LAIDLAW · INTERNAL RESEARCH STATE · 2 OCT 2026</a:t>
+              <a:t>LAIDLAW  INTERNAL RESEARCH STATE  2 OCT 2026</a:t>
             </a:r>
           </a:p>
         </p:txBody>
@@ -2987,7 +2787,7 @@
           <p:cNvPr id="3" name="">
             <a:extLst xmlns:a="http://schemas.openxmlformats.org/drawingml/2006/main">
               <a:ext uri="{FF2B5EF4-FFF2-40B4-BE49-F238E27FC236}">
-                <a16:creationId xmlns:a16="http://schemas.microsoft.com/office/drawing/2014/main" id="{42AB7D2A-0186-435C-84EF-861752357E4A}"/>
+                <a16:creationId xmlns:a16="http://schemas.microsoft.com/office/drawing/2014/main" id="{8457566B-2F9F-4568-B96D-302FFCD8F835}"/>
               </a:ext>
             </a:extLst>
           </p:cNvPr>
@@ -3044,7 +2844,7 @@
           <p:cNvPr id="4" name="">
             <a:extLst xmlns:a="http://schemas.openxmlformats.org/drawingml/2006/main">
               <a:ext uri="{FF2B5EF4-FFF2-40B4-BE49-F238E27FC236}">
-                <a16:creationId xmlns:a16="http://schemas.microsoft.com/office/drawing/2014/main" id="{894E022D-AB13-4B70-8337-10748C9B18F8}"/>
+                <a16:creationId xmlns:a16="http://schemas.microsoft.com/office/drawing/2014/main" id="{A50250CD-1E79-4DB9-9E58-30B66D5187A3}"/>
               </a:ext>
             </a:extLst>
           </p:cNvPr>
@@ -3091,7 +2891,7 @@
                 <a:ea typeface="Arial"/>
                 <a:cs typeface="Arial"/>
               </a:rPr>
-              <a:t>Sources: C08, C09, C13, C14, C19 · source links and limits in notes/register</a:t>
+              <a:t>Sources: journal, workflows. Links and scientific limits in notes.</a:t>
             </a:r>
           </a:p>
         </p:txBody>
@@ -3101,7 +2901,7 @@
           <p:cNvPr id="5" name="">
             <a:extLst xmlns:a="http://schemas.openxmlformats.org/drawingml/2006/main">
               <a:ext uri="{FF2B5EF4-FFF2-40B4-BE49-F238E27FC236}">
-                <a16:creationId xmlns:a16="http://schemas.microsoft.com/office/drawing/2014/main" id="{D5F5238F-D88C-47DA-98CD-91B310FE3727}"/>
+                <a16:creationId xmlns:a16="http://schemas.microsoft.com/office/drawing/2014/main" id="{F146BB80-9AD7-41A7-A7BF-D43FAA86297A}"/>
               </a:ext>
             </a:extLst>
           </p:cNvPr>
@@ -3112,8 +2912,8 @@
         </p:nvSpPr>
         <p:spPr>
           <a:xfrm xmlns:a="http://schemas.openxmlformats.org/drawingml/2006/main">
-            <a:off x="609600" y="1609725"/>
-            <a:ext cx="10972800" cy="381000"/>
+            <a:off x="609600" y="1504950"/>
+            <a:ext cx="10972800" cy="285750"/>
           </a:xfrm>
           <a:prstGeom xmlns:a="http://schemas.openxmlformats.org/drawingml/2006/main" prst="rect">
             <a:avLst/>
@@ -3130,7 +2930,7 @@
           <a:lstStyle xmlns:a="http://schemas.openxmlformats.org/drawingml/2006/main"/>
           <a:p xmlns:a="http://schemas.openxmlformats.org/drawingml/2006/main">
             <a:pPr>
-              <a:defRPr sz="2250" b="1">
+              <a:defRPr sz="1650" b="1">
                 <a:solidFill>
                   <a:srgbClr val="14685F"/>
                 </a:solidFill>
@@ -3140,7 +2940,7 @@
               </a:defRPr>
             </a:pPr>
             <a:r>
-              <a:rPr sz="2250" b="1">
+              <a:rPr sz="1650" b="1">
                 <a:solidFill>
                   <a:srgbClr val="14685F"/>
                 </a:solidFill>
@@ -3148,7 +2948,7 @@
                 <a:ea typeface="Arial"/>
                 <a:cs typeface="Arial"/>
               </a:rPr>
-              <a:t>NOW · Retain the recorded-count and sensitivity evidence</a:t>
+              <a:t>1  DATA AND NOVELTY</a:t>
             </a:r>
           </a:p>
         </p:txBody>
@@ -3158,7 +2958,7 @@
           <p:cNvPr id="6" name="">
             <a:extLst xmlns:a="http://schemas.openxmlformats.org/drawingml/2006/main">
               <a:ext uri="{FF2B5EF4-FFF2-40B4-BE49-F238E27FC236}">
-                <a16:creationId xmlns:a16="http://schemas.microsoft.com/office/drawing/2014/main" id="{71150E15-128C-4F92-B0FA-4C783A88C8E0}"/>
+                <a16:creationId xmlns:a16="http://schemas.microsoft.com/office/drawing/2014/main" id="{A4BD7EBA-0077-4F70-8E2B-F2CECCCF567F}"/>
               </a:ext>
             </a:extLst>
           </p:cNvPr>
@@ -3169,8 +2969,8 @@
         </p:nvSpPr>
         <p:spPr>
           <a:xfrm xmlns:a="http://schemas.openxmlformats.org/drawingml/2006/main">
-            <a:off x="609600" y="2105025"/>
-            <a:ext cx="10972800" cy="762000"/>
+            <a:off x="609600" y="1828800"/>
+            <a:ext cx="10972800" cy="476250"/>
           </a:xfrm>
           <a:prstGeom xmlns:a="http://schemas.openxmlformats.org/drawingml/2006/main" prst="rect">
             <a:avLst/>
@@ -3187,7 +2987,7 @@
           <a:lstStyle xmlns:a="http://schemas.openxmlformats.org/drawingml/2006/main"/>
           <a:p xmlns:a="http://schemas.openxmlformats.org/drawingml/2006/main">
             <a:pPr>
-              <a:defRPr sz="2025" b="0">
+              <a:defRPr sz="1950" b="0">
                 <a:solidFill>
                   <a:srgbClr val="283D47"/>
                 </a:solidFill>
@@ -3197,7 +2997,7 @@
               </a:defRPr>
             </a:pPr>
             <a:r>
-              <a:rPr sz="2025" b="0">
+              <a:rPr sz="1950" b="0">
                 <a:solidFill>
                   <a:srgbClr val="283D47"/>
                 </a:solidFill>
@@ -3205,30 +3005,7 @@
                 <a:ea typeface="Arial"/>
                 <a:cs typeface="Arial"/>
               </a:rPr>
-              <a:t>Freeze this reconstruction as a reviewable starting point. Resolve event construction,</a:t>
-            </a:r>
-          </a:p>
-          <a:p xmlns:a="http://schemas.openxmlformats.org/drawingml/2006/main">
-            <a:pPr>
-              <a:defRPr sz="2025" b="0">
-                <a:solidFill>
-                  <a:srgbClr val="283D47"/>
-                </a:solidFill>
-                <a:latin typeface="Arial"/>
-                <a:ea typeface="Arial"/>
-                <a:cs typeface="Arial"/>
-              </a:defRPr>
-            </a:pPr>
-            <a:r>
-              <a:rPr sz="2025" b="0">
-                <a:solidFill>
-                  <a:srgbClr val="283D47"/>
-                </a:solidFill>
-                <a:latin typeface="Arial"/>
-                <a:ea typeface="Arial"/>
-                <a:cs typeface="Arial"/>
-              </a:rPr>
-              <a:t>scientific target and document authority before another manuscript cycle.</a:t>
+              <a:t>Review request, verify schema and close the specific novelty question.</a:t>
             </a:r>
           </a:p>
         </p:txBody>
@@ -3238,7 +3015,7 @@
           <p:cNvPr id="7" name="">
             <a:extLst xmlns:a="http://schemas.openxmlformats.org/drawingml/2006/main">
               <a:ext uri="{FF2B5EF4-FFF2-40B4-BE49-F238E27FC236}">
-                <a16:creationId xmlns:a16="http://schemas.microsoft.com/office/drawing/2014/main" id="{08F8B42E-7A88-4C9A-86B5-4B2C2584A529}"/>
+                <a16:creationId xmlns:a16="http://schemas.microsoft.com/office/drawing/2014/main" id="{86593817-B58D-4CEA-A12D-932F222148F7}"/>
               </a:ext>
             </a:extLst>
           </p:cNvPr>
@@ -3249,8 +3026,8 @@
         </p:nvSpPr>
         <p:spPr>
           <a:xfrm xmlns:a="http://schemas.openxmlformats.org/drawingml/2006/main">
-            <a:off x="609600" y="3124200"/>
-            <a:ext cx="10972800" cy="381000"/>
+            <a:off x="609600" y="2362200"/>
+            <a:ext cx="10972800" cy="285750"/>
           </a:xfrm>
           <a:prstGeom xmlns:a="http://schemas.openxmlformats.org/drawingml/2006/main" prst="rect">
             <a:avLst/>
@@ -3267,7 +3044,7 @@
           <a:lstStyle xmlns:a="http://schemas.openxmlformats.org/drawingml/2006/main"/>
           <a:p xmlns:a="http://schemas.openxmlformats.org/drawingml/2006/main">
             <a:pPr>
-              <a:defRPr sz="2250" b="1">
+              <a:defRPr sz="1650" b="1">
                 <a:solidFill>
                   <a:srgbClr val="14685F"/>
                 </a:solidFill>
@@ -3277,7 +3054,7 @@
               </a:defRPr>
             </a:pPr>
             <a:r>
-              <a:rPr sz="2250" b="1">
+              <a:rPr sz="1650" b="1">
                 <a:solidFill>
                   <a:srgbClr val="14685F"/>
                 </a:solidFill>
@@ -3285,7 +3062,7 @@
                 <a:ea typeface="Arial"/>
                 <a:cs typeface="Arial"/>
               </a:rPr>
-              <a:t>IF EVIDENCE IS FEASIBLE · Design severe tests</a:t>
+              <a:t>2  DESIGN FREEZE</a:t>
             </a:r>
           </a:p>
         </p:txBody>
@@ -3295,7 +3072,7 @@
           <p:cNvPr id="8" name="">
             <a:extLst xmlns:a="http://schemas.openxmlformats.org/drawingml/2006/main">
               <a:ext uri="{FF2B5EF4-FFF2-40B4-BE49-F238E27FC236}">
-                <a16:creationId xmlns:a16="http://schemas.microsoft.com/office/drawing/2014/main" id="{549593C8-1603-4111-B529-D0233D977BAB}"/>
+                <a16:creationId xmlns:a16="http://schemas.microsoft.com/office/drawing/2014/main" id="{B1131DC1-8DE1-448C-90B5-43A9D1C0D41E}"/>
               </a:ext>
             </a:extLst>
           </p:cNvPr>
@@ -3306,8 +3083,8 @@
         </p:nvSpPr>
         <p:spPr>
           <a:xfrm xmlns:a="http://schemas.openxmlformats.org/drawingml/2006/main">
-            <a:off x="609600" y="3619500"/>
-            <a:ext cx="10972800" cy="762000"/>
+            <a:off x="609600" y="2686050"/>
+            <a:ext cx="10972800" cy="476250"/>
           </a:xfrm>
           <a:prstGeom xmlns:a="http://schemas.openxmlformats.org/drawingml/2006/main" prst="rect">
             <a:avLst/>
@@ -3324,7 +3101,7 @@
           <a:lstStyle xmlns:a="http://schemas.openxmlformats.org/drawingml/2006/main"/>
           <a:p xmlns:a="http://schemas.openxmlformats.org/drawingml/2006/main">
             <a:pPr>
-              <a:defRPr sz="2025" b="0">
+              <a:defRPr sz="1950" b="0">
                 <a:solidFill>
                   <a:srgbClr val="283D47"/>
                 </a:solidFill>
@@ -3334,7 +3111,7 @@
               </a:defRPr>
             </a:pPr>
             <a:r>
-              <a:rPr sz="2025" b="0">
+              <a:rPr sz="1950" b="0">
                 <a:solidFill>
                   <a:srgbClr val="283D47"/>
                 </a:solidFill>
@@ -3342,30 +3119,7 @@
                 <a:ea typeface="Arial"/>
                 <a:cs typeface="Arial"/>
               </a:rPr>
-              <a:t>Use a causal graph; state rival predictions, meaningful contrasts and rejection rules.</a:t>
-            </a:r>
-          </a:p>
-          <a:p xmlns:a="http://schemas.openxmlformats.org/drawingml/2006/main">
-            <a:pPr>
-              <a:defRPr sz="2025" b="0">
-                <a:solidFill>
-                  <a:srgbClr val="283D47"/>
-                </a:solidFill>
-                <a:latin typeface="Arial"/>
-                <a:ea typeface="Arial"/>
-                <a:cs typeface="Arial"/>
-              </a:defRPr>
-            </a:pPr>
-            <a:r>
-              <a:rPr sz="2025" b="0">
-                <a:solidFill>
-                  <a:srgbClr val="283D47"/>
-                </a:solidFill>
-                <a:latin typeface="Arial"/>
-                <a:ea typeface="Arial"/>
-                <a:cs typeface="Arial"/>
-              </a:rPr>
-              <a:t>Ask what the model fails to explain and whether the test can detect that failure.</a:t>
+              <a:t>Prespecify estimands, rivals, error-detection tests and validation before new fits.</a:t>
             </a:r>
           </a:p>
         </p:txBody>
@@ -3375,7 +3129,7 @@
           <p:cNvPr id="9" name="">
             <a:extLst xmlns:a="http://schemas.openxmlformats.org/drawingml/2006/main">
               <a:ext uri="{FF2B5EF4-FFF2-40B4-BE49-F238E27FC236}">
-                <a16:creationId xmlns:a16="http://schemas.microsoft.com/office/drawing/2014/main" id="{6E1A8E89-E81B-4D77-9608-2DC658DAA65D}"/>
+                <a16:creationId xmlns:a16="http://schemas.microsoft.com/office/drawing/2014/main" id="{B7B8DCB1-E2D2-4EF7-9C57-8A20CFCFEC7A}"/>
               </a:ext>
             </a:extLst>
           </p:cNvPr>
@@ -3386,8 +3140,8 @@
         </p:nvSpPr>
         <p:spPr>
           <a:xfrm xmlns:a="http://schemas.openxmlformats.org/drawingml/2006/main">
-            <a:off x="609600" y="4638675"/>
-            <a:ext cx="10972800" cy="381000"/>
+            <a:off x="609600" y="3219450"/>
+            <a:ext cx="10972800" cy="285750"/>
           </a:xfrm>
           <a:prstGeom xmlns:a="http://schemas.openxmlformats.org/drawingml/2006/main" prst="rect">
             <a:avLst/>
@@ -3404,9 +3158,9 @@
           <a:lstStyle xmlns:a="http://schemas.openxmlformats.org/drawingml/2006/main"/>
           <a:p xmlns:a="http://schemas.openxmlformats.org/drawingml/2006/main">
             <a:pPr>
-              <a:defRPr sz="2250" b="1">
-                <a:solidFill>
-                  <a:srgbClr val="8C4052"/>
+              <a:defRPr sz="1650" b="1">
+                <a:solidFill>
+                  <a:srgbClr val="14685F"/>
                 </a:solidFill>
                 <a:latin typeface="Arial"/>
                 <a:ea typeface="Arial"/>
@@ -3414,15 +3168,15 @@
               </a:defRPr>
             </a:pPr>
             <a:r>
-              <a:rPr sz="2250" b="1">
-                <a:solidFill>
-                  <a:srgbClr val="8C4052"/>
+              <a:rPr sz="1650" b="1">
+                <a:solidFill>
+                  <a:srgbClr val="14685F"/>
                 </a:solidFill>
                 <a:latin typeface="Arial"/>
                 <a:ea typeface="Arial"/>
                 <a:cs typeface="Arial"/>
               </a:rPr>
-              <a:t>IF RIVALS CANNOT BE SEPARATED · Narrow, pivot or stop</a:t>
+              <a:t>3  SECURE EXECUTION</a:t>
             </a:r>
           </a:p>
         </p:txBody>
@@ -3432,7 +3186,7 @@
           <p:cNvPr id="10" name="">
             <a:extLst xmlns:a="http://schemas.openxmlformats.org/drawingml/2006/main">
               <a:ext uri="{FF2B5EF4-FFF2-40B4-BE49-F238E27FC236}">
-                <a16:creationId xmlns:a16="http://schemas.microsoft.com/office/drawing/2014/main" id="{E88FF5F9-52D0-4CEB-AD21-31FC2678DD69}"/>
+                <a16:creationId xmlns:a16="http://schemas.microsoft.com/office/drawing/2014/main" id="{07E3099A-1827-42CB-8452-3BECD20FC809}"/>
               </a:ext>
             </a:extLst>
           </p:cNvPr>
@@ -3443,8 +3197,8 @@
         </p:nvSpPr>
         <p:spPr>
           <a:xfrm xmlns:a="http://schemas.openxmlformats.org/drawingml/2006/main">
-            <a:off x="609600" y="5133975"/>
-            <a:ext cx="10972800" cy="762000"/>
+            <a:off x="609600" y="3543300"/>
+            <a:ext cx="10972800" cy="476250"/>
           </a:xfrm>
           <a:prstGeom xmlns:a="http://schemas.openxmlformats.org/drawingml/2006/main" prst="rect">
             <a:avLst/>
@@ -3461,7 +3215,7 @@
           <a:lstStyle xmlns:a="http://schemas.openxmlformats.org/drawingml/2006/main"/>
           <a:p xmlns:a="http://schemas.openxmlformats.org/drawingml/2006/main">
             <a:pPr>
-              <a:defRPr sz="2025" b="0">
+              <a:defRPr sz="1950" b="0">
                 <a:solidFill>
                   <a:srgbClr val="283D47"/>
                 </a:solidFill>
@@ -3471,7 +3225,7 @@
               </a:defRPr>
             </a:pPr>
             <a:r>
-              <a:rPr sz="2025" b="0">
+              <a:rPr sz="1950" b="0">
                 <a:solidFill>
                   <a:srgbClr val="283D47"/>
                 </a:solidFill>
@@ -3479,14 +3233,48 @@
                 <a:ea typeface="Arial"/>
                 <a:cs typeface="Arial"/>
               </a:rPr>
-              <a:t>A progressive move gains new independent predictions. Rescuing a headline with</a:t>
-            </a:r>
-          </a:p>
+              <a:t>Run in the approved environment. Release reviewed aggregate outputs only.</a:t>
+            </a:r>
+          </a:p>
+        </p:txBody>
+      </p:sp>
+      <p:sp>
+        <p:nvSpPr>
+          <p:cNvPr id="11" name="">
+            <a:extLst xmlns:a="http://schemas.openxmlformats.org/drawingml/2006/main">
+              <a:ext uri="{FF2B5EF4-FFF2-40B4-BE49-F238E27FC236}">
+                <a16:creationId xmlns:a16="http://schemas.microsoft.com/office/drawing/2014/main" id="{022F57F5-8ED6-4710-BE2A-BCB3D4572E1E}"/>
+              </a:ext>
+            </a:extLst>
+          </p:cNvPr>
+          <p:cNvSpPr>
+            <a:spLocks xmlns:a="http://schemas.openxmlformats.org/drawingml/2006/main" noGrp="1"/>
+          </p:cNvSpPr>
+          <p:nvPr/>
+        </p:nvSpPr>
+        <p:spPr>
+          <a:xfrm xmlns:a="http://schemas.openxmlformats.org/drawingml/2006/main">
+            <a:off x="609600" y="4076700"/>
+            <a:ext cx="10972800" cy="285750"/>
+          </a:xfrm>
+          <a:prstGeom xmlns:a="http://schemas.openxmlformats.org/drawingml/2006/main" prst="rect">
+            <a:avLst/>
+          </a:prstGeom>
+          <a:noFill xmlns:a="http://schemas.openxmlformats.org/drawingml/2006/main"/>
+          <a:ln xmlns:a="http://schemas.openxmlformats.org/drawingml/2006/main" w="0">
+            <a:noFill/>
+          </a:ln>
+        </p:spPr>
+        <p:txBody>
+          <a:bodyPr xmlns:a="http://schemas.openxmlformats.org/drawingml/2006/main">
+            <a:noAutofit/>
+          </a:bodyPr>
+          <a:lstStyle xmlns:a="http://schemas.openxmlformats.org/drawingml/2006/main"/>
           <a:p xmlns:a="http://schemas.openxmlformats.org/drawingml/2006/main">
             <a:pPr>
-              <a:defRPr sz="2025" b="0">
-                <a:solidFill>
-                  <a:srgbClr val="283D47"/>
+              <a:defRPr sz="1650" b="1">
+                <a:solidFill>
+                  <a:srgbClr val="14685F"/>
                 </a:solidFill>
                 <a:latin typeface="Arial"/>
                 <a:ea typeface="Arial"/>
@@ -3494,15 +3282,186 @@
               </a:defRPr>
             </a:pPr>
             <a:r>
-              <a:rPr sz="2025" b="0">
+              <a:rPr sz="1650" b="1">
+                <a:solidFill>
+                  <a:srgbClr val="14685F"/>
+                </a:solidFill>
+                <a:latin typeface="Arial"/>
+                <a:ea typeface="Arial"/>
+                <a:cs typeface="Arial"/>
+              </a:rPr>
+              <a:t>4  INDEPENDENT CRITICISM</a:t>
+            </a:r>
+          </a:p>
+        </p:txBody>
+      </p:sp>
+      <p:sp>
+        <p:nvSpPr>
+          <p:cNvPr id="12" name="">
+            <a:extLst xmlns:a="http://schemas.openxmlformats.org/drawingml/2006/main">
+              <a:ext uri="{FF2B5EF4-FFF2-40B4-BE49-F238E27FC236}">
+                <a16:creationId xmlns:a16="http://schemas.microsoft.com/office/drawing/2014/main" id="{0B5D48AC-CAFF-460E-BA1F-88AF1EE24BC1}"/>
+              </a:ext>
+            </a:extLst>
+          </p:cNvPr>
+          <p:cNvSpPr>
+            <a:spLocks xmlns:a="http://schemas.openxmlformats.org/drawingml/2006/main" noGrp="1"/>
+          </p:cNvSpPr>
+          <p:nvPr/>
+        </p:nvSpPr>
+        <p:spPr>
+          <a:xfrm xmlns:a="http://schemas.openxmlformats.org/drawingml/2006/main">
+            <a:off x="609600" y="4400550"/>
+            <a:ext cx="10972800" cy="476250"/>
+          </a:xfrm>
+          <a:prstGeom xmlns:a="http://schemas.openxmlformats.org/drawingml/2006/main" prst="rect">
+            <a:avLst/>
+          </a:prstGeom>
+          <a:noFill xmlns:a="http://schemas.openxmlformats.org/drawingml/2006/main"/>
+          <a:ln xmlns:a="http://schemas.openxmlformats.org/drawingml/2006/main" w="0">
+            <a:noFill/>
+          </a:ln>
+        </p:spPr>
+        <p:txBody>
+          <a:bodyPr xmlns:a="http://schemas.openxmlformats.org/drawingml/2006/main">
+            <a:noAutofit/>
+          </a:bodyPr>
+          <a:lstStyle xmlns:a="http://schemas.openxmlformats.org/drawingml/2006/main"/>
+          <a:p xmlns:a="http://schemas.openxmlformats.org/drawingml/2006/main">
+            <a:pPr>
+              <a:defRPr sz="1950" b="0">
                 <a:solidFill>
                   <a:srgbClr val="283D47"/>
                 </a:solidFill>
                 <a:latin typeface="Arial"/>
                 <a:ea typeface="Arial"/>
                 <a:cs typeface="Arial"/>
+              </a:defRPr>
+            </a:pPr>
+            <a:r>
+              <a:rPr sz="1950" b="0">
+                <a:solidFill>
+                  <a:srgbClr val="283D47"/>
+                </a:solidFill>
+                <a:latin typeface="Arial"/>
+                <a:ea typeface="Arial"/>
+                <a:cs typeface="Arial"/>
               </a:rPr>
-              <a:t>another preferred fit is not evidence of progress. Gate 3 remains human-owned.</a:t>
+              <a:t>Review identifiability, calibration, missingness and discordant results.</a:t>
+            </a:r>
+          </a:p>
+        </p:txBody>
+      </p:sp>
+      <p:sp>
+        <p:nvSpPr>
+          <p:cNvPr id="13" name="">
+            <a:extLst xmlns:a="http://schemas.openxmlformats.org/drawingml/2006/main">
+              <a:ext uri="{FF2B5EF4-FFF2-40B4-BE49-F238E27FC236}">
+                <a16:creationId xmlns:a16="http://schemas.microsoft.com/office/drawing/2014/main" id="{B2D1A143-2F11-4132-A256-7E7A4B806F92}"/>
+              </a:ext>
+            </a:extLst>
+          </p:cNvPr>
+          <p:cNvSpPr>
+            <a:spLocks xmlns:a="http://schemas.openxmlformats.org/drawingml/2006/main" noGrp="1"/>
+          </p:cNvSpPr>
+          <p:nvPr/>
+        </p:nvSpPr>
+        <p:spPr>
+          <a:xfrm xmlns:a="http://schemas.openxmlformats.org/drawingml/2006/main">
+            <a:off x="609600" y="4933950"/>
+            <a:ext cx="10972800" cy="285750"/>
+          </a:xfrm>
+          <a:prstGeom xmlns:a="http://schemas.openxmlformats.org/drawingml/2006/main" prst="rect">
+            <a:avLst/>
+          </a:prstGeom>
+          <a:noFill xmlns:a="http://schemas.openxmlformats.org/drawingml/2006/main"/>
+          <a:ln xmlns:a="http://schemas.openxmlformats.org/drawingml/2006/main" w="0">
+            <a:noFill/>
+          </a:ln>
+        </p:spPr>
+        <p:txBody>
+          <a:bodyPr xmlns:a="http://schemas.openxmlformats.org/drawingml/2006/main">
+            <a:noAutofit/>
+          </a:bodyPr>
+          <a:lstStyle xmlns:a="http://schemas.openxmlformats.org/drawingml/2006/main"/>
+          <a:p xmlns:a="http://schemas.openxmlformats.org/drawingml/2006/main">
+            <a:pPr>
+              <a:defRPr sz="1650" b="1">
+                <a:solidFill>
+                  <a:srgbClr val="14685F"/>
+                </a:solidFill>
+                <a:latin typeface="Arial"/>
+                <a:ea typeface="Arial"/>
+                <a:cs typeface="Arial"/>
+              </a:defRPr>
+            </a:pPr>
+            <a:r>
+              <a:rPr sz="1650" b="1">
+                <a:solidFill>
+                  <a:srgbClr val="14685F"/>
+                </a:solidFill>
+                <a:latin typeface="Arial"/>
+                <a:ea typeface="Arial"/>
+                <a:cs typeface="Arial"/>
+              </a:rPr>
+              <a:t>5  MANUSCRIPT AND VENUE</a:t>
+            </a:r>
+          </a:p>
+        </p:txBody>
+      </p:sp>
+      <p:sp>
+        <p:nvSpPr>
+          <p:cNvPr id="14" name="">
+            <a:extLst xmlns:a="http://schemas.openxmlformats.org/drawingml/2006/main">
+              <a:ext uri="{FF2B5EF4-FFF2-40B4-BE49-F238E27FC236}">
+                <a16:creationId xmlns:a16="http://schemas.microsoft.com/office/drawing/2014/main" id="{FFCE6984-8F82-42CD-852D-3D0329A221EF}"/>
+              </a:ext>
+            </a:extLst>
+          </p:cNvPr>
+          <p:cNvSpPr>
+            <a:spLocks xmlns:a="http://schemas.openxmlformats.org/drawingml/2006/main" noGrp="1"/>
+          </p:cNvSpPr>
+          <p:nvPr/>
+        </p:nvSpPr>
+        <p:spPr>
+          <a:xfrm xmlns:a="http://schemas.openxmlformats.org/drawingml/2006/main">
+            <a:off x="609600" y="5257800"/>
+            <a:ext cx="10972800" cy="476250"/>
+          </a:xfrm>
+          <a:prstGeom xmlns:a="http://schemas.openxmlformats.org/drawingml/2006/main" prst="rect">
+            <a:avLst/>
+          </a:prstGeom>
+          <a:noFill xmlns:a="http://schemas.openxmlformats.org/drawingml/2006/main"/>
+          <a:ln xmlns:a="http://schemas.openxmlformats.org/drawingml/2006/main" w="0">
+            <a:noFill/>
+          </a:ln>
+        </p:spPr>
+        <p:txBody>
+          <a:bodyPr xmlns:a="http://schemas.openxmlformats.org/drawingml/2006/main">
+            <a:noAutofit/>
+          </a:bodyPr>
+          <a:lstStyle xmlns:a="http://schemas.openxmlformats.org/drawingml/2006/main"/>
+          <a:p xmlns:a="http://schemas.openxmlformats.org/drawingml/2006/main">
+            <a:pPr>
+              <a:defRPr sz="1950" b="0">
+                <a:solidFill>
+                  <a:srgbClr val="283D47"/>
+                </a:solidFill>
+                <a:latin typeface="Arial"/>
+                <a:ea typeface="Arial"/>
+                <a:cs typeface="Arial"/>
+              </a:defRPr>
+            </a:pPr>
+            <a:r>
+              <a:rPr sz="1950" b="0">
+                <a:solidFill>
+                  <a:srgbClr val="283D47"/>
+                </a:solidFill>
+                <a:latin typeface="Arial"/>
+                <a:ea typeface="Arial"/>
+                <a:cs typeface="Arial"/>
+              </a:rPr>
+              <a:t>Complete human ethics and authorship facts, then select the journal from evidence.</a:t>
             </a:r>
           </a:p>
         </p:txBody>
@@ -3510,7 +3469,7 @@
     </p:spTree>
     <p:extLst>
       <p:ext uri="{BB962C8B-B14F-4D97-AF65-F5344CB8AC3E}">
-        <p14:creationId xmlns:p14="http://schemas.microsoft.com/office/powerpoint/2010/main" val="1486114901"/>
+        <p14:creationId xmlns:p14="http://schemas.microsoft.com/office/powerpoint/2010/main" val="566572908"/>
       </p:ext>
     </p:extLst>
   </p:cSld>
@@ -3538,10 +3497,10 @@
       </p:grpSpPr>
       <p:sp>
         <p:nvSpPr>
-          <p:cNvPr id="11" name="">
+          <p:cNvPr id="7" name="">
             <a:extLst xmlns:a="http://schemas.openxmlformats.org/drawingml/2006/main">
               <a:ext uri="{FF2B5EF4-FFF2-40B4-BE49-F238E27FC236}">
-                <a16:creationId xmlns:a16="http://schemas.microsoft.com/office/drawing/2014/main" id="{2AA1D80D-4F3F-457A-A1F5-78ECD39796EE}"/>
+                <a16:creationId xmlns:a16="http://schemas.microsoft.com/office/drawing/2014/main" id="{948ED8E0-AE76-42B1-AD26-B3E5132856DD}"/>
               </a:ext>
             </a:extLst>
           </p:cNvPr>
@@ -3588,7 +3547,7 @@
                 <a:ea typeface="Arial"/>
                 <a:cs typeface="Arial"/>
               </a:rPr>
-              <a:t>The outcome is a recorded first event</a:t>
+              <a:t>What the present outcome records</a:t>
             </a:r>
           </a:p>
         </p:txBody>
@@ -3598,7 +3557,7 @@
           <p:cNvPr id="2" name="">
             <a:extLst xmlns:a="http://schemas.openxmlformats.org/drawingml/2006/main">
               <a:ext uri="{FF2B5EF4-FFF2-40B4-BE49-F238E27FC236}">
-                <a16:creationId xmlns:a16="http://schemas.microsoft.com/office/drawing/2014/main" id="{670ECBC3-C27D-44CE-80BD-EB7F6D07F307}"/>
+                <a16:creationId xmlns:a16="http://schemas.microsoft.com/office/drawing/2014/main" id="{A12F6ED8-4A1E-4D62-9878-C59177739E89}"/>
               </a:ext>
             </a:extLst>
           </p:cNvPr>
@@ -3610,7 +3569,7 @@
         <p:spPr>
           <a:xfrm xmlns:a="http://schemas.openxmlformats.org/drawingml/2006/main">
             <a:off x="609600" y="6448425"/>
-            <a:ext cx="6953250" cy="209550"/>
+            <a:ext cx="8572500" cy="209550"/>
           </a:xfrm>
           <a:prstGeom xmlns:a="http://schemas.openxmlformats.org/drawingml/2006/main" prst="rect">
             <a:avLst/>
@@ -3645,7 +3604,7 @@
                 <a:ea typeface="Arial"/>
                 <a:cs typeface="Arial"/>
               </a:rPr>
-              <a:t>LAIDLAW · INTERNAL RESEARCH STATE · 2 OCT 2026</a:t>
+              <a:t>LAIDLAW  INTERNAL RESEARCH STATE  2 OCT 2026</a:t>
             </a:r>
           </a:p>
         </p:txBody>
@@ -3655,7 +3614,7 @@
           <p:cNvPr id="3" name="">
             <a:extLst xmlns:a="http://schemas.openxmlformats.org/drawingml/2006/main">
               <a:ext uri="{FF2B5EF4-FFF2-40B4-BE49-F238E27FC236}">
-                <a16:creationId xmlns:a16="http://schemas.microsoft.com/office/drawing/2014/main" id="{6F2A19ED-8295-44E2-A405-2A717E889179}"/>
+                <a16:creationId xmlns:a16="http://schemas.microsoft.com/office/drawing/2014/main" id="{76A8D682-2CB7-4A6F-8D51-FC703CAF3950}"/>
               </a:ext>
             </a:extLst>
           </p:cNvPr>
@@ -3712,7 +3671,7 @@
           <p:cNvPr id="4" name="">
             <a:extLst xmlns:a="http://schemas.openxmlformats.org/drawingml/2006/main">
               <a:ext uri="{FF2B5EF4-FFF2-40B4-BE49-F238E27FC236}">
-                <a16:creationId xmlns:a16="http://schemas.microsoft.com/office/drawing/2014/main" id="{987BA2FA-402D-461F-BBC0-4423F236EC35}"/>
+                <a16:creationId xmlns:a16="http://schemas.microsoft.com/office/drawing/2014/main" id="{09042396-0006-4116-8023-037D1F3B7B69}"/>
               </a:ext>
             </a:extLst>
           </p:cNvPr>
@@ -3759,17 +3718,336 @@
                 <a:ea typeface="Arial"/>
                 <a:cs typeface="Arial"/>
               </a:rPr>
-              <a:t>Sources: C02, C13, C14 · source links and limits in notes/register</a:t>
-            </a:r>
-          </a:p>
-        </p:txBody>
-      </p:sp>
-      <p:sp>
-        <p:nvSpPr>
-          <p:cNvPr id="5" name="">
+              <a:t>Sources: receipt. Links and scientific limits in notes.</a:t>
+            </a:r>
+          </a:p>
+        </p:txBody>
+      </p:sp>
+      <p:graphicFrame>
+        <p:nvGraphicFramePr>
+          <p:cNvPr id="11" name=""/>
+          <p:cNvGraphicFramePr/>
+          <p:nvPr/>
+        </p:nvGraphicFramePr>
+        <p:xfrm>
+          <a:off xmlns:a="http://schemas.openxmlformats.org/drawingml/2006/main" x="609600" y="1590675"/>
+          <a:ext xmlns:a="http://schemas.openxmlformats.org/drawingml/2006/main" cx="10972800" cy="3381375"/>
+        </p:xfrm>
+        <a:graphic xmlns:a="http://schemas.openxmlformats.org/drawingml/2006/main">
+          <a:graphicData uri="http://schemas.openxmlformats.org/drawingml/2006/table">
+            <a:tbl>
+              <a:tblPr/>
+              <a:tblGrid>
+                <a:gridCol w="2143125"/>
+                <a:gridCol w="4352925"/>
+                <a:gridCol w="4476750"/>
+              </a:tblGrid>
+              <a:tr h="845344">
+                <a:tc>
+                  <a:txBody>
+                    <a:bodyPr/>
+                    <a:lstStyle/>
+                    <a:p>
+                      <a:r>
+                        <a:rPr sz="1875" b="1">
+                          <a:solidFill>
+                            <a:srgbClr val="FFFFFF"/>
+                          </a:solidFill>
+                          <a:latin typeface="Arial"/>
+                          <a:ea typeface="Arial"/>
+                          <a:cs typeface="Arial"/>
+                        </a:rPr>
+                        <a:t>Component</a:t>
+                      </a:r>
+                    </a:p>
+                  </a:txBody>
+                  <a:tcPr marL="133350" marR="133350" marT="114300" marB="95250" anchor="ctr">
+                    <a:solidFill>
+                      <a:srgbClr val="183343"/>
+                    </a:solidFill>
+                  </a:tcPr>
+                </a:tc>
+                <a:tc>
+                  <a:txBody>
+                    <a:bodyPr/>
+                    <a:lstStyle/>
+                    <a:p>
+                      <a:r>
+                        <a:rPr sz="1875" b="1">
+                          <a:solidFill>
+                            <a:srgbClr val="FFFFFF"/>
+                          </a:solidFill>
+                          <a:latin typeface="Arial"/>
+                          <a:ea typeface="Arial"/>
+                          <a:cs typeface="Arial"/>
+                        </a:rPr>
+                        <a:t>Current evidence</a:t>
+                      </a:r>
+                    </a:p>
+                  </a:txBody>
+                  <a:tcPr marL="133350" marR="133350" marT="114300" marB="95250" anchor="ctr">
+                    <a:solidFill>
+                      <a:srgbClr val="183343"/>
+                    </a:solidFill>
+                  </a:tcPr>
+                </a:tc>
+                <a:tc>
+                  <a:txBody>
+                    <a:bodyPr/>
+                    <a:lstStyle/>
+                    <a:p>
+                      <a:r>
+                        <a:rPr sz="1875" b="1">
+                          <a:solidFill>
+                            <a:srgbClr val="FFFFFF"/>
+                          </a:solidFill>
+                          <a:latin typeface="Arial"/>
+                          <a:ea typeface="Arial"/>
+                          <a:cs typeface="Arial"/>
+                        </a:rPr>
+                        <a:t>Boundary</a:t>
+                      </a:r>
+                    </a:p>
+                  </a:txBody>
+                  <a:tcPr marL="133350" marR="133350" marT="114300" marB="95250" anchor="ctr">
+                    <a:solidFill>
+                      <a:srgbClr val="183343"/>
+                    </a:solidFill>
+                  </a:tcPr>
+                </a:tc>
+              </a:tr>
+              <a:tr h="845344">
+                <a:tc>
+                  <a:txBody>
+                    <a:bodyPr/>
+                    <a:lstStyle/>
+                    <a:p>
+                      <a:r>
+                        <a:rPr sz="1875">
+                          <a:solidFill>
+                            <a:srgbClr val="283D47"/>
+                          </a:solidFill>
+                          <a:latin typeface="Arial"/>
+                          <a:ea typeface="Arial"/>
+                          <a:cs typeface="Arial"/>
+                        </a:rPr>
+                        <a:t>Population</a:t>
+                      </a:r>
+                    </a:p>
+                  </a:txBody>
+                  <a:tcPr marL="133350" marR="133350" marT="114300" marB="95250" anchor="ctr">
+                    <a:solidFill>
+                      <a:srgbClr val="FFFFFF"/>
+                    </a:solidFill>
+                  </a:tcPr>
+                </a:tc>
+                <a:tc>
+                  <a:txBody>
+                    <a:bodyPr/>
+                    <a:lstStyle/>
+                    <a:p>
+                      <a:r>
+                        <a:rPr sz="1875">
+                          <a:solidFill>
+                            <a:srgbClr val="283D47"/>
+                          </a:solidFill>
+                          <a:latin typeface="Arial"/>
+                          <a:ea typeface="Arial"/>
+                          <a:cs typeface="Arial"/>
+                        </a:rPr>
+                        <a:t>T2D and/or hypertension diagnosed during 2013-2023</a:t>
+                      </a:r>
+                    </a:p>
+                  </a:txBody>
+                  <a:tcPr marL="133350" marR="133350" marT="114300" marB="95250" anchor="ctr">
+                    <a:solidFill>
+                      <a:srgbClr val="FFFFFF"/>
+                    </a:solidFill>
+                  </a:tcPr>
+                </a:tc>
+                <a:tc>
+                  <a:txBody>
+                    <a:bodyPr/>
+                    <a:lstStyle/>
+                    <a:p>
+                      <a:r>
+                        <a:rPr sz="1875">
+                          <a:solidFill>
+                            <a:srgbClr val="283D47"/>
+                          </a:solidFill>
+                          <a:latin typeface="Arial"/>
+                          <a:ea typeface="Arial"/>
+                          <a:cs typeface="Arial"/>
+                        </a:rPr>
+                        <a:t>Entry, exits and risk-set construction need query confirmation</a:t>
+                      </a:r>
+                    </a:p>
+                  </a:txBody>
+                  <a:tcPr marL="133350" marR="133350" marT="114300" marB="95250" anchor="ctr">
+                    <a:solidFill>
+                      <a:srgbClr val="FFFFFF"/>
+                    </a:solidFill>
+                  </a:tcPr>
+                </a:tc>
+              </a:tr>
+              <a:tr h="845344">
+                <a:tc>
+                  <a:txBody>
+                    <a:bodyPr/>
+                    <a:lstStyle/>
+                    <a:p>
+                      <a:r>
+                        <a:rPr sz="1875">
+                          <a:solidFill>
+                            <a:srgbClr val="283D47"/>
+                          </a:solidFill>
+                          <a:latin typeface="Arial"/>
+                          <a:ea typeface="Arial"/>
+                          <a:cs typeface="Arial"/>
+                        </a:rPr>
+                        <a:t>Event</a:t>
+                      </a:r>
+                    </a:p>
+                  </a:txBody>
+                  <a:tcPr marL="133350" marR="133350" marT="114300" marB="95250" anchor="ctr">
+                    <a:solidFill>
+                      <a:srgbClr val="FFFFFF"/>
+                    </a:solidFill>
+                  </a:tcPr>
+                </a:tc>
+                <a:tc>
+                  <a:txBody>
+                    <a:bodyPr/>
+                    <a:lstStyle/>
+                    <a:p>
+                      <a:r>
+                        <a:rPr sz="1875">
+                          <a:solidFill>
+                            <a:srgbClr val="283D47"/>
+                          </a:solidFill>
+                          <a:latin typeface="Arial"/>
+                          <a:ea typeface="Arial"/>
+                          <a:cs typeface="Arial"/>
+                        </a:rPr>
+                        <a:t>First recorded hospitalisation after first CHD/HF diagnosis</a:t>
+                      </a:r>
+                    </a:p>
+                  </a:txBody>
+                  <a:tcPr marL="133350" marR="133350" marT="114300" marB="95250" anchor="ctr">
+                    <a:solidFill>
+                      <a:srgbClr val="FFFFFF"/>
+                    </a:solidFill>
+                  </a:tcPr>
+                </a:tc>
+                <a:tc>
+                  <a:txBody>
+                    <a:bodyPr/>
+                    <a:lstStyle/>
+                    <a:p>
+                      <a:r>
+                        <a:rPr sz="1875">
+                          <a:solidFill>
+                            <a:srgbClr val="283D47"/>
+                          </a:solidFill>
+                          <a:latin typeface="Arial"/>
+                          <a:ea typeface="Arial"/>
+                          <a:cs typeface="Arial"/>
+                        </a:rPr>
+                        <a:t>Admission cause is unavailable</a:t>
+                      </a:r>
+                    </a:p>
+                  </a:txBody>
+                  <a:tcPr marL="133350" marR="133350" marT="114300" marB="95250" anchor="ctr">
+                    <a:solidFill>
+                      <a:srgbClr val="FFFFFF"/>
+                    </a:solidFill>
+                  </a:tcPr>
+                </a:tc>
+              </a:tr>
+              <a:tr h="845344">
+                <a:tc>
+                  <a:txBody>
+                    <a:bodyPr/>
+                    <a:lstStyle/>
+                    <a:p>
+                      <a:r>
+                        <a:rPr sz="1875">
+                          <a:solidFill>
+                            <a:srgbClr val="283D47"/>
+                          </a:solidFill>
+                          <a:latin typeface="Arial"/>
+                          <a:ea typeface="Arial"/>
+                          <a:cs typeface="Arial"/>
+                        </a:rPr>
+                        <a:t>Scale</a:t>
+                      </a:r>
+                    </a:p>
+                  </a:txBody>
+                  <a:tcPr marL="133350" marR="133350" marT="114300" marB="95250" anchor="ctr">
+                    <a:solidFill>
+                      <a:srgbClr val="FFFFFF"/>
+                    </a:solidFill>
+                  </a:tcPr>
+                </a:tc>
+                <a:tc>
+                  <a:txBody>
+                    <a:bodyPr/>
+                    <a:lstStyle/>
+                    <a:p>
+                      <a:r>
+                        <a:rPr sz="1875">
+                          <a:solidFill>
+                            <a:srgbClr val="283D47"/>
+                          </a:solidFill>
+                          <a:latin typeface="Arial"/>
+                          <a:ea typeface="Arial"/>
+                          <a:cs typeface="Arial"/>
+                        </a:rPr>
+                        <a:t>132 territory-month counts per outcome</a:t>
+                      </a:r>
+                    </a:p>
+                  </a:txBody>
+                  <a:tcPr marL="133350" marR="133350" marT="114300" marB="95250" anchor="ctr">
+                    <a:solidFill>
+                      <a:srgbClr val="FFFFFF"/>
+                    </a:solidFill>
+                  </a:tcPr>
+                </a:tc>
+                <a:tc>
+                  <a:txBody>
+                    <a:bodyPr/>
+                    <a:lstStyle/>
+                    <a:p>
+                      <a:r>
+                        <a:rPr sz="1875">
+                          <a:solidFill>
+                            <a:srgbClr val="283D47"/>
+                          </a:solidFill>
+                          <a:latin typeface="Arial"/>
+                          <a:ea typeface="Arial"/>
+                          <a:cs typeface="Arial"/>
+                        </a:rPr>
+                        <a:t>No linked clinical measurements or eligible person-time</a:t>
+                      </a:r>
+                    </a:p>
+                  </a:txBody>
+                  <a:tcPr marL="133350" marR="133350" marT="114300" marB="95250" anchor="ctr">
+                    <a:solidFill>
+                      <a:srgbClr val="FFFFFF"/>
+                    </a:solidFill>
+                  </a:tcPr>
+                </a:tc>
+              </a:tr>
+            </a:tbl>
+          </a:graphicData>
+        </a:graphic>
+      </p:graphicFrame>
+      <p:sp>
+        <p:nvSpPr>
+          <p:cNvPr id="6" name="">
             <a:extLst xmlns:a="http://schemas.openxmlformats.org/drawingml/2006/main">
               <a:ext uri="{FF2B5EF4-FFF2-40B4-BE49-F238E27FC236}">
-                <a16:creationId xmlns:a16="http://schemas.microsoft.com/office/drawing/2014/main" id="{F85E75E3-89A5-456E-B92B-38C3A3A813DD}"/>
+                <a16:creationId xmlns:a16="http://schemas.microsoft.com/office/drawing/2014/main" id="{C6AE45A0-13A4-4858-B3EF-A2E9EB9E37F7}"/>
               </a:ext>
             </a:extLst>
           </p:cNvPr>
@@ -3780,8 +4058,8 @@
         </p:nvSpPr>
         <p:spPr>
           <a:xfrm xmlns:a="http://schemas.openxmlformats.org/drawingml/2006/main">
-            <a:off x="609600" y="1552575"/>
-            <a:ext cx="5048250" cy="381000"/>
+            <a:off x="609600" y="5276850"/>
+            <a:ext cx="10972800" cy="723900"/>
           </a:xfrm>
           <a:prstGeom xmlns:a="http://schemas.openxmlformats.org/drawingml/2006/main" prst="rect">
             <a:avLst/>
@@ -3798,7 +4076,7 @@
           <a:lstStyle xmlns:a="http://schemas.openxmlformats.org/drawingml/2006/main"/>
           <a:p xmlns:a="http://schemas.openxmlformats.org/drawingml/2006/main">
             <a:pPr>
-              <a:defRPr sz="1650" b="1">
+              <a:defRPr sz="2025" b="0">
                 <a:solidFill>
                   <a:srgbClr val="14685F"/>
                 </a:solidFill>
@@ -3808,7 +4086,7 @@
               </a:defRPr>
             </a:pPr>
             <a:r>
-              <a:rPr sz="1650" b="1">
+              <a:rPr sz="2025" b="0">
                 <a:solidFill>
                   <a:srgbClr val="14685F"/>
                 </a:solidFill>
@@ -3816,48 +4094,14 @@
                 <a:ea typeface="Arial"/>
                 <a:cs typeface="Arial"/>
               </a:rPr>
-              <a:t>AVAILABLE IN THE PUBLIC RECORD</a:t>
-            </a:r>
-          </a:p>
-        </p:txBody>
-      </p:sp>
-      <p:sp>
-        <p:nvSpPr>
-          <p:cNvPr id="6" name="">
-            <a:extLst xmlns:a="http://schemas.openxmlformats.org/drawingml/2006/main">
-              <a:ext uri="{FF2B5EF4-FFF2-40B4-BE49-F238E27FC236}">
-                <a16:creationId xmlns:a16="http://schemas.microsoft.com/office/drawing/2014/main" id="{23E0AE98-2FD1-44BE-92FF-2734C20CABEA}"/>
-              </a:ext>
-            </a:extLst>
-          </p:cNvPr>
-          <p:cNvSpPr>
-            <a:spLocks xmlns:a="http://schemas.openxmlformats.org/drawingml/2006/main" noGrp="1"/>
-          </p:cNvSpPr>
-          <p:nvPr/>
-        </p:nvSpPr>
-        <p:spPr>
-          <a:xfrm xmlns:a="http://schemas.openxmlformats.org/drawingml/2006/main">
-            <a:off x="609600" y="2143125"/>
-            <a:ext cx="5095875" cy="1619250"/>
-          </a:xfrm>
-          <a:prstGeom xmlns:a="http://schemas.openxmlformats.org/drawingml/2006/main" prst="rect">
-            <a:avLst/>
-          </a:prstGeom>
-          <a:noFill xmlns:a="http://schemas.openxmlformats.org/drawingml/2006/main"/>
-          <a:ln xmlns:a="http://schemas.openxmlformats.org/drawingml/2006/main" w="0">
-            <a:noFill/>
-          </a:ln>
-        </p:spPr>
-        <p:txBody>
-          <a:bodyPr xmlns:a="http://schemas.openxmlformats.org/drawingml/2006/main">
-            <a:noAutofit/>
-          </a:bodyPr>
-          <a:lstStyle xmlns:a="http://schemas.openxmlformats.org/drawingml/2006/main"/>
+              <a:t>An underlying clinical change, a care-use change or an extraction change</a:t>
+            </a:r>
+          </a:p>
           <a:p xmlns:a="http://schemas.openxmlformats.org/drawingml/2006/main">
             <a:pPr>
-              <a:defRPr sz="2175" b="0">
-                <a:solidFill>
-                  <a:srgbClr val="283D47"/>
+              <a:defRPr sz="2025" b="0">
+                <a:solidFill>
+                  <a:srgbClr val="14685F"/>
                 </a:solidFill>
                 <a:latin typeface="Arial"/>
                 <a:ea typeface="Arial"/>
@@ -3865,450 +4109,15 @@
               </a:defRPr>
             </a:pPr>
             <a:r>
-              <a:rPr sz="2175" b="0">
-                <a:solidFill>
-                  <a:srgbClr val="283D47"/>
+              <a:rPr sz="2025" b="0">
+                <a:solidFill>
+                  <a:srgbClr val="14685F"/>
                 </a:solidFill>
                 <a:latin typeface="Arial"/>
                 <a:ea typeface="Arial"/>
                 <a:cs typeface="Arial"/>
               </a:rPr>
-              <a:t>CHD and HF · territory-month</a:t>
-            </a:r>
-          </a:p>
-          <a:p xmlns:a="http://schemas.openxmlformats.org/drawingml/2006/main">
-            <a:pPr>
-              <a:defRPr sz="2175" b="0">
-                <a:solidFill>
-                  <a:srgbClr val="283D47"/>
-                </a:solidFill>
-                <a:latin typeface="Arial"/>
-                <a:ea typeface="Arial"/>
-                <a:cs typeface="Arial"/>
-              </a:defRPr>
-            </a:pPr>
-            <a:r>
-              <a:rPr sz="2175" b="0">
-                <a:solidFill>
-                  <a:srgbClr val="283D47"/>
-                </a:solidFill>
-                <a:latin typeface="Arial"/>
-                <a:ea typeface="Arial"/>
-                <a:cs typeface="Arial"/>
-              </a:rPr>
-              <a:t>T2D and/or hypertension population</a:t>
-            </a:r>
-          </a:p>
-          <a:p xmlns:a="http://schemas.openxmlformats.org/drawingml/2006/main">
-            <a:pPr>
-              <a:defRPr sz="2175" b="0">
-                <a:solidFill>
-                  <a:srgbClr val="283D47"/>
-                </a:solidFill>
-                <a:latin typeface="Arial"/>
-                <a:ea typeface="Arial"/>
-                <a:cs typeface="Arial"/>
-              </a:defRPr>
-            </a:pPr>
-            <a:r>
-              <a:rPr sz="2175" b="0">
-                <a:solidFill>
-                  <a:srgbClr val="283D47"/>
-                </a:solidFill>
-                <a:latin typeface="Arial"/>
-                <a:ea typeface="Arial"/>
-                <a:cs typeface="Arial"/>
-              </a:rPr>
-              <a:t>January 2013–December 2023</a:t>
-            </a:r>
-          </a:p>
-          <a:p xmlns:a="http://schemas.openxmlformats.org/drawingml/2006/main">
-            <a:pPr>
-              <a:defRPr sz="2175" b="0">
-                <a:solidFill>
-                  <a:srgbClr val="283D47"/>
-                </a:solidFill>
-                <a:latin typeface="Arial"/>
-                <a:ea typeface="Arial"/>
-                <a:cs typeface="Arial"/>
-              </a:defRPr>
-            </a:pPr>
-            <a:r>
-              <a:rPr sz="2175" b="0">
-                <a:solidFill>
-                  <a:srgbClr val="283D47"/>
-                </a:solidFill>
-                <a:latin typeface="Arial"/>
-                <a:ea typeface="Arial"/>
-                <a:cs typeface="Arial"/>
-              </a:rPr>
-              <a:t>132 months per outcome</a:t>
-            </a:r>
-          </a:p>
-        </p:txBody>
-      </p:sp>
-      <p:sp>
-        <p:nvSpPr>
-          <p:cNvPr id="7" name="">
-            <a:extLst xmlns:a="http://schemas.openxmlformats.org/drawingml/2006/main">
-              <a:ext uri="{FF2B5EF4-FFF2-40B4-BE49-F238E27FC236}">
-                <a16:creationId xmlns:a16="http://schemas.microsoft.com/office/drawing/2014/main" id="{5D3D9B82-B32E-4A8B-9262-77223922E235}"/>
-              </a:ext>
-            </a:extLst>
-          </p:cNvPr>
-          <p:cNvSpPr>
-            <a:spLocks xmlns:a="http://schemas.openxmlformats.org/drawingml/2006/main" noGrp="1"/>
-          </p:cNvSpPr>
-          <p:nvPr/>
-        </p:nvSpPr>
-        <p:spPr>
-          <a:xfrm xmlns:a="http://schemas.openxmlformats.org/drawingml/2006/main">
-            <a:off x="609600" y="4219575"/>
-            <a:ext cx="5095875" cy="1190625"/>
-          </a:xfrm>
-          <a:prstGeom xmlns:a="http://schemas.openxmlformats.org/drawingml/2006/main" prst="rect">
-            <a:avLst/>
-          </a:prstGeom>
-          <a:noFill xmlns:a="http://schemas.openxmlformats.org/drawingml/2006/main"/>
-          <a:ln xmlns:a="http://schemas.openxmlformats.org/drawingml/2006/main" w="0">
-            <a:noFill/>
-          </a:ln>
-        </p:spPr>
-        <p:txBody>
-          <a:bodyPr xmlns:a="http://schemas.openxmlformats.org/drawingml/2006/main">
-            <a:noAutofit/>
-          </a:bodyPr>
-          <a:lstStyle xmlns:a="http://schemas.openxmlformats.org/drawingml/2006/main"/>
-          <a:p xmlns:a="http://schemas.openxmlformats.org/drawingml/2006/main">
-            <a:pPr>
-              <a:defRPr sz="2025" b="0">
-                <a:solidFill>
-                  <a:srgbClr val="283D47"/>
-                </a:solidFill>
-                <a:latin typeface="Arial"/>
-                <a:ea typeface="Arial"/>
-                <a:cs typeface="Arial"/>
-              </a:defRPr>
-            </a:pPr>
-            <a:r>
-              <a:rPr sz="2025" b="0">
-                <a:solidFill>
-                  <a:srgbClr val="283D47"/>
-                </a:solidFill>
-                <a:latin typeface="Arial"/>
-                <a:ea typeface="Arial"/>
-                <a:cs typeface="Arial"/>
-              </a:rPr>
-              <a:t>First hospitalisation after a first diagnosis record.</a:t>
-            </a:r>
-          </a:p>
-          <a:p xmlns:a="http://schemas.openxmlformats.org/drawingml/2006/main">
-            <a:pPr>
-              <a:defRPr sz="2025" b="0">
-                <a:solidFill>
-                  <a:srgbClr val="283D47"/>
-                </a:solidFill>
-                <a:latin typeface="Arial"/>
-                <a:ea typeface="Arial"/>
-                <a:cs typeface="Arial"/>
-              </a:defRPr>
-            </a:pPr>
-            <a:r>
-              <a:rPr sz="2025" b="0">
-                <a:solidFill>
-                  <a:srgbClr val="283D47"/>
-                </a:solidFill>
-                <a:latin typeface="Arial"/>
-                <a:ea typeface="Arial"/>
-                <a:cs typeface="Arial"/>
-              </a:rPr>
-              <a:t>Query construction remains to be confirmed.</a:t>
-            </a:r>
-          </a:p>
-        </p:txBody>
-      </p:sp>
-      <p:sp>
-        <p:nvSpPr>
-          <p:cNvPr id="8" name="">
-            <a:extLst xmlns:a="http://schemas.openxmlformats.org/drawingml/2006/main">
-              <a:ext uri="{FF2B5EF4-FFF2-40B4-BE49-F238E27FC236}">
-                <a16:creationId xmlns:a16="http://schemas.microsoft.com/office/drawing/2014/main" id="{778A10EC-F9A8-4FE0-A720-CAB43F28BAE6}"/>
-              </a:ext>
-            </a:extLst>
-          </p:cNvPr>
-          <p:cNvSpPr>
-            <a:spLocks xmlns:a="http://schemas.openxmlformats.org/drawingml/2006/main" noGrp="1"/>
-          </p:cNvSpPr>
-          <p:nvPr/>
-        </p:nvSpPr>
-        <p:spPr>
-          <a:xfrm xmlns:a="http://schemas.openxmlformats.org/drawingml/2006/main">
-            <a:off x="6362700" y="1552575"/>
-            <a:ext cx="5219700" cy="381000"/>
-          </a:xfrm>
-          <a:prstGeom xmlns:a="http://schemas.openxmlformats.org/drawingml/2006/main" prst="rect">
-            <a:avLst/>
-          </a:prstGeom>
-          <a:noFill xmlns:a="http://schemas.openxmlformats.org/drawingml/2006/main"/>
-          <a:ln xmlns:a="http://schemas.openxmlformats.org/drawingml/2006/main" w="0">
-            <a:noFill/>
-          </a:ln>
-        </p:spPr>
-        <p:txBody>
-          <a:bodyPr xmlns:a="http://schemas.openxmlformats.org/drawingml/2006/main">
-            <a:noAutofit/>
-          </a:bodyPr>
-          <a:lstStyle xmlns:a="http://schemas.openxmlformats.org/drawingml/2006/main"/>
-          <a:p xmlns:a="http://schemas.openxmlformats.org/drawingml/2006/main">
-            <a:pPr>
-              <a:defRPr sz="1650" b="1">
-                <a:solidFill>
-                  <a:srgbClr val="8C4052"/>
-                </a:solidFill>
-                <a:latin typeface="Arial"/>
-                <a:ea typeface="Arial"/>
-                <a:cs typeface="Arial"/>
-              </a:defRPr>
-            </a:pPr>
-            <a:r>
-              <a:rPr sz="1650" b="1">
-                <a:solidFill>
-                  <a:srgbClr val="8C4052"/>
-                </a:solidFill>
-                <a:latin typeface="Arial"/>
-                <a:ea typeface="Arial"/>
-                <a:cs typeface="Arial"/>
-              </a:rPr>
-              <a:t>UNRESOLVED OR NOT DELIVERED</a:t>
-            </a:r>
-          </a:p>
-        </p:txBody>
-      </p:sp>
-      <p:sp>
-        <p:nvSpPr>
-          <p:cNvPr id="9" name="">
-            <a:extLst xmlns:a="http://schemas.openxmlformats.org/drawingml/2006/main">
-              <a:ext uri="{FF2B5EF4-FFF2-40B4-BE49-F238E27FC236}">
-                <a16:creationId xmlns:a16="http://schemas.microsoft.com/office/drawing/2014/main" id="{FA35C4C5-506B-4766-9F04-1420324C9C31}"/>
-              </a:ext>
-            </a:extLst>
-          </p:cNvPr>
-          <p:cNvSpPr>
-            <a:spLocks xmlns:a="http://schemas.openxmlformats.org/drawingml/2006/main" noGrp="1"/>
-          </p:cNvSpPr>
-          <p:nvPr/>
-        </p:nvSpPr>
-        <p:spPr>
-          <a:xfrm xmlns:a="http://schemas.openxmlformats.org/drawingml/2006/main">
-            <a:off x="6362700" y="2143125"/>
-            <a:ext cx="5219700" cy="2400300"/>
-          </a:xfrm>
-          <a:prstGeom xmlns:a="http://schemas.openxmlformats.org/drawingml/2006/main" prst="rect">
-            <a:avLst/>
-          </a:prstGeom>
-          <a:noFill xmlns:a="http://schemas.openxmlformats.org/drawingml/2006/main"/>
-          <a:ln xmlns:a="http://schemas.openxmlformats.org/drawingml/2006/main" w="0">
-            <a:noFill/>
-          </a:ln>
-        </p:spPr>
-        <p:txBody>
-          <a:bodyPr xmlns:a="http://schemas.openxmlformats.org/drawingml/2006/main">
-            <a:noAutofit/>
-          </a:bodyPr>
-          <a:lstStyle xmlns:a="http://schemas.openxmlformats.org/drawingml/2006/main"/>
-          <a:p xmlns:a="http://schemas.openxmlformats.org/drawingml/2006/main">
-            <a:pPr>
-              <a:defRPr sz="2175" b="0">
-                <a:solidFill>
-                  <a:srgbClr val="283D47"/>
-                </a:solidFill>
-                <a:latin typeface="Arial"/>
-                <a:ea typeface="Arial"/>
-                <a:cs typeface="Arial"/>
-              </a:defRPr>
-            </a:pPr>
-            <a:r>
-              <a:rPr sz="2175" b="0">
-                <a:solidFill>
-                  <a:srgbClr val="283D47"/>
-                </a:solidFill>
-                <a:latin typeface="Arial"/>
-                <a:ea typeface="Arial"/>
-                <a:cs typeface="Arial"/>
-              </a:rPr>
-              <a:t>Admission cause and cohort person-time</a:t>
-            </a:r>
-          </a:p>
-          <a:p xmlns:a="http://schemas.openxmlformats.org/drawingml/2006/main">
-            <a:pPr>
-              <a:defRPr sz="2175" b="0">
-                <a:solidFill>
-                  <a:srgbClr val="283D47"/>
-                </a:solidFill>
-                <a:latin typeface="Arial"/>
-                <a:ea typeface="Arial"/>
-                <a:cs typeface="Arial"/>
-              </a:defRPr>
-            </a:pPr>
-            <a:r>
-              <a:rPr sz="2175" b="0">
-                <a:solidFill>
-                  <a:srgbClr val="283D47"/>
-                </a:solidFill>
-                <a:latin typeface="Arial"/>
-                <a:ea typeface="Arial"/>
-                <a:cs typeface="Arial"/>
-              </a:rPr>
-              <a:t>Entry/exit, washout and deduplication</a:t>
-            </a:r>
-          </a:p>
-          <a:p xmlns:a="http://schemas.openxmlformats.org/drawingml/2006/main">
-            <a:pPr>
-              <a:defRPr sz="2175" b="0">
-                <a:solidFill>
-                  <a:srgbClr val="283D47"/>
-                </a:solidFill>
-                <a:latin typeface="Arial"/>
-                <a:ea typeface="Arial"/>
-                <a:cs typeface="Arial"/>
-              </a:defRPr>
-            </a:pPr>
-            <a:r>
-              <a:rPr sz="2175" b="0">
-                <a:solidFill>
-                  <a:srgbClr val="283D47"/>
-                </a:solidFill>
-                <a:latin typeface="Arial"/>
-                <a:ea typeface="Arial"/>
-                <a:cs typeface="Arial"/>
-              </a:rPr>
-              <a:t>Inpatient/date/ICD definitions</a:t>
-            </a:r>
-          </a:p>
-          <a:p xmlns:a="http://schemas.openxmlformats.org/drawingml/2006/main">
-            <a:pPr>
-              <a:defRPr sz="2175" b="0">
-                <a:solidFill>
-                  <a:srgbClr val="283D47"/>
-                </a:solidFill>
-                <a:latin typeface="Arial"/>
-                <a:ea typeface="Arial"/>
-                <a:cs typeface="Arial"/>
-              </a:defRPr>
-            </a:pPr>
-            <a:r>
-              <a:rPr sz="2175" b="0">
-                <a:solidFill>
-                  <a:srgbClr val="283D47"/>
-                </a:solidFill>
-                <a:latin typeface="Arial"/>
-                <a:ea typeface="Arial"/>
-                <a:cs typeface="Arial"/>
-              </a:rPr>
-              <a:t>Labs, infection, vaccine and serology</a:t>
-            </a:r>
-          </a:p>
-          <a:p xmlns:a="http://schemas.openxmlformats.org/drawingml/2006/main">
-            <a:pPr>
-              <a:defRPr sz="2175" b="0">
-                <a:solidFill>
-                  <a:srgbClr val="283D47"/>
-                </a:solidFill>
-                <a:latin typeface="Arial"/>
-                <a:ea typeface="Arial"/>
-                <a:cs typeface="Arial"/>
-              </a:defRPr>
-            </a:pPr>
-            <a:r>
-              <a:rPr sz="2175" b="0">
-                <a:solidFill>
-                  <a:srgbClr val="283D47"/>
-                </a:solidFill>
-                <a:latin typeface="Arial"/>
-                <a:ea typeface="Arial"/>
-                <a:cs typeface="Arial"/>
-              </a:rPr>
-              <a:t>Stroke series</a:t>
-            </a:r>
-          </a:p>
-        </p:txBody>
-      </p:sp>
-      <p:sp>
-        <p:nvSpPr>
-          <p:cNvPr id="10" name="">
-            <a:extLst xmlns:a="http://schemas.openxmlformats.org/drawingml/2006/main">
-              <a:ext uri="{FF2B5EF4-FFF2-40B4-BE49-F238E27FC236}">
-                <a16:creationId xmlns:a16="http://schemas.microsoft.com/office/drawing/2014/main" id="{F13046C0-AE00-4945-9DBC-330F72391501}"/>
-              </a:ext>
-            </a:extLst>
-          </p:cNvPr>
-          <p:cNvSpPr>
-            <a:spLocks xmlns:a="http://schemas.openxmlformats.org/drawingml/2006/main" noGrp="1"/>
-          </p:cNvSpPr>
-          <p:nvPr/>
-        </p:nvSpPr>
-        <p:spPr>
-          <a:xfrm xmlns:a="http://schemas.openxmlformats.org/drawingml/2006/main">
-            <a:off x="6362700" y="4772025"/>
-            <a:ext cx="5219700" cy="685800"/>
-          </a:xfrm>
-          <a:prstGeom xmlns:a="http://schemas.openxmlformats.org/drawingml/2006/main" prst="rect">
-            <a:avLst/>
-          </a:prstGeom>
-          <a:noFill xmlns:a="http://schemas.openxmlformats.org/drawingml/2006/main"/>
-          <a:ln xmlns:a="http://schemas.openxmlformats.org/drawingml/2006/main" w="0">
-            <a:noFill/>
-          </a:ln>
-        </p:spPr>
-        <p:txBody>
-          <a:bodyPr xmlns:a="http://schemas.openxmlformats.org/drawingml/2006/main">
-            <a:noAutofit/>
-          </a:bodyPr>
-          <a:lstStyle xmlns:a="http://schemas.openxmlformats.org/drawingml/2006/main"/>
-          <a:p xmlns:a="http://schemas.openxmlformats.org/drawingml/2006/main">
-            <a:pPr>
-              <a:defRPr sz="2025" b="0">
-                <a:solidFill>
-                  <a:srgbClr val="283D47"/>
-                </a:solidFill>
-                <a:latin typeface="Arial"/>
-                <a:ea typeface="Arial"/>
-                <a:cs typeface="Arial"/>
-              </a:defRPr>
-            </a:pPr>
-            <a:r>
-              <a:rPr sz="2025" b="0">
-                <a:solidFill>
-                  <a:srgbClr val="283D47"/>
-                </a:solidFill>
-                <a:latin typeface="Arial"/>
-                <a:ea typeface="Arial"/>
-                <a:cs typeface="Arial"/>
-              </a:rPr>
-              <a:t>A receipt is evidence of delivery.</a:t>
-            </a:r>
-          </a:p>
-          <a:p xmlns:a="http://schemas.openxmlformats.org/drawingml/2006/main">
-            <a:pPr>
-              <a:defRPr sz="2025" b="0">
-                <a:solidFill>
-                  <a:srgbClr val="283D47"/>
-                </a:solidFill>
-                <a:latin typeface="Arial"/>
-                <a:ea typeface="Arial"/>
-                <a:cs typeface="Arial"/>
-              </a:defRPr>
-            </a:pPr>
-            <a:r>
-              <a:rPr sz="2025" b="0">
-                <a:solidFill>
-                  <a:srgbClr val="283D47"/>
-                </a:solidFill>
-                <a:latin typeface="Arial"/>
-                <a:ea typeface="Arial"/>
-                <a:cs typeface="Arial"/>
-              </a:rPr>
-              <a:t>It is not a validated data dictionary.</a:t>
+              <a:t>can alter the same recorded endpoint.</a:t>
             </a:r>
           </a:p>
         </p:txBody>
@@ -4316,7 +4125,7 @@
     </p:spTree>
     <p:extLst>
       <p:ext uri="{BB962C8B-B14F-4D97-AF65-F5344CB8AC3E}">
-        <p14:creationId xmlns:p14="http://schemas.microsoft.com/office/powerpoint/2010/main" val="1861955733"/>
+        <p14:creationId xmlns:p14="http://schemas.microsoft.com/office/powerpoint/2010/main" val="145717471"/>
       </p:ext>
     </p:extLst>
   </p:cSld>
@@ -4344,10 +4153,10 @@
       </p:grpSpPr>
       <p:sp>
         <p:nvSpPr>
-          <p:cNvPr id="15" name="">
+          <p:cNvPr id="7" name="">
             <a:extLst xmlns:a="http://schemas.openxmlformats.org/drawingml/2006/main">
               <a:ext uri="{FF2B5EF4-FFF2-40B4-BE49-F238E27FC236}">
-                <a16:creationId xmlns:a16="http://schemas.microsoft.com/office/drawing/2014/main" id="{6DEC9C3D-8406-415D-8020-749FBE30773D}"/>
+                <a16:creationId xmlns:a16="http://schemas.microsoft.com/office/drawing/2014/main" id="{5E61DF66-4E43-42EE-945F-E93C95A87F31}"/>
               </a:ext>
             </a:extLst>
           </p:cNvPr>
@@ -4394,7 +4203,7 @@
                 <a:ea typeface="Arial"/>
                 <a:cs typeface="Arial"/>
               </a:rPr>
-              <a:t>Five transitions explain the current state</a:t>
+              <a:t>Recent studies raise the novelty threshold</a:t>
             </a:r>
           </a:p>
         </p:txBody>
@@ -4404,7 +4213,7 @@
           <p:cNvPr id="2" name="">
             <a:extLst xmlns:a="http://schemas.openxmlformats.org/drawingml/2006/main">
               <a:ext uri="{FF2B5EF4-FFF2-40B4-BE49-F238E27FC236}">
-                <a16:creationId xmlns:a16="http://schemas.microsoft.com/office/drawing/2014/main" id="{7264E385-2AC3-4F83-80C6-20645BDE60FF}"/>
+                <a16:creationId xmlns:a16="http://schemas.microsoft.com/office/drawing/2014/main" id="{2B1853CC-1E1D-4D11-BC7C-0B4AEEAAFF58}"/>
               </a:ext>
             </a:extLst>
           </p:cNvPr>
@@ -4416,7 +4225,7 @@
         <p:spPr>
           <a:xfrm xmlns:a="http://schemas.openxmlformats.org/drawingml/2006/main">
             <a:off x="609600" y="6448425"/>
-            <a:ext cx="6953250" cy="209550"/>
+            <a:ext cx="8572500" cy="209550"/>
           </a:xfrm>
           <a:prstGeom xmlns:a="http://schemas.openxmlformats.org/drawingml/2006/main" prst="rect">
             <a:avLst/>
@@ -4451,7 +4260,7 @@
                 <a:ea typeface="Arial"/>
                 <a:cs typeface="Arial"/>
               </a:rPr>
-              <a:t>LAIDLAW · INTERNAL RESEARCH STATE · 2 OCT 2026</a:t>
+              <a:t>LAIDLAW  INTERNAL RESEARCH STATE  2 OCT 2026</a:t>
             </a:r>
           </a:p>
         </p:txBody>
@@ -4461,7 +4270,7 @@
           <p:cNvPr id="3" name="">
             <a:extLst xmlns:a="http://schemas.openxmlformats.org/drawingml/2006/main">
               <a:ext uri="{FF2B5EF4-FFF2-40B4-BE49-F238E27FC236}">
-                <a16:creationId xmlns:a16="http://schemas.microsoft.com/office/drawing/2014/main" id="{254ED4D6-A454-431E-B381-AA181A845A9A}"/>
+                <a16:creationId xmlns:a16="http://schemas.microsoft.com/office/drawing/2014/main" id="{B5DF0525-F345-41DD-9D94-AF006665C022}"/>
               </a:ext>
             </a:extLst>
           </p:cNvPr>
@@ -4518,7 +4327,7 @@
           <p:cNvPr id="4" name="">
             <a:extLst xmlns:a="http://schemas.openxmlformats.org/drawingml/2006/main">
               <a:ext uri="{FF2B5EF4-FFF2-40B4-BE49-F238E27FC236}">
-                <a16:creationId xmlns:a16="http://schemas.microsoft.com/office/drawing/2014/main" id="{1909F1F7-F798-4A55-9363-9CE5030DCD95}"/>
+                <a16:creationId xmlns:a16="http://schemas.microsoft.com/office/drawing/2014/main" id="{C4FE2766-9998-425C-BAE0-A9113669CC95}"/>
               </a:ext>
             </a:extLst>
           </p:cNvPr>
@@ -4565,17 +4374,375 @@
                 <a:ea typeface="Arial"/>
                 <a:cs typeface="Arial"/>
               </a:rPr>
-              <a:t>Sources: C01, C03, C10, C12, C05, C06 · source links and limits in notes/register</a:t>
-            </a:r>
-          </a:p>
-        </p:txBody>
-      </p:sp>
-      <p:sp>
-        <p:nvSpPr>
-          <p:cNvPr id="5" name="">
+              <a:t>Sources: diabetes, hypertension, continuity. Links and scientific limits in notes.</a:t>
+            </a:r>
+          </a:p>
+        </p:txBody>
+      </p:sp>
+      <p:graphicFrame>
+        <p:nvGraphicFramePr>
+          <p:cNvPr id="11" name=""/>
+          <p:cNvGraphicFramePr/>
+          <p:nvPr/>
+        </p:nvGraphicFramePr>
+        <p:xfrm>
+          <a:off xmlns:a="http://schemas.openxmlformats.org/drawingml/2006/main" x="609600" y="1562100"/>
+          <a:ext xmlns:a="http://schemas.openxmlformats.org/drawingml/2006/main" cx="10972800" cy="3609975"/>
+        </p:xfrm>
+        <a:graphic xmlns:a="http://schemas.openxmlformats.org/drawingml/2006/main">
+          <a:graphicData uri="http://schemas.openxmlformats.org/drawingml/2006/table">
+            <a:tbl>
+              <a:tblPr/>
+              <a:tblGrid>
+                <a:gridCol w="2590800"/>
+                <a:gridCol w="4305300"/>
+                <a:gridCol w="4076700"/>
+              </a:tblGrid>
+              <a:tr h="902494">
+                <a:tc>
+                  <a:txBody>
+                    <a:bodyPr/>
+                    <a:lstStyle/>
+                    <a:p>
+                      <a:r>
+                        <a:rPr sz="1875" b="1">
+                          <a:solidFill>
+                            <a:srgbClr val="FFFFFF"/>
+                          </a:solidFill>
+                          <a:latin typeface="Arial"/>
+                          <a:ea typeface="Arial"/>
+                          <a:cs typeface="Arial"/>
+                        </a:rPr>
+                        <a:t>Prior study</a:t>
+                      </a:r>
+                    </a:p>
+                  </a:txBody>
+                  <a:tcPr marL="133350" marR="133350" marT="114300" marB="95250" anchor="ctr">
+                    <a:solidFill>
+                      <a:srgbClr val="183343"/>
+                    </a:solidFill>
+                  </a:tcPr>
+                </a:tc>
+                <a:tc>
+                  <a:txBody>
+                    <a:bodyPr/>
+                    <a:lstStyle/>
+                    <a:p>
+                      <a:r>
+                        <a:rPr sz="1875" b="1">
+                          <a:solidFill>
+                            <a:srgbClr val="FFFFFF"/>
+                          </a:solidFill>
+                          <a:latin typeface="Arial"/>
+                          <a:ea typeface="Arial"/>
+                          <a:cs typeface="Arial"/>
+                        </a:rPr>
+                        <a:t>Overlapping contribution</a:t>
+                      </a:r>
+                    </a:p>
+                  </a:txBody>
+                  <a:tcPr marL="133350" marR="133350" marT="114300" marB="95250" anchor="ctr">
+                    <a:solidFill>
+                      <a:srgbClr val="183343"/>
+                    </a:solidFill>
+                  </a:tcPr>
+                </a:tc>
+                <a:tc>
+                  <a:txBody>
+                    <a:bodyPr/>
+                    <a:lstStyle/>
+                    <a:p>
+                      <a:r>
+                        <a:rPr sz="1875" b="1">
+                          <a:solidFill>
+                            <a:srgbClr val="FFFFFF"/>
+                          </a:solidFill>
+                          <a:latin typeface="Arial"/>
+                          <a:ea typeface="Arial"/>
+                          <a:cs typeface="Arial"/>
+                        </a:rPr>
+                        <a:t>Implication</a:t>
+                      </a:r>
+                    </a:p>
+                  </a:txBody>
+                  <a:tcPr marL="133350" marR="133350" marT="114300" marB="95250" anchor="ctr">
+                    <a:solidFill>
+                      <a:srgbClr val="183343"/>
+                    </a:solidFill>
+                  </a:tcPr>
+                </a:tc>
+              </a:tr>
+              <a:tr h="902494">
+                <a:tc>
+                  <a:txBody>
+                    <a:bodyPr/>
+                    <a:lstStyle/>
+                    <a:p>
+                      <a:r>
+                        <a:rPr sz="1875">
+                          <a:solidFill>
+                            <a:srgbClr val="283D47"/>
+                          </a:solidFill>
+                          <a:latin typeface="Arial"/>
+                          <a:ea typeface="Arial"/>
+                          <a:cs typeface="Arial"/>
+                        </a:rPr>
+                        <a:t>Diabetes, 2025</a:t>
+                      </a:r>
+                    </a:p>
+                    <a:p>
+                      <a:r>
+                        <a:rPr sz="1875">
+                          <a:solidFill>
+                            <a:srgbClr val="283D47"/>
+                          </a:solidFill>
+                          <a:latin typeface="Arial"/>
+                          <a:ea typeface="Arial"/>
+                          <a:cs typeface="Arial"/>
+                        </a:rPr>
+                        <a:t>Hong Kong and Korea</a:t>
+                      </a:r>
+                    </a:p>
+                  </a:txBody>
+                  <a:tcPr marL="133350" marR="133350" marT="114300" marB="95250" anchor="ctr">
+                    <a:solidFill>
+                      <a:srgbClr val="FFFFFF"/>
+                    </a:solidFill>
+                  </a:tcPr>
+                </a:tc>
+                <a:tc>
+                  <a:txBody>
+                    <a:bodyPr/>
+                    <a:lstStyle/>
+                    <a:p>
+                      <a:r>
+                        <a:rPr sz="1875">
+                          <a:solidFill>
+                            <a:srgbClr val="283D47"/>
+                          </a:solidFill>
+                          <a:latin typeface="Arial"/>
+                          <a:ea typeface="Arial"/>
+                          <a:cs typeface="Arial"/>
+                        </a:rPr>
+                        <a:t>Cardiovascular outcomes, mortality and healthcare use</a:t>
+                      </a:r>
+                    </a:p>
+                  </a:txBody>
+                  <a:tcPr marL="133350" marR="133350" marT="114300" marB="95250" anchor="ctr">
+                    <a:solidFill>
+                      <a:srgbClr val="FFFFFF"/>
+                    </a:solidFill>
+                  </a:tcPr>
+                </a:tc>
+                <a:tc>
+                  <a:txBody>
+                    <a:bodyPr/>
+                    <a:lstStyle/>
+                    <a:p>
+                      <a:r>
+                        <a:rPr sz="1875">
+                          <a:solidFill>
+                            <a:srgbClr val="283D47"/>
+                          </a:solidFill>
+                          <a:latin typeface="Arial"/>
+                          <a:ea typeface="Arial"/>
+                          <a:cs typeface="Arial"/>
+                        </a:rPr>
+                        <a:t>Another diabetes admissions trend needs a new question</a:t>
+                      </a:r>
+                    </a:p>
+                  </a:txBody>
+                  <a:tcPr marL="133350" marR="133350" marT="114300" marB="95250" anchor="ctr">
+                    <a:solidFill>
+                      <a:srgbClr val="FFFFFF"/>
+                    </a:solidFill>
+                  </a:tcPr>
+                </a:tc>
+              </a:tr>
+              <a:tr h="902494">
+                <a:tc>
+                  <a:txBody>
+                    <a:bodyPr/>
+                    <a:lstStyle/>
+                    <a:p>
+                      <a:r>
+                        <a:rPr sz="1875">
+                          <a:solidFill>
+                            <a:srgbClr val="283D47"/>
+                          </a:solidFill>
+                          <a:latin typeface="Arial"/>
+                          <a:ea typeface="Arial"/>
+                          <a:cs typeface="Arial"/>
+                        </a:rPr>
+                        <a:t>Hypertension, 2025</a:t>
+                      </a:r>
+                    </a:p>
+                    <a:p>
+                      <a:r>
+                        <a:rPr sz="1875">
+                          <a:solidFill>
+                            <a:srgbClr val="283D47"/>
+                          </a:solidFill>
+                          <a:latin typeface="Arial"/>
+                          <a:ea typeface="Arial"/>
+                          <a:cs typeface="Arial"/>
+                        </a:rPr>
+                        <a:t>Hong Kong</a:t>
+                      </a:r>
+                    </a:p>
+                  </a:txBody>
+                  <a:tcPr marL="133350" marR="133350" marT="114300" marB="95250" anchor="ctr">
+                    <a:solidFill>
+                      <a:srgbClr val="FFFFFF"/>
+                    </a:solidFill>
+                  </a:tcPr>
+                </a:tc>
+                <a:tc>
+                  <a:txBody>
+                    <a:bodyPr/>
+                    <a:lstStyle/>
+                    <a:p>
+                      <a:r>
+                        <a:rPr sz="1875">
+                          <a:solidFill>
+                            <a:srgbClr val="283D47"/>
+                          </a:solidFill>
+                          <a:latin typeface="Arial"/>
+                          <a:ea typeface="Arial"/>
+                          <a:cs typeface="Arial"/>
+                        </a:rPr>
+                        <a:t>Cardiovascular outcomes and blood-pressure control</a:t>
+                      </a:r>
+                    </a:p>
+                  </a:txBody>
+                  <a:tcPr marL="133350" marR="133350" marT="114300" marB="95250" anchor="ctr">
+                    <a:solidFill>
+                      <a:srgbClr val="FFFFFF"/>
+                    </a:solidFill>
+                  </a:tcPr>
+                </a:tc>
+                <a:tc>
+                  <a:txBody>
+                    <a:bodyPr/>
+                    <a:lstStyle/>
+                    <a:p>
+                      <a:r>
+                        <a:rPr sz="1875">
+                          <a:solidFill>
+                            <a:srgbClr val="283D47"/>
+                          </a:solidFill>
+                          <a:latin typeface="Arial"/>
+                          <a:ea typeface="Arial"/>
+                          <a:cs typeface="Arial"/>
+                        </a:rPr>
+                        <a:t>Adding blood pressure alone does not establish novelty</a:t>
+                      </a:r>
+                    </a:p>
+                  </a:txBody>
+                  <a:tcPr marL="133350" marR="133350" marT="114300" marB="95250" anchor="ctr">
+                    <a:solidFill>
+                      <a:srgbClr val="FFFFFF"/>
+                    </a:solidFill>
+                  </a:tcPr>
+                </a:tc>
+              </a:tr>
+              <a:tr h="902494">
+                <a:tc>
+                  <a:txBody>
+                    <a:bodyPr/>
+                    <a:lstStyle/>
+                    <a:p>
+                      <a:r>
+                        <a:rPr sz="1875">
+                          <a:solidFill>
+                            <a:srgbClr val="283D47"/>
+                          </a:solidFill>
+                          <a:latin typeface="Arial"/>
+                          <a:ea typeface="Arial"/>
+                          <a:cs typeface="Arial"/>
+                        </a:rPr>
+                        <a:t>Care continuity, 2026</a:t>
+                      </a:r>
+                    </a:p>
+                    <a:p>
+                      <a:r>
+                        <a:rPr sz="1875">
+                          <a:solidFill>
+                            <a:srgbClr val="283D47"/>
+                          </a:solidFill>
+                          <a:latin typeface="Arial"/>
+                          <a:ea typeface="Arial"/>
+                          <a:cs typeface="Arial"/>
+                        </a:rPr>
+                        <a:t>Yau et al.</a:t>
+                      </a:r>
+                    </a:p>
+                  </a:txBody>
+                  <a:tcPr marL="133350" marR="133350" marT="114300" marB="95250" anchor="ctr">
+                    <a:solidFill>
+                      <a:srgbClr val="FFFFFF"/>
+                    </a:solidFill>
+                  </a:tcPr>
+                </a:tc>
+                <a:tc>
+                  <a:txBody>
+                    <a:bodyPr/>
+                    <a:lstStyle/>
+                    <a:p>
+                      <a:r>
+                        <a:rPr sz="1875">
+                          <a:solidFill>
+                            <a:srgbClr val="283D47"/>
+                          </a:solidFill>
+                          <a:latin typeface="Arial"/>
+                          <a:ea typeface="Arial"/>
+                          <a:cs typeface="Arial"/>
+                        </a:rPr>
+                        <a:t>CHD/HF, clinical covariates and competing death</a:t>
+                      </a:r>
+                    </a:p>
+                  </a:txBody>
+                  <a:tcPr marL="133350" marR="133350" marT="114300" marB="95250" anchor="ctr">
+                    <a:solidFill>
+                      <a:srgbClr val="FFFFFF"/>
+                    </a:solidFill>
+                  </a:tcPr>
+                </a:tc>
+                <a:tc>
+                  <a:txBody>
+                    <a:bodyPr/>
+                    <a:lstStyle/>
+                    <a:p>
+                      <a:r>
+                        <a:rPr sz="1875">
+                          <a:solidFill>
+                            <a:srgbClr val="283D47"/>
+                          </a:solidFill>
+                          <a:latin typeface="Arial"/>
+                          <a:ea typeface="Arial"/>
+                          <a:cs typeface="Arial"/>
+                        </a:rPr>
+                        <a:t>Later follow-up and clinical linkage already have precedent</a:t>
+                      </a:r>
+                    </a:p>
+                  </a:txBody>
+                  <a:tcPr marL="133350" marR="133350" marT="114300" marB="95250" anchor="ctr">
+                    <a:solidFill>
+                      <a:srgbClr val="FFFFFF"/>
+                    </a:solidFill>
+                  </a:tcPr>
+                </a:tc>
+              </a:tr>
+            </a:tbl>
+          </a:graphicData>
+        </a:graphic>
+      </p:graphicFrame>
+      <p:sp>
+        <p:nvSpPr>
+          <p:cNvPr id="6" name="">
             <a:extLst xmlns:a="http://schemas.openxmlformats.org/drawingml/2006/main">
               <a:ext uri="{FF2B5EF4-FFF2-40B4-BE49-F238E27FC236}">
-                <a16:creationId xmlns:a16="http://schemas.microsoft.com/office/drawing/2014/main" id="{BE431001-DF2F-48F6-B642-98761500782C}"/>
+                <a16:creationId xmlns:a16="http://schemas.microsoft.com/office/drawing/2014/main" id="{DC934FDE-7279-46D5-94F5-EEE19ED49353}"/>
               </a:ext>
             </a:extLst>
           </p:cNvPr>
@@ -4586,8 +4753,8 @@
         </p:nvSpPr>
         <p:spPr>
           <a:xfrm xmlns:a="http://schemas.openxmlformats.org/drawingml/2006/main">
-            <a:off x="609600" y="1514475"/>
-            <a:ext cx="1619250" cy="361950"/>
+            <a:off x="609600" y="5429250"/>
+            <a:ext cx="10972800" cy="628650"/>
           </a:xfrm>
           <a:prstGeom xmlns:a="http://schemas.openxmlformats.org/drawingml/2006/main" prst="rect">
             <a:avLst/>
@@ -4604,7 +4771,7 @@
           <a:lstStyle xmlns:a="http://schemas.openxmlformats.org/drawingml/2006/main"/>
           <a:p xmlns:a="http://schemas.openxmlformats.org/drawingml/2006/main">
             <a:pPr>
-              <a:defRPr sz="1800" b="1">
+              <a:defRPr sz="1950" b="0">
                 <a:solidFill>
                   <a:srgbClr val="14685F"/>
                 </a:solidFill>
@@ -4614,7 +4781,7 @@
               </a:defRPr>
             </a:pPr>
             <a:r>
-              <a:rPr sz="1800" b="1">
+              <a:rPr sz="1950" b="0">
                 <a:solidFill>
                   <a:srgbClr val="14685F"/>
                 </a:solidFill>
@@ -4622,48 +4789,14 @@
                 <a:ea typeface="Arial"/>
                 <a:cs typeface="Arial"/>
               </a:rPr>
-              <a:t>17 JUL</a:t>
-            </a:r>
-          </a:p>
-        </p:txBody>
-      </p:sp>
-      <p:sp>
-        <p:nvSpPr>
-          <p:cNvPr id="6" name="">
-            <a:extLst xmlns:a="http://schemas.openxmlformats.org/drawingml/2006/main">
-              <a:ext uri="{FF2B5EF4-FFF2-40B4-BE49-F238E27FC236}">
-                <a16:creationId xmlns:a16="http://schemas.microsoft.com/office/drawing/2014/main" id="{2DCC984B-92AF-4CC6-B6FC-2093E21EF0FB}"/>
-              </a:ext>
-            </a:extLst>
-          </p:cNvPr>
-          <p:cNvSpPr>
-            <a:spLocks xmlns:a="http://schemas.openxmlformats.org/drawingml/2006/main" noGrp="1"/>
-          </p:cNvSpPr>
-          <p:nvPr/>
-        </p:nvSpPr>
-        <p:spPr>
-          <a:xfrm xmlns:a="http://schemas.openxmlformats.org/drawingml/2006/main">
-            <a:off x="2571750" y="1514475"/>
-            <a:ext cx="9010650" cy="666750"/>
-          </a:xfrm>
-          <a:prstGeom xmlns:a="http://schemas.openxmlformats.org/drawingml/2006/main" prst="rect">
-            <a:avLst/>
-          </a:prstGeom>
-          <a:noFill xmlns:a="http://schemas.openxmlformats.org/drawingml/2006/main"/>
-          <a:ln xmlns:a="http://schemas.openxmlformats.org/drawingml/2006/main" w="0">
-            <a:noFill/>
-          </a:ln>
-        </p:spPr>
-        <p:txBody>
-          <a:bodyPr xmlns:a="http://schemas.openxmlformats.org/drawingml/2006/main">
-            <a:noAutofit/>
-          </a:bodyPr>
-          <a:lstStyle xmlns:a="http://schemas.openxmlformats.org/drawingml/2006/main"/>
+              <a:t>Candidate contribution: discriminate disease change from observation change.</a:t>
+            </a:r>
+          </a:p>
           <a:p xmlns:a="http://schemas.openxmlformats.org/drawingml/2006/main">
             <a:pPr>
-              <a:defRPr sz="2025" b="0">
-                <a:solidFill>
-                  <a:srgbClr val="283D47"/>
+              <a:defRPr sz="1950" b="0">
+                <a:solidFill>
+                  <a:srgbClr val="14685F"/>
                 </a:solidFill>
                 <a:latin typeface="Arial"/>
                 <a:ea typeface="Arial"/>
@@ -4671,471 +4804,15 @@
               </a:defRPr>
             </a:pPr>
             <a:r>
-              <a:rPr sz="2025" b="0">
-                <a:solidFill>
-                  <a:srgbClr val="283D47"/>
+              <a:rPr sz="1950" b="0">
+                <a:solidFill>
+                  <a:srgbClr val="14685F"/>
                 </a:solidFill>
                 <a:latin typeface="Arial"/>
                 <a:ea typeface="Arial"/>
                 <a:cs typeface="Arial"/>
               </a:rPr>
-              <a:t>Admission reasons absent → AMI framing demoted; monthly aggregates planned.</a:t>
-            </a:r>
-          </a:p>
-        </p:txBody>
-      </p:sp>
-      <p:sp>
-        <p:nvSpPr>
-          <p:cNvPr id="7" name="">
-            <a:extLst xmlns:a="http://schemas.openxmlformats.org/drawingml/2006/main">
-              <a:ext uri="{FF2B5EF4-FFF2-40B4-BE49-F238E27FC236}">
-                <a16:creationId xmlns:a16="http://schemas.microsoft.com/office/drawing/2014/main" id="{335E7BB9-6A30-4104-8D7C-70B50277FECE}"/>
-              </a:ext>
-            </a:extLst>
-          </p:cNvPr>
-          <p:cNvSpPr>
-            <a:spLocks xmlns:a="http://schemas.openxmlformats.org/drawingml/2006/main" noGrp="1"/>
-          </p:cNvSpPr>
-          <p:nvPr/>
-        </p:nvSpPr>
-        <p:spPr>
-          <a:xfrm xmlns:a="http://schemas.openxmlformats.org/drawingml/2006/main">
-            <a:off x="609600" y="2333625"/>
-            <a:ext cx="1619250" cy="361950"/>
-          </a:xfrm>
-          <a:prstGeom xmlns:a="http://schemas.openxmlformats.org/drawingml/2006/main" prst="rect">
-            <a:avLst/>
-          </a:prstGeom>
-          <a:noFill xmlns:a="http://schemas.openxmlformats.org/drawingml/2006/main"/>
-          <a:ln xmlns:a="http://schemas.openxmlformats.org/drawingml/2006/main" w="0">
-            <a:noFill/>
-          </a:ln>
-        </p:spPr>
-        <p:txBody>
-          <a:bodyPr xmlns:a="http://schemas.openxmlformats.org/drawingml/2006/main">
-            <a:noAutofit/>
-          </a:bodyPr>
-          <a:lstStyle xmlns:a="http://schemas.openxmlformats.org/drawingml/2006/main"/>
-          <a:p xmlns:a="http://schemas.openxmlformats.org/drawingml/2006/main">
-            <a:pPr>
-              <a:defRPr sz="1800" b="1">
-                <a:solidFill>
-                  <a:srgbClr val="14685F"/>
-                </a:solidFill>
-                <a:latin typeface="Arial"/>
-                <a:ea typeface="Arial"/>
-                <a:cs typeface="Arial"/>
-              </a:defRPr>
-            </a:pPr>
-            <a:r>
-              <a:rPr sz="1800" b="1">
-                <a:solidFill>
-                  <a:srgbClr val="14685F"/>
-                </a:solidFill>
-                <a:latin typeface="Arial"/>
-                <a:ea typeface="Arial"/>
-                <a:cs typeface="Arial"/>
-              </a:rPr>
-              <a:t>AUG</a:t>
-            </a:r>
-          </a:p>
-        </p:txBody>
-      </p:sp>
-      <p:sp>
-        <p:nvSpPr>
-          <p:cNvPr id="8" name="">
-            <a:extLst xmlns:a="http://schemas.openxmlformats.org/drawingml/2006/main">
-              <a:ext uri="{FF2B5EF4-FFF2-40B4-BE49-F238E27FC236}">
-                <a16:creationId xmlns:a16="http://schemas.microsoft.com/office/drawing/2014/main" id="{E57069F9-9A73-4509-9832-8405E849CB94}"/>
-              </a:ext>
-            </a:extLst>
-          </p:cNvPr>
-          <p:cNvSpPr>
-            <a:spLocks xmlns:a="http://schemas.openxmlformats.org/drawingml/2006/main" noGrp="1"/>
-          </p:cNvSpPr>
-          <p:nvPr/>
-        </p:nvSpPr>
-        <p:spPr>
-          <a:xfrm xmlns:a="http://schemas.openxmlformats.org/drawingml/2006/main">
-            <a:off x="2571750" y="2333625"/>
-            <a:ext cx="9010650" cy="666750"/>
-          </a:xfrm>
-          <a:prstGeom xmlns:a="http://schemas.openxmlformats.org/drawingml/2006/main" prst="rect">
-            <a:avLst/>
-          </a:prstGeom>
-          <a:noFill xmlns:a="http://schemas.openxmlformats.org/drawingml/2006/main"/>
-          <a:ln xmlns:a="http://schemas.openxmlformats.org/drawingml/2006/main" w="0">
-            <a:noFill/>
-          </a:ln>
-        </p:spPr>
-        <p:txBody>
-          <a:bodyPr xmlns:a="http://schemas.openxmlformats.org/drawingml/2006/main">
-            <a:noAutofit/>
-          </a:bodyPr>
-          <a:lstStyle xmlns:a="http://schemas.openxmlformats.org/drawingml/2006/main"/>
-          <a:p xmlns:a="http://schemas.openxmlformats.org/drawingml/2006/main">
-            <a:pPr>
-              <a:defRPr sz="2025" b="0">
-                <a:solidFill>
-                  <a:srgbClr val="283D47"/>
-                </a:solidFill>
-                <a:latin typeface="Arial"/>
-                <a:ea typeface="Arial"/>
-                <a:cs typeface="Arial"/>
-              </a:defRPr>
-            </a:pPr>
-            <a:r>
-              <a:rPr sz="2025" b="0">
-                <a:solidFill>
-                  <a:srgbClr val="283D47"/>
-                </a:solidFill>
-                <a:latin typeface="Arial"/>
-                <a:ea typeface="Arial"/>
-                <a:cs typeface="Arial"/>
-              </a:rPr>
-              <a:t>CHD/HF delivered → amended core; no protected primary; daily recovery fails gates.</a:t>
-            </a:r>
-          </a:p>
-        </p:txBody>
-      </p:sp>
-      <p:sp>
-        <p:nvSpPr>
-          <p:cNvPr id="9" name="">
-            <a:extLst xmlns:a="http://schemas.openxmlformats.org/drawingml/2006/main">
-              <a:ext uri="{FF2B5EF4-FFF2-40B4-BE49-F238E27FC236}">
-                <a16:creationId xmlns:a16="http://schemas.microsoft.com/office/drawing/2014/main" id="{65C2133F-6988-4533-97C6-E8A6E161D0A2}"/>
-              </a:ext>
-            </a:extLst>
-          </p:cNvPr>
-          <p:cNvSpPr>
-            <a:spLocks xmlns:a="http://schemas.openxmlformats.org/drawingml/2006/main" noGrp="1"/>
-          </p:cNvSpPr>
-          <p:nvPr/>
-        </p:nvSpPr>
-        <p:spPr>
-          <a:xfrm xmlns:a="http://schemas.openxmlformats.org/drawingml/2006/main">
-            <a:off x="609600" y="3152775"/>
-            <a:ext cx="1619250" cy="361950"/>
-          </a:xfrm>
-          <a:prstGeom xmlns:a="http://schemas.openxmlformats.org/drawingml/2006/main" prst="rect">
-            <a:avLst/>
-          </a:prstGeom>
-          <a:noFill xmlns:a="http://schemas.openxmlformats.org/drawingml/2006/main"/>
-          <a:ln xmlns:a="http://schemas.openxmlformats.org/drawingml/2006/main" w="0">
-            <a:noFill/>
-          </a:ln>
-        </p:spPr>
-        <p:txBody>
-          <a:bodyPr xmlns:a="http://schemas.openxmlformats.org/drawingml/2006/main">
-            <a:noAutofit/>
-          </a:bodyPr>
-          <a:lstStyle xmlns:a="http://schemas.openxmlformats.org/drawingml/2006/main"/>
-          <a:p xmlns:a="http://schemas.openxmlformats.org/drawingml/2006/main">
-            <a:pPr>
-              <a:defRPr sz="1800" b="1">
-                <a:solidFill>
-                  <a:srgbClr val="14685F"/>
-                </a:solidFill>
-                <a:latin typeface="Arial"/>
-                <a:ea typeface="Arial"/>
-                <a:cs typeface="Arial"/>
-              </a:defRPr>
-            </a:pPr>
-            <a:r>
-              <a:rPr sz="1800" b="1">
-                <a:solidFill>
-                  <a:srgbClr val="14685F"/>
-                </a:solidFill>
-                <a:latin typeface="Arial"/>
-                <a:ea typeface="Arial"/>
-                <a:cs typeface="Arial"/>
-              </a:rPr>
-              <a:t>27 AUG</a:t>
-            </a:r>
-          </a:p>
-        </p:txBody>
-      </p:sp>
-      <p:sp>
-        <p:nvSpPr>
-          <p:cNvPr id="10" name="">
-            <a:extLst xmlns:a="http://schemas.openxmlformats.org/drawingml/2006/main">
-              <a:ext uri="{FF2B5EF4-FFF2-40B4-BE49-F238E27FC236}">
-                <a16:creationId xmlns:a16="http://schemas.microsoft.com/office/drawing/2014/main" id="{C686BAC8-6906-49D6-85B4-01230F693535}"/>
-              </a:ext>
-            </a:extLst>
-          </p:cNvPr>
-          <p:cNvSpPr>
-            <a:spLocks xmlns:a="http://schemas.openxmlformats.org/drawingml/2006/main" noGrp="1"/>
-          </p:cNvSpPr>
-          <p:nvPr/>
-        </p:nvSpPr>
-        <p:spPr>
-          <a:xfrm xmlns:a="http://schemas.openxmlformats.org/drawingml/2006/main">
-            <a:off x="2571750" y="3152775"/>
-            <a:ext cx="9010650" cy="666750"/>
-          </a:xfrm>
-          <a:prstGeom xmlns:a="http://schemas.openxmlformats.org/drawingml/2006/main" prst="rect">
-            <a:avLst/>
-          </a:prstGeom>
-          <a:noFill xmlns:a="http://schemas.openxmlformats.org/drawingml/2006/main"/>
-          <a:ln xmlns:a="http://schemas.openxmlformats.org/drawingml/2006/main" w="0">
-            <a:noFill/>
-          </a:ln>
-        </p:spPr>
-        <p:txBody>
-          <a:bodyPr xmlns:a="http://schemas.openxmlformats.org/drawingml/2006/main">
-            <a:noAutofit/>
-          </a:bodyPr>
-          <a:lstStyle xmlns:a="http://schemas.openxmlformats.org/drawingml/2006/main"/>
-          <a:p xmlns:a="http://schemas.openxmlformats.org/drawingml/2006/main">
-            <a:pPr>
-              <a:defRPr sz="2025" b="0">
-                <a:solidFill>
-                  <a:srgbClr val="283D47"/>
-                </a:solidFill>
-                <a:latin typeface="Arial"/>
-                <a:ea typeface="Arial"/>
-                <a:cs typeface="Arial"/>
-              </a:defRPr>
-            </a:pPr>
-            <a:r>
-              <a:rPr sz="2025" b="0">
-                <a:solidFill>
-                  <a:srgbClr val="283D47"/>
-                </a:solidFill>
-                <a:latin typeface="Arial"/>
-                <a:ea typeface="Arial"/>
-                <a:cs typeface="Arial"/>
-              </a:rPr>
-              <a:t>6-df “crown” preserves preferred intervals → selection history, not corroboration.</a:t>
-            </a:r>
-          </a:p>
-        </p:txBody>
-      </p:sp>
-      <p:sp>
-        <p:nvSpPr>
-          <p:cNvPr id="11" name="">
-            <a:extLst xmlns:a="http://schemas.openxmlformats.org/drawingml/2006/main">
-              <a:ext uri="{FF2B5EF4-FFF2-40B4-BE49-F238E27FC236}">
-                <a16:creationId xmlns:a16="http://schemas.microsoft.com/office/drawing/2014/main" id="{0747B3D0-197A-45C2-89D6-FE147BE42DE1}"/>
-              </a:ext>
-            </a:extLst>
-          </p:cNvPr>
-          <p:cNvSpPr>
-            <a:spLocks xmlns:a="http://schemas.openxmlformats.org/drawingml/2006/main" noGrp="1"/>
-          </p:cNvSpPr>
-          <p:nvPr/>
-        </p:nvSpPr>
-        <p:spPr>
-          <a:xfrm xmlns:a="http://schemas.openxmlformats.org/drawingml/2006/main">
-            <a:off x="609600" y="3971925"/>
-            <a:ext cx="1619250" cy="361950"/>
-          </a:xfrm>
-          <a:prstGeom xmlns:a="http://schemas.openxmlformats.org/drawingml/2006/main" prst="rect">
-            <a:avLst/>
-          </a:prstGeom>
-          <a:noFill xmlns:a="http://schemas.openxmlformats.org/drawingml/2006/main"/>
-          <a:ln xmlns:a="http://schemas.openxmlformats.org/drawingml/2006/main" w="0">
-            <a:noFill/>
-          </a:ln>
-        </p:spPr>
-        <p:txBody>
-          <a:bodyPr xmlns:a="http://schemas.openxmlformats.org/drawingml/2006/main">
-            <a:noAutofit/>
-          </a:bodyPr>
-          <a:lstStyle xmlns:a="http://schemas.openxmlformats.org/drawingml/2006/main"/>
-          <a:p xmlns:a="http://schemas.openxmlformats.org/drawingml/2006/main">
-            <a:pPr>
-              <a:defRPr sz="1800" b="1">
-                <a:solidFill>
-                  <a:srgbClr val="14685F"/>
-                </a:solidFill>
-                <a:latin typeface="Arial"/>
-                <a:ea typeface="Arial"/>
-                <a:cs typeface="Arial"/>
-              </a:defRPr>
-            </a:pPr>
-            <a:r>
-              <a:rPr sz="1800" b="1">
-                <a:solidFill>
-                  <a:srgbClr val="14685F"/>
-                </a:solidFill>
-                <a:latin typeface="Arial"/>
-                <a:ea typeface="Arial"/>
-                <a:cs typeface="Arial"/>
-              </a:rPr>
-              <a:t>10 SEP</a:t>
-            </a:r>
-          </a:p>
-        </p:txBody>
-      </p:sp>
-      <p:sp>
-        <p:nvSpPr>
-          <p:cNvPr id="12" name="">
-            <a:extLst xmlns:a="http://schemas.openxmlformats.org/drawingml/2006/main">
-              <a:ext uri="{FF2B5EF4-FFF2-40B4-BE49-F238E27FC236}">
-                <a16:creationId xmlns:a16="http://schemas.microsoft.com/office/drawing/2014/main" id="{950EA2EB-D5BD-491D-A668-7EBAE8DFB402}"/>
-              </a:ext>
-            </a:extLst>
-          </p:cNvPr>
-          <p:cNvSpPr>
-            <a:spLocks xmlns:a="http://schemas.openxmlformats.org/drawingml/2006/main" noGrp="1"/>
-          </p:cNvSpPr>
-          <p:nvPr/>
-        </p:nvSpPr>
-        <p:spPr>
-          <a:xfrm xmlns:a="http://schemas.openxmlformats.org/drawingml/2006/main">
-            <a:off x="2571750" y="3971925"/>
-            <a:ext cx="9010650" cy="666750"/>
-          </a:xfrm>
-          <a:prstGeom xmlns:a="http://schemas.openxmlformats.org/drawingml/2006/main" prst="rect">
-            <a:avLst/>
-          </a:prstGeom>
-          <a:noFill xmlns:a="http://schemas.openxmlformats.org/drawingml/2006/main"/>
-          <a:ln xmlns:a="http://schemas.openxmlformats.org/drawingml/2006/main" w="0">
-            <a:noFill/>
-          </a:ln>
-        </p:spPr>
-        <p:txBody>
-          <a:bodyPr xmlns:a="http://schemas.openxmlformats.org/drawingml/2006/main">
-            <a:noAutofit/>
-          </a:bodyPr>
-          <a:lstStyle xmlns:a="http://schemas.openxmlformats.org/drawingml/2006/main"/>
-          <a:p xmlns:a="http://schemas.openxmlformats.org/drawingml/2006/main">
-            <a:pPr>
-              <a:defRPr sz="2025" b="0">
-                <a:solidFill>
-                  <a:srgbClr val="283D47"/>
-                </a:solidFill>
-                <a:latin typeface="Arial"/>
-                <a:ea typeface="Arial"/>
-                <a:cs typeface="Arial"/>
-              </a:defRPr>
-            </a:pPr>
-            <a:r>
-              <a:rPr sz="2025" b="0">
-                <a:solidFill>
-                  <a:srgbClr val="283D47"/>
-                </a:solidFill>
-                <a:latin typeface="Arial"/>
-                <a:ea typeface="Arial"/>
-                <a:cs typeface="Arial"/>
-              </a:rPr>
-              <a:t>Hogan reportedly proposes COVID direction → same tables acquire a new framing.</a:t>
-            </a:r>
-          </a:p>
-        </p:txBody>
-      </p:sp>
-      <p:sp>
-        <p:nvSpPr>
-          <p:cNvPr id="13" name="">
-            <a:extLst xmlns:a="http://schemas.openxmlformats.org/drawingml/2006/main">
-              <a:ext uri="{FF2B5EF4-FFF2-40B4-BE49-F238E27FC236}">
-                <a16:creationId xmlns:a16="http://schemas.microsoft.com/office/drawing/2014/main" id="{D19768CF-E00A-4412-8552-0BBEA17446B8}"/>
-              </a:ext>
-            </a:extLst>
-          </p:cNvPr>
-          <p:cNvSpPr>
-            <a:spLocks xmlns:a="http://schemas.openxmlformats.org/drawingml/2006/main" noGrp="1"/>
-          </p:cNvSpPr>
-          <p:nvPr/>
-        </p:nvSpPr>
-        <p:spPr>
-          <a:xfrm xmlns:a="http://schemas.openxmlformats.org/drawingml/2006/main">
-            <a:off x="609600" y="4791075"/>
-            <a:ext cx="1619250" cy="361950"/>
-          </a:xfrm>
-          <a:prstGeom xmlns:a="http://schemas.openxmlformats.org/drawingml/2006/main" prst="rect">
-            <a:avLst/>
-          </a:prstGeom>
-          <a:noFill xmlns:a="http://schemas.openxmlformats.org/drawingml/2006/main"/>
-          <a:ln xmlns:a="http://schemas.openxmlformats.org/drawingml/2006/main" w="0">
-            <a:noFill/>
-          </a:ln>
-        </p:spPr>
-        <p:txBody>
-          <a:bodyPr xmlns:a="http://schemas.openxmlformats.org/drawingml/2006/main">
-            <a:noAutofit/>
-          </a:bodyPr>
-          <a:lstStyle xmlns:a="http://schemas.openxmlformats.org/drawingml/2006/main"/>
-          <a:p xmlns:a="http://schemas.openxmlformats.org/drawingml/2006/main">
-            <a:pPr>
-              <a:defRPr sz="1800" b="1">
-                <a:solidFill>
-                  <a:srgbClr val="14685F"/>
-                </a:solidFill>
-                <a:latin typeface="Arial"/>
-                <a:ea typeface="Arial"/>
-                <a:cs typeface="Arial"/>
-              </a:defRPr>
-            </a:pPr>
-            <a:r>
-              <a:rPr sz="1800" b="1">
-                <a:solidFill>
-                  <a:srgbClr val="14685F"/>
-                </a:solidFill>
-                <a:latin typeface="Arial"/>
-                <a:ea typeface="Arial"/>
-                <a:cs typeface="Arial"/>
-              </a:rPr>
-              <a:t>12–13 SEP</a:t>
-            </a:r>
-          </a:p>
-        </p:txBody>
-      </p:sp>
-      <p:sp>
-        <p:nvSpPr>
-          <p:cNvPr id="14" name="">
-            <a:extLst xmlns:a="http://schemas.openxmlformats.org/drawingml/2006/main">
-              <a:ext uri="{FF2B5EF4-FFF2-40B4-BE49-F238E27FC236}">
-                <a16:creationId xmlns:a16="http://schemas.microsoft.com/office/drawing/2014/main" id="{FA8F6F26-D1EA-441A-B65E-248CA06C71F7}"/>
-              </a:ext>
-            </a:extLst>
-          </p:cNvPr>
-          <p:cNvSpPr>
-            <a:spLocks xmlns:a="http://schemas.openxmlformats.org/drawingml/2006/main" noGrp="1"/>
-          </p:cNvSpPr>
-          <p:nvPr/>
-        </p:nvSpPr>
-        <p:spPr>
-          <a:xfrm xmlns:a="http://schemas.openxmlformats.org/drawingml/2006/main">
-            <a:off x="2571750" y="4791075"/>
-            <a:ext cx="9010650" cy="666750"/>
-          </a:xfrm>
-          <a:prstGeom xmlns:a="http://schemas.openxmlformats.org/drawingml/2006/main" prst="rect">
-            <a:avLst/>
-          </a:prstGeom>
-          <a:noFill xmlns:a="http://schemas.openxmlformats.org/drawingml/2006/main"/>
-          <a:ln xmlns:a="http://schemas.openxmlformats.org/drawingml/2006/main" w="0">
-            <a:noFill/>
-          </a:ln>
-        </p:spPr>
-        <p:txBody>
-          <a:bodyPr xmlns:a="http://schemas.openxmlformats.org/drawingml/2006/main">
-            <a:noAutofit/>
-          </a:bodyPr>
-          <a:lstStyle xmlns:a="http://schemas.openxmlformats.org/drawingml/2006/main"/>
-          <a:p xmlns:a="http://schemas.openxmlformats.org/drawingml/2006/main">
-            <a:pPr>
-              <a:defRPr sz="2025" b="0">
-                <a:solidFill>
-                  <a:srgbClr val="283D47"/>
-                </a:solidFill>
-                <a:latin typeface="Arial"/>
-                <a:ea typeface="Arial"/>
-                <a:cs typeface="Arial"/>
-              </a:defRPr>
-            </a:pPr>
-            <a:r>
-              <a:rPr sz="2025" b="0">
-                <a:solidFill>
-                  <a:srgbClr val="283D47"/>
-                </a:solidFill>
-                <a:latin typeface="Arial"/>
-                <a:ea typeface="Arial"/>
-                <a:cs typeface="Arial"/>
-              </a:rPr>
-              <a:t>Candidate repairs narrow the narrative → manuscript authority remains conflicted.</a:t>
+              <a:t>A novelty gate must confirm that contribution before committing to the expanded study.</a:t>
             </a:r>
           </a:p>
         </p:txBody>
@@ -5143,7 +4820,7 @@
     </p:spTree>
     <p:extLst>
       <p:ext uri="{BB962C8B-B14F-4D97-AF65-F5344CB8AC3E}">
-        <p14:creationId xmlns:p14="http://schemas.microsoft.com/office/powerpoint/2010/main" val="1415623441"/>
+        <p14:creationId xmlns:p14="http://schemas.microsoft.com/office/powerpoint/2010/main" val="919992917"/>
       </p:ext>
     </p:extLst>
   </p:cSld>
@@ -5174,7 +4851,7 @@
           <p:cNvPr id="7" name="">
             <a:extLst xmlns:a="http://schemas.openxmlformats.org/drawingml/2006/main">
               <a:ext uri="{FF2B5EF4-FFF2-40B4-BE49-F238E27FC236}">
-                <a16:creationId xmlns:a16="http://schemas.microsoft.com/office/drawing/2014/main" id="{3FCB9882-C74F-493A-AE04-B03B3450BE60}"/>
+                <a16:creationId xmlns:a16="http://schemas.microsoft.com/office/drawing/2014/main" id="{CC9B8A1F-7770-45D3-9FF7-2741E48F8112}"/>
               </a:ext>
             </a:extLst>
           </p:cNvPr>
@@ -5221,7 +4898,7 @@
                 <a:ea typeface="Arial"/>
                 <a:cs typeface="Arial"/>
               </a:rPr>
-              <a:t>Three objects require three interpretations</a:t>
+              <a:t>Distinct targets require distinct evidence</a:t>
             </a:r>
           </a:p>
         </p:txBody>
@@ -5231,7 +4908,7 @@
           <p:cNvPr id="2" name="">
             <a:extLst xmlns:a="http://schemas.openxmlformats.org/drawingml/2006/main">
               <a:ext uri="{FF2B5EF4-FFF2-40B4-BE49-F238E27FC236}">
-                <a16:creationId xmlns:a16="http://schemas.microsoft.com/office/drawing/2014/main" id="{28AC9F9C-9C2C-4DC0-AD13-E357691D170E}"/>
+                <a16:creationId xmlns:a16="http://schemas.microsoft.com/office/drawing/2014/main" id="{A99FF62E-E45C-4A38-887F-CE4B6584B1BD}"/>
               </a:ext>
             </a:extLst>
           </p:cNvPr>
@@ -5243,7 +4920,7 @@
         <p:spPr>
           <a:xfrm xmlns:a="http://schemas.openxmlformats.org/drawingml/2006/main">
             <a:off x="609600" y="6448425"/>
-            <a:ext cx="6953250" cy="209550"/>
+            <a:ext cx="8572500" cy="209550"/>
           </a:xfrm>
           <a:prstGeom xmlns:a="http://schemas.openxmlformats.org/drawingml/2006/main" prst="rect">
             <a:avLst/>
@@ -5278,7 +4955,7 @@
                 <a:ea typeface="Arial"/>
                 <a:cs typeface="Arial"/>
               </a:rPr>
-              <a:t>LAIDLAW · INTERNAL RESEARCH STATE · 2 OCT 2026</a:t>
+              <a:t>LAIDLAW  INTERNAL RESEARCH STATE  2 OCT 2026</a:t>
             </a:r>
           </a:p>
         </p:txBody>
@@ -5288,7 +4965,7 @@
           <p:cNvPr id="3" name="">
             <a:extLst xmlns:a="http://schemas.openxmlformats.org/drawingml/2006/main">
               <a:ext uri="{FF2B5EF4-FFF2-40B4-BE49-F238E27FC236}">
-                <a16:creationId xmlns:a16="http://schemas.microsoft.com/office/drawing/2014/main" id="{28B7470F-240C-4BD2-8CA4-C6EF7A15CC7E}"/>
+                <a16:creationId xmlns:a16="http://schemas.microsoft.com/office/drawing/2014/main" id="{0DFEC2F1-A6C0-4443-8416-5E6376D0237D}"/>
               </a:ext>
             </a:extLst>
           </p:cNvPr>
@@ -5345,7 +5022,7 @@
           <p:cNvPr id="4" name="">
             <a:extLst xmlns:a="http://schemas.openxmlformats.org/drawingml/2006/main">
               <a:ext uri="{FF2B5EF4-FFF2-40B4-BE49-F238E27FC236}">
-                <a16:creationId xmlns:a16="http://schemas.microsoft.com/office/drawing/2014/main" id="{1051AC38-6347-4853-AD0E-2A47B2AE6041}"/>
+                <a16:creationId xmlns:a16="http://schemas.microsoft.com/office/drawing/2014/main" id="{3872D94D-8011-464D-95E9-35B0DC9B99D1}"/>
               </a:ext>
             </a:extLst>
           </p:cNvPr>
@@ -5392,7 +5069,7 @@
                 <a:ea typeface="Arial"/>
                 <a:cs typeface="Arial"/>
               </a:rPr>
-              <a:t>Sources: C02, C03, C07, C08 · source links and limits in notes/register</a:t>
+              <a:t>Sources: receipt, core. Links and scientific limits in notes.</a:t>
             </a:r>
           </a:p>
         </p:txBody>
@@ -5405,18 +5082,18 @@
         </p:nvGraphicFramePr>
         <p:xfrm>
           <a:off xmlns:a="http://schemas.openxmlformats.org/drawingml/2006/main" x="609600" y="1562100"/>
-          <a:ext xmlns:a="http://schemas.openxmlformats.org/drawingml/2006/main" cx="10972800" cy="3581400"/>
+          <a:ext xmlns:a="http://schemas.openxmlformats.org/drawingml/2006/main" cx="10972800" cy="3705225"/>
         </p:xfrm>
         <a:graphic xmlns:a="http://schemas.openxmlformats.org/drawingml/2006/main">
           <a:graphicData uri="http://schemas.openxmlformats.org/drawingml/2006/table">
             <a:tbl>
               <a:tblPr/>
               <a:tblGrid>
-                <a:gridCol w="2286000"/>
-                <a:gridCol w="4191000"/>
-                <a:gridCol w="4495800"/>
+                <a:gridCol w="2667000"/>
+                <a:gridCol w="4305300"/>
+                <a:gridCol w="4000500"/>
               </a:tblGrid>
-              <a:tr h="895350">
+              <a:tr h="741045">
                 <a:tc>
                   <a:txBody>
                     <a:bodyPr/>
@@ -5431,7 +5108,7 @@
                           <a:ea typeface="Arial"/>
                           <a:cs typeface="Arial"/>
                         </a:rPr>
-                        <a:t>Object</a:t>
+                        <a:t>Target</a:t>
                       </a:r>
                     </a:p>
                   </a:txBody>
@@ -5455,7 +5132,7 @@
                           <a:ea typeface="Arial"/>
                           <a:cs typeface="Arial"/>
                         </a:rPr>
-                        <a:t>What is measured</a:t>
+                        <a:t>Required data</a:t>
                       </a:r>
                     </a:p>
                   </a:txBody>
@@ -5479,7 +5156,7 @@
                           <a:ea typeface="Arial"/>
                           <a:cs typeface="Arial"/>
                         </a:rPr>
-                        <a:t>What it cannot establish</a:t>
+                        <a:t>Current status</a:t>
                       </a:r>
                     </a:p>
                   </a:txBody>
@@ -5490,7 +5167,7 @@
                   </a:tcPr>
                 </a:tc>
               </a:tr>
-              <a:tr h="895350">
+              <a:tr h="741045">
                 <a:tc>
                   <a:txBody>
                     <a:bodyPr/>
@@ -5529,7 +5206,7 @@
                           <a:ea typeface="Arial"/>
                           <a:cs typeface="Arial"/>
                         </a:rPr>
-                        <a:t>Annual totals of first events in this extraction</a:t>
+                        <a:t>Counts with stable extraction definitions</a:t>
                       </a:r>
                     </a:p>
                   </a:txBody>
@@ -5553,7 +5230,7 @@
                           <a:ea typeface="Arial"/>
                           <a:cs typeface="Arial"/>
                         </a:rPr>
-                        <a:t>Incidence, cause of admission or improved health</a:t>
+                        <a:t>Available, definitions partly unresolved</a:t>
                       </a:r>
                     </a:p>
                   </a:txBody>
@@ -5564,7 +5241,7 @@
                   </a:tcPr>
                 </a:tc>
               </a:tr>
-              <a:tr h="895350">
+              <a:tr h="741045">
                 <a:tc>
                   <a:txBody>
                     <a:bodyPr/>
@@ -5579,7 +5256,7 @@
                           <a:ea typeface="Arial"/>
                           <a:cs typeface="Arial"/>
                         </a:rPr>
-                        <a:t>Existing model parameter</a:t>
+                        <a:t>Cohort incidence</a:t>
                       </a:r>
                     </a:p>
                   </a:txBody>
@@ -5603,7 +5280,7 @@
                           <a:ea typeface="Arial"/>
                           <a:cs typeface="Arial"/>
                         </a:rPr>
-                        <a:t>Weather count ratio conditional on month, time smooth and days offset</a:t>
+                        <a:t>Validated events and eligible person-time</a:t>
                       </a:r>
                     </a:p>
                   </a:txBody>
@@ -5627,7 +5304,7 @@
                           <a:ea typeface="Arial"/>
                           <a:cs typeface="Arial"/>
                         </a:rPr>
-                        <a:t>A COVID treatment effect or a tested window difference</a:t>
+                        <a:t>Requires new governed data</a:t>
                       </a:r>
                     </a:p>
                   </a:txBody>
@@ -5638,7 +5315,7 @@
                   </a:tcPr>
                 </a:tc>
               </a:tr>
-              <a:tr h="895350">
+              <a:tr h="741045">
                 <a:tc>
                   <a:txBody>
                     <a:bodyPr/>
@@ -5653,7 +5330,7 @@
                           <a:ea typeface="Arial"/>
                           <a:cs typeface="Arial"/>
                         </a:rPr>
-                        <a:t>Proposed causal target</a:t>
+                        <a:t>Changing weather association</a:t>
                       </a:r>
                     </a:p>
                   </a:txBody>
@@ -5677,7 +5354,7 @@
                           <a:ea typeface="Arial"/>
                           <a:cs typeface="Arial"/>
                         </a:rPr>
-                        <a:t>Pandemic-era change in health, service use or recorded events</a:t>
+                        <a:t>Full-series common basis and direct interaction contrast</a:t>
                       </a:r>
                     </a:p>
                   </a:txBody>
@@ -5701,7 +5378,81 @@
                           <a:ea typeface="Arial"/>
                           <a:cs typeface="Arial"/>
                         </a:rPr>
-                        <a:t>No agreed intervention, counterfactual or identified target yet</a:t>
+                        <a:t>Not estimated</a:t>
+                      </a:r>
+                    </a:p>
+                  </a:txBody>
+                  <a:tcPr marL="133350" marR="133350" marT="114300" marB="95250" anchor="ctr">
+                    <a:solidFill>
+                      <a:srgbClr val="FFFFFF"/>
+                    </a:solidFill>
+                  </a:tcPr>
+                </a:tc>
+              </a:tr>
+              <a:tr h="741045">
+                <a:tc>
+                  <a:txBody>
+                    <a:bodyPr/>
+                    <a:lstStyle/>
+                    <a:p>
+                      <a:r>
+                        <a:rPr sz="1875">
+                          <a:solidFill>
+                            <a:srgbClr val="283D47"/>
+                          </a:solidFill>
+                          <a:latin typeface="Arial"/>
+                          <a:ea typeface="Arial"/>
+                          <a:cs typeface="Arial"/>
+                        </a:rPr>
+                        <a:t>Causal health-system mechanism</a:t>
+                      </a:r>
+                    </a:p>
+                  </a:txBody>
+                  <a:tcPr marL="133350" marR="133350" marT="114300" marB="95250" anchor="ctr">
+                    <a:solidFill>
+                      <a:srgbClr val="FFFFFF"/>
+                    </a:solidFill>
+                  </a:tcPr>
+                </a:tc>
+                <a:tc>
+                  <a:txBody>
+                    <a:bodyPr/>
+                    <a:lstStyle/>
+                    <a:p>
+                      <a:r>
+                        <a:rPr sz="1875">
+                          <a:solidFill>
+                            <a:srgbClr val="283D47"/>
+                          </a:solidFill>
+                          <a:latin typeface="Arial"/>
+                          <a:ea typeface="Arial"/>
+                          <a:cs typeface="Arial"/>
+                        </a:rPr>
+                        <a:t>Defined intervention and defensible identification assumptions</a:t>
+                      </a:r>
+                    </a:p>
+                  </a:txBody>
+                  <a:tcPr marL="133350" marR="133350" marT="114300" marB="95250" anchor="ctr">
+                    <a:solidFill>
+                      <a:srgbClr val="FFFFFF"/>
+                    </a:solidFill>
+                  </a:tcPr>
+                </a:tc>
+                <a:tc>
+                  <a:txBody>
+                    <a:bodyPr/>
+                    <a:lstStyle/>
+                    <a:p>
+                      <a:r>
+                        <a:rPr sz="1875">
+                          <a:solidFill>
+                            <a:srgbClr val="283D47"/>
+                          </a:solidFill>
+                          <a:latin typeface="Arial"/>
+                          <a:ea typeface="Arial"/>
+                          <a:cs typeface="Arial"/>
+                        </a:rPr>
+                        <a:t>Not identified</a:t>
                       </a:r>
                     </a:p>
                   </a:txBody>
@@ -5721,7 +5472,7 @@
           <p:cNvPr id="6" name="">
             <a:extLst xmlns:a="http://schemas.openxmlformats.org/drawingml/2006/main">
               <a:ext uri="{FF2B5EF4-FFF2-40B4-BE49-F238E27FC236}">
-                <a16:creationId xmlns:a16="http://schemas.microsoft.com/office/drawing/2014/main" id="{0F2FCDA2-4618-4EF3-87AE-9438152CB9DE}"/>
+                <a16:creationId xmlns:a16="http://schemas.microsoft.com/office/drawing/2014/main" id="{5D5FF268-90CD-4305-8A36-D50244C74A08}"/>
               </a:ext>
             </a:extLst>
           </p:cNvPr>
@@ -5732,8 +5483,8 @@
         </p:nvSpPr>
         <p:spPr>
           <a:xfrm xmlns:a="http://schemas.openxmlformats.org/drawingml/2006/main">
-            <a:off x="609600" y="5305425"/>
-            <a:ext cx="10972800" cy="685800"/>
+            <a:off x="609600" y="5486400"/>
+            <a:ext cx="10972800" cy="600075"/>
           </a:xfrm>
           <a:prstGeom xmlns:a="http://schemas.openxmlformats.org/drawingml/2006/main" prst="rect">
             <a:avLst/>
@@ -5768,7 +5519,7 @@
                 <a:ea typeface="Arial"/>
                 <a:cs typeface="Arial"/>
               </a:rPr>
-              <a:t>84 months are inside 132. Subsetting changes spline knots and exposure support.</a:t>
+              <a:t>Calendar periods describe context. They do not by themselves define</a:t>
             </a:r>
           </a:p>
           <a:p xmlns:a="http://schemas.openxmlformats.org/drawingml/2006/main">
@@ -5791,7 +5542,7 @@
                 <a:ea typeface="Arial"/>
                 <a:cs typeface="Arial"/>
               </a:rPr>
-              <a:t>Five official days is a reporting scale; COVID-phase adjustment is not a third window.</a:t>
+              <a:t>a treatment, valid comparator or causal intervention.</a:t>
             </a:r>
           </a:p>
         </p:txBody>
@@ -5799,7 +5550,7 @@
     </p:spTree>
     <p:extLst>
       <p:ext uri="{BB962C8B-B14F-4D97-AF65-F5344CB8AC3E}">
-        <p14:creationId xmlns:p14="http://schemas.microsoft.com/office/powerpoint/2010/main" val="687084836"/>
+        <p14:creationId xmlns:p14="http://schemas.microsoft.com/office/powerpoint/2010/main" val="1082223101"/>
       </p:ext>
     </p:extLst>
   </p:cSld>
@@ -5830,7 +5581,7 @@
           <p:cNvPr id="7" name="">
             <a:extLst xmlns:a="http://schemas.openxmlformats.org/drawingml/2006/main">
               <a:ext uri="{FF2B5EF4-FFF2-40B4-BE49-F238E27FC236}">
-                <a16:creationId xmlns:a16="http://schemas.microsoft.com/office/drawing/2014/main" id="{AA1B5F34-A7B8-400A-9B75-F8A19CFF2C70}"/>
+                <a16:creationId xmlns:a16="http://schemas.microsoft.com/office/drawing/2014/main" id="{000E141C-1A30-444A-AAA1-9CEDB7A55BBD}"/>
               </a:ext>
             </a:extLst>
           </p:cNvPr>
@@ -5877,7 +5628,7 @@
                 <a:ea typeface="Arial"/>
                 <a:cs typeface="Arial"/>
               </a:rPr>
-              <a:t>Most endpoint decline occurred before 2020</a:t>
+              <a:t>Recorded counts declined before 2020</a:t>
             </a:r>
           </a:p>
         </p:txBody>
@@ -5887,7 +5638,7 @@
           <p:cNvPr id="2" name="">
             <a:extLst xmlns:a="http://schemas.openxmlformats.org/drawingml/2006/main">
               <a:ext uri="{FF2B5EF4-FFF2-40B4-BE49-F238E27FC236}">
-                <a16:creationId xmlns:a16="http://schemas.microsoft.com/office/drawing/2014/main" id="{C2953DC9-A15A-474E-AAD6-6777871F6369}"/>
+                <a16:creationId xmlns:a16="http://schemas.microsoft.com/office/drawing/2014/main" id="{07701F77-03E6-49A0-B0BC-F6F210B3B90A}"/>
               </a:ext>
             </a:extLst>
           </p:cNvPr>
@@ -5899,7 +5650,7 @@
         <p:spPr>
           <a:xfrm xmlns:a="http://schemas.openxmlformats.org/drawingml/2006/main">
             <a:off x="609600" y="6448425"/>
-            <a:ext cx="6953250" cy="209550"/>
+            <a:ext cx="8572500" cy="209550"/>
           </a:xfrm>
           <a:prstGeom xmlns:a="http://schemas.openxmlformats.org/drawingml/2006/main" prst="rect">
             <a:avLst/>
@@ -5934,7 +5685,7 @@
                 <a:ea typeface="Arial"/>
                 <a:cs typeface="Arial"/>
               </a:rPr>
-              <a:t>LAIDLAW · INTERNAL RESEARCH STATE · 2 OCT 2026</a:t>
+              <a:t>LAIDLAW  INTERNAL RESEARCH STATE  2 OCT 2026</a:t>
             </a:r>
           </a:p>
         </p:txBody>
@@ -5944,7 +5695,7 @@
           <p:cNvPr id="3" name="">
             <a:extLst xmlns:a="http://schemas.openxmlformats.org/drawingml/2006/main">
               <a:ext uri="{FF2B5EF4-FFF2-40B4-BE49-F238E27FC236}">
-                <a16:creationId xmlns:a16="http://schemas.microsoft.com/office/drawing/2014/main" id="{06E2AF92-271B-4C2D-85DA-F9918E41D5AD}"/>
+                <a16:creationId xmlns:a16="http://schemas.microsoft.com/office/drawing/2014/main" id="{2E009910-4D2F-4656-A33E-25BE428B01E9}"/>
               </a:ext>
             </a:extLst>
           </p:cNvPr>
@@ -6001,7 +5752,7 @@
           <p:cNvPr id="4" name="">
             <a:extLst xmlns:a="http://schemas.openxmlformats.org/drawingml/2006/main">
               <a:ext uri="{FF2B5EF4-FFF2-40B4-BE49-F238E27FC236}">
-                <a16:creationId xmlns:a16="http://schemas.microsoft.com/office/drawing/2014/main" id="{83086732-52DC-4457-8DA6-ACF5D4F67E11}"/>
+                <a16:creationId xmlns:a16="http://schemas.microsoft.com/office/drawing/2014/main" id="{F1BB1BE8-33D6-4B01-B28A-3AEA00EB18DD}"/>
               </a:ext>
             </a:extLst>
           </p:cNvPr>
@@ -6048,7 +5799,7 @@
                 <a:ea typeface="Arial"/>
                 <a:cs typeface="Arial"/>
               </a:rPr>
-              <a:t>Sources: C15 · source links and limits in notes/register</a:t>
+              <a:t>Sources: annual. Links and scientific limits in notes.</a:t>
             </a:r>
           </a:p>
         </p:txBody>
@@ -6065,7 +5816,7 @@
         </p:xfrm>
         <a:graphic xmlns:a="http://schemas.openxmlformats.org/drawingml/2006/main">
           <a:graphicData uri="http://schemas.openxmlformats.org/drawingml/2006/chart">
-            <c:chart xmlns:r="http://schemas.openxmlformats.org/officeDocument/2006/relationships" xmlns:c="http://schemas.openxmlformats.org/drawingml/2006/chart" r:id="Rc257a6fe5a494a9b"/>
+            <c:chart xmlns:r="http://schemas.openxmlformats.org/officeDocument/2006/relationships" xmlns:c="http://schemas.openxmlformats.org/drawingml/2006/chart" r:id="Ra5b1801814a6409f"/>
           </a:graphicData>
         </a:graphic>
       </p:graphicFrame>
@@ -6074,7 +5825,7 @@
           <p:cNvPr id="6" name="">
             <a:extLst xmlns:a="http://schemas.openxmlformats.org/drawingml/2006/main">
               <a:ext uri="{FF2B5EF4-FFF2-40B4-BE49-F238E27FC236}">
-                <a16:creationId xmlns:a16="http://schemas.microsoft.com/office/drawing/2014/main" id="{4FD84583-DA2C-4D00-90BA-934F0BB80B64}"/>
+                <a16:creationId xmlns:a16="http://schemas.microsoft.com/office/drawing/2014/main" id="{43905411-F0E0-49FC-B014-30E76D8EDAFF}"/>
               </a:ext>
             </a:extLst>
           </p:cNvPr>
@@ -6103,7 +5854,7 @@
           <a:lstStyle xmlns:a="http://schemas.openxmlformats.org/drawingml/2006/main"/>
           <a:p xmlns:a="http://schemas.openxmlformats.org/drawingml/2006/main">
             <a:pPr>
-              <a:defRPr sz="1950" b="0">
+              <a:defRPr sz="2025" b="0">
                 <a:solidFill>
                   <a:srgbClr val="283D47"/>
                 </a:solidFill>
@@ -6113,7 +5864,7 @@
               </a:defRPr>
             </a:pPr>
             <a:r>
-              <a:rPr sz="1950" b="0">
+              <a:rPr sz="2025" b="0">
                 <a:solidFill>
                   <a:srgbClr val="283D47"/>
                 </a:solidFill>
@@ -6121,12 +5872,12 @@
                 <a:ea typeface="Arial"/>
                 <a:cs typeface="Arial"/>
               </a:rPr>
-              <a:t>2019 was already near half of 2013. A 2020 trough was followed by partial recovery.</a:t>
+              <a:t>Both series were already near half their 2013 totals by 2019.</a:t>
             </a:r>
           </a:p>
           <a:p xmlns:a="http://schemas.openxmlformats.org/drawingml/2006/main">
             <a:pPr>
-              <a:defRPr sz="1950" b="0">
+              <a:defRPr sz="2025" b="0">
                 <a:solidFill>
                   <a:srgbClr val="283D47"/>
                 </a:solidFill>
@@ -6136,7 +5887,7 @@
               </a:defRPr>
             </a:pPr>
             <a:r>
-              <a:rPr sz="1950" b="0">
+              <a:rPr sz="2025" b="0">
                 <a:solidFill>
                   <a:srgbClr val="283D47"/>
                 </a:solidFill>
@@ -6144,7 +5895,7 @@
                 <a:ea typeface="Arial"/>
                 <a:cs typeface="Arial"/>
               </a:rPr>
-              <a:t>This weakens a COVID-only decade explanation; it does not identify either component.</a:t>
+              <a:t>The 2020 trough and later recovery require a separate explanation.</a:t>
             </a:r>
           </a:p>
         </p:txBody>
@@ -6152,7 +5903,7 @@
     </p:spTree>
     <p:extLst>
       <p:ext uri="{BB962C8B-B14F-4D97-AF65-F5344CB8AC3E}">
-        <p14:creationId xmlns:p14="http://schemas.microsoft.com/office/powerpoint/2010/main" val="358891987"/>
+        <p14:creationId xmlns:p14="http://schemas.microsoft.com/office/powerpoint/2010/main" val="1004829082"/>
       </p:ext>
     </p:extLst>
   </p:cSld>
@@ -6183,7 +5934,7 @@
           <p:cNvPr id="8" name="">
             <a:extLst xmlns:a="http://schemas.openxmlformats.org/drawingml/2006/main">
               <a:ext uri="{FF2B5EF4-FFF2-40B4-BE49-F238E27FC236}">
-                <a16:creationId xmlns:a16="http://schemas.microsoft.com/office/drawing/2014/main" id="{DD752197-1204-41B9-9830-27A31C50B7B1}"/>
+                <a16:creationId xmlns:a16="http://schemas.microsoft.com/office/drawing/2014/main" id="{8F39A00B-C6AC-411B-A1C6-422C18808887}"/>
               </a:ext>
             </a:extLst>
           </p:cNvPr>
@@ -6230,7 +5981,7 @@
                 <a:ea typeface="Arial"/>
                 <a:cs typeface="Arial"/>
               </a:rPr>
-              <a:t>Point estimates move; a difference was not tested</a:t>
+              <a:t>Overlapping windows do not test a period effect</a:t>
             </a:r>
           </a:p>
         </p:txBody>
@@ -6240,7 +5991,7 @@
           <p:cNvPr id="2" name="">
             <a:extLst xmlns:a="http://schemas.openxmlformats.org/drawingml/2006/main">
               <a:ext uri="{FF2B5EF4-FFF2-40B4-BE49-F238E27FC236}">
-                <a16:creationId xmlns:a16="http://schemas.microsoft.com/office/drawing/2014/main" id="{50391A47-6277-483A-8D36-57AD3C0EF046}"/>
+                <a16:creationId xmlns:a16="http://schemas.microsoft.com/office/drawing/2014/main" id="{63015DB7-A97B-4C14-B57E-3F1A0D78F7F2}"/>
               </a:ext>
             </a:extLst>
           </p:cNvPr>
@@ -6252,7 +6003,7 @@
         <p:spPr>
           <a:xfrm xmlns:a="http://schemas.openxmlformats.org/drawingml/2006/main">
             <a:off x="609600" y="6448425"/>
-            <a:ext cx="6953250" cy="209550"/>
+            <a:ext cx="8572500" cy="209550"/>
           </a:xfrm>
           <a:prstGeom xmlns:a="http://schemas.openxmlformats.org/drawingml/2006/main" prst="rect">
             <a:avLst/>
@@ -6287,7 +6038,7 @@
                 <a:ea typeface="Arial"/>
                 <a:cs typeface="Arial"/>
               </a:rPr>
-              <a:t>LAIDLAW · INTERNAL RESEARCH STATE · 2 OCT 2026</a:t>
+              <a:t>LAIDLAW  INTERNAL RESEARCH STATE  2 OCT 2026</a:t>
             </a:r>
           </a:p>
         </p:txBody>
@@ -6297,7 +6048,7 @@
           <p:cNvPr id="3" name="">
             <a:extLst xmlns:a="http://schemas.openxmlformats.org/drawingml/2006/main">
               <a:ext uri="{FF2B5EF4-FFF2-40B4-BE49-F238E27FC236}">
-                <a16:creationId xmlns:a16="http://schemas.microsoft.com/office/drawing/2014/main" id="{2036493F-7C1E-40ED-9D39-A8DA5965E00E}"/>
+                <a16:creationId xmlns:a16="http://schemas.microsoft.com/office/drawing/2014/main" id="{3085BC15-5E52-43CE-B34B-EF695DE8A904}"/>
               </a:ext>
             </a:extLst>
           </p:cNvPr>
@@ -6354,7 +6105,7 @@
           <p:cNvPr id="4" name="">
             <a:extLst xmlns:a="http://schemas.openxmlformats.org/drawingml/2006/main">
               <a:ext uri="{FF2B5EF4-FFF2-40B4-BE49-F238E27FC236}">
-                <a16:creationId xmlns:a16="http://schemas.microsoft.com/office/drawing/2014/main" id="{9C5F30C2-0648-414B-9C6A-8B95D6FC5CB4}"/>
+                <a16:creationId xmlns:a16="http://schemas.microsoft.com/office/drawing/2014/main" id="{1AC522E5-3D34-4D79-A69B-53DF25F0F53C}"/>
               </a:ext>
             </a:extLst>
           </p:cNvPr>
@@ -6401,7 +6152,7 @@
                 <a:ea typeface="Arial"/>
                 <a:cs typeface="Arial"/>
               </a:rPr>
-              <a:t>Sources: C07, C09, C16, C17 · source links and limits in notes/register</a:t>
+              <a:t>Sources: sensitivity, core. Links and scientific limits in notes.</a:t>
             </a:r>
           </a:p>
         </p:txBody>
@@ -6414,7 +6165,7 @@
         </p:nvGraphicFramePr>
         <p:xfrm>
           <a:off xmlns:a="http://schemas.openxmlformats.org/drawingml/2006/main" x="609600" y="1524000"/>
-          <a:ext xmlns:a="http://schemas.openxmlformats.org/drawingml/2006/main" cx="10972800" cy="3086100"/>
+          <a:ext xmlns:a="http://schemas.openxmlformats.org/drawingml/2006/main" cx="10972800" cy="3152775"/>
         </p:xfrm>
         <a:graphic xmlns:a="http://schemas.openxmlformats.org/drawingml/2006/main">
           <a:graphicData uri="http://schemas.openxmlformats.org/drawingml/2006/table">
@@ -6425,7 +6176,7 @@
                 <a:gridCol w="3486150"/>
                 <a:gridCol w="3486150"/>
               </a:tblGrid>
-              <a:tr h="771525">
+              <a:tr h="788194">
                 <a:tc>
                   <a:txBody>
                     <a:bodyPr/>
@@ -6464,7 +6215,20 @@
                           <a:ea typeface="Arial"/>
                           <a:cs typeface="Arial"/>
                         </a:rPr>
-                        <a:t>Nested 84 months</a:t>
+                        <a:t>2013-2019</a:t>
+                      </a:r>
+                    </a:p>
+                    <a:p>
+                      <a:r>
+                        <a:rPr sz="2025" b="1">
+                          <a:solidFill>
+                            <a:srgbClr val="FFFFFF"/>
+                          </a:solidFill>
+                          <a:latin typeface="Arial"/>
+                          <a:ea typeface="Arial"/>
+                          <a:cs typeface="Arial"/>
+                        </a:rPr>
+                        <a:t>84 months</a:t>
                       </a:r>
                     </a:p>
                   </a:txBody>
@@ -6488,7 +6252,20 @@
                           <a:ea typeface="Arial"/>
                           <a:cs typeface="Arial"/>
                         </a:rPr>
-                        <a:t>Full 132 months</a:t>
+                        <a:t>2013-2023</a:t>
+                      </a:r>
+                    </a:p>
+                    <a:p>
+                      <a:r>
+                        <a:rPr sz="2025" b="1">
+                          <a:solidFill>
+                            <a:srgbClr val="FFFFFF"/>
+                          </a:solidFill>
+                          <a:latin typeface="Arial"/>
+                          <a:ea typeface="Arial"/>
+                          <a:cs typeface="Arial"/>
+                        </a:rPr>
+                        <a:t>132 months</a:t>
                       </a:r>
                     </a:p>
                   </a:txBody>
@@ -6499,7 +6276,7 @@
                   </a:tcPr>
                 </a:tc>
               </a:tr>
-              <a:tr h="771525">
+              <a:tr h="788194">
                 <a:tc>
                   <a:txBody>
                     <a:bodyPr/>
@@ -6514,7 +6291,7 @@
                           <a:ea typeface="Arial"/>
                           <a:cs typeface="Arial"/>
                         </a:rPr>
-                        <a:t>HF · cold days</a:t>
+                        <a:t>HF cold days</a:t>
                       </a:r>
                     </a:p>
                   </a:txBody>
@@ -6538,7 +6315,7 @@
                           <a:ea typeface="Arial"/>
                           <a:cs typeface="Arial"/>
                         </a:rPr>
-                        <a:t>1.113 (1.053–1.176)</a:t>
+                        <a:t>1.113 (1.053-1.176)</a:t>
                       </a:r>
                     </a:p>
                   </a:txBody>
@@ -6562,7 +6339,7 @@
                           <a:ea typeface="Arial"/>
                           <a:cs typeface="Arial"/>
                         </a:rPr>
-                        <a:t>1.073 (1.006–1.144)</a:t>
+                        <a:t>1.073 (1.006-1.144)</a:t>
                       </a:r>
                     </a:p>
                   </a:txBody>
@@ -6573,7 +6350,7 @@
                   </a:tcPr>
                 </a:tc>
               </a:tr>
-              <a:tr h="771525">
+              <a:tr h="788194">
                 <a:tc>
                   <a:txBody>
                     <a:bodyPr/>
@@ -6588,7 +6365,7 @@
                           <a:ea typeface="Arial"/>
                           <a:cs typeface="Arial"/>
                         </a:rPr>
-                        <a:t>CHD · cold days</a:t>
+                        <a:t>CHD cold days</a:t>
                       </a:r>
                     </a:p>
                   </a:txBody>
@@ -6612,7 +6389,7 @@
                           <a:ea typeface="Arial"/>
                           <a:cs typeface="Arial"/>
                         </a:rPr>
-                        <a:t>1.036 (1.007–1.067)</a:t>
+                        <a:t>1.036 (1.007-1.067)</a:t>
                       </a:r>
                     </a:p>
                   </a:txBody>
@@ -6636,7 +6413,7 @@
                           <a:ea typeface="Arial"/>
                           <a:cs typeface="Arial"/>
                         </a:rPr>
-                        <a:t>0.995 (0.949–1.043)</a:t>
+                        <a:t>0.995 (0.949-1.043)</a:t>
                       </a:r>
                     </a:p>
                   </a:txBody>
@@ -6647,7 +6424,7 @@
                   </a:tcPr>
                 </a:tc>
               </a:tr>
-              <a:tr h="771525">
+              <a:tr h="788194">
                 <a:tc>
                   <a:txBody>
                     <a:bodyPr/>
@@ -6662,7 +6439,7 @@
                           <a:ea typeface="Arial"/>
                           <a:cs typeface="Arial"/>
                         </a:rPr>
-                        <a:t>CHD · hot nights</a:t>
+                        <a:t>CHD hot nights</a:t>
                       </a:r>
                     </a:p>
                   </a:txBody>
@@ -6686,7 +6463,7 @@
                           <a:ea typeface="Arial"/>
                           <a:cs typeface="Arial"/>
                         </a:rPr>
-                        <a:t>1.011 (0.991–1.032)</a:t>
+                        <a:t>1.011 (0.991-1.032)</a:t>
                       </a:r>
                     </a:p>
                   </a:txBody>
@@ -6710,7 +6487,7 @@
                           <a:ea typeface="Arial"/>
                           <a:cs typeface="Arial"/>
                         </a:rPr>
-                        <a:t>1.022 (1.002–1.042)</a:t>
+                        <a:t>1.022 (1.002-1.042)</a:t>
                       </a:r>
                     </a:p>
                   </a:txBody>
@@ -6730,7 +6507,7 @@
           <p:cNvPr id="6" name="">
             <a:extLst xmlns:a="http://schemas.openxmlformats.org/drawingml/2006/main">
               <a:ext uri="{FF2B5EF4-FFF2-40B4-BE49-F238E27FC236}">
-                <a16:creationId xmlns:a16="http://schemas.microsoft.com/office/drawing/2014/main" id="{4E2BE639-7570-4458-93D4-3B10F3892CF3}"/>
+                <a16:creationId xmlns:a16="http://schemas.microsoft.com/office/drawing/2014/main" id="{0F6D1288-5B82-4B6D-A4D1-22C9A49E7EAB}"/>
               </a:ext>
             </a:extLst>
           </p:cNvPr>
@@ -6741,8 +6518,8 @@
         </p:nvSpPr>
         <p:spPr>
           <a:xfrm xmlns:a="http://schemas.openxmlformats.org/drawingml/2006/main">
-            <a:off x="609600" y="4800600"/>
-            <a:ext cx="10972800" cy="666750"/>
+            <a:off x="609600" y="4895850"/>
+            <a:ext cx="10972800" cy="676275"/>
           </a:xfrm>
           <a:prstGeom xmlns:a="http://schemas.openxmlformats.org/drawingml/2006/main" prst="rect">
             <a:avLst/>
@@ -6777,7 +6554,7 @@
                 <a:ea typeface="Arial"/>
                 <a:cs typeface="Arial"/>
               </a:rPr>
-              <a:t>Existing Newey–West lag-6 intervals. Full-window BH q-values all exceed 0.19;</a:t>
+              <a:t>These examples use Newey-West lag-6 intervals. The 84 months are nested</a:t>
             </a:r>
           </a:p>
           <a:p xmlns:a="http://schemas.openxmlformats.org/drawingml/2006/main">
@@ -6800,7 +6577,7 @@
                 <a:ea typeface="Arial"/>
                 <a:cs typeface="Arial"/>
               </a:rPr>
-              <a:t>nested fits are outside that multiplicity family.</a:t>
+              <a:t>inside 132, and subsetting changes spline bases and exposure support.</a:t>
             </a:r>
           </a:p>
         </p:txBody>
@@ -6810,7 +6587,7 @@
           <p:cNvPr id="7" name="">
             <a:extLst xmlns:a="http://schemas.openxmlformats.org/drawingml/2006/main">
               <a:ext uri="{FF2B5EF4-FFF2-40B4-BE49-F238E27FC236}">
-                <a16:creationId xmlns:a16="http://schemas.microsoft.com/office/drawing/2014/main" id="{42D7F341-3305-4225-8110-059B2F71CEA4}"/>
+                <a16:creationId xmlns:a16="http://schemas.microsoft.com/office/drawing/2014/main" id="{181C1E78-A799-4D30-BAB5-2430BFADD3EE}"/>
               </a:ext>
             </a:extLst>
           </p:cNvPr>
@@ -6821,8 +6598,8 @@
         </p:nvSpPr>
         <p:spPr>
           <a:xfrm xmlns:a="http://schemas.openxmlformats.org/drawingml/2006/main">
-            <a:off x="609600" y="5629275"/>
-            <a:ext cx="10972800" cy="361950"/>
+            <a:off x="609600" y="5734050"/>
+            <a:ext cx="10972800" cy="285750"/>
           </a:xfrm>
           <a:prstGeom xmlns:a="http://schemas.openxmlformats.org/drawingml/2006/main" prst="rect">
             <a:avLst/>
@@ -6839,7 +6616,7 @@
           <a:lstStyle xmlns:a="http://schemas.openxmlformats.org/drawingml/2006/main"/>
           <a:p xmlns:a="http://schemas.openxmlformats.org/drawingml/2006/main">
             <a:pPr>
-              <a:defRPr sz="2100" b="1">
+              <a:defRPr sz="2025" b="1">
                 <a:solidFill>
                   <a:srgbClr val="14685F"/>
                 </a:solidFill>
@@ -6849,7 +6626,7 @@
               </a:defRPr>
             </a:pPr>
             <a:r>
-              <a:rPr sz="2100" b="1">
+              <a:rPr sz="2025" b="1">
                 <a:solidFill>
                   <a:srgbClr val="14685F"/>
                 </a:solidFill>
@@ -6857,7 +6634,7 @@
                 <a:ea typeface="Arial"/>
                 <a:cs typeface="Arial"/>
               </a:rPr>
-              <a:t>Overlapping samples + re-knotted trend ≠ independent pre/post contrast.</a:t>
+              <a:t>No separate post-period model or formal period-difference test exists.</a:t>
             </a:r>
           </a:p>
         </p:txBody>
@@ -6865,7 +6642,7 @@
     </p:spTree>
     <p:extLst>
       <p:ext uri="{BB962C8B-B14F-4D97-AF65-F5344CB8AC3E}">
-        <p14:creationId xmlns:p14="http://schemas.microsoft.com/office/powerpoint/2010/main" val="1530347212"/>
+        <p14:creationId xmlns:p14="http://schemas.microsoft.com/office/powerpoint/2010/main" val="2011050264"/>
       </p:ext>
     </p:extLst>
   </p:cSld>
@@ -6893,10 +6670,10 @@
       </p:grpSpPr>
       <p:sp>
         <p:nvSpPr>
-          <p:cNvPr id="11" name="">
+          <p:cNvPr id="7" name="">
             <a:extLst xmlns:a="http://schemas.openxmlformats.org/drawingml/2006/main">
               <a:ext uri="{FF2B5EF4-FFF2-40B4-BE49-F238E27FC236}">
-                <a16:creationId xmlns:a16="http://schemas.microsoft.com/office/drawing/2014/main" id="{908FC011-4083-48D0-B552-6E3C476C030D}"/>
+                <a16:creationId xmlns:a16="http://schemas.microsoft.com/office/drawing/2014/main" id="{BDEF3023-1714-48A8-8191-740AC33A3493}"/>
               </a:ext>
             </a:extLst>
           </p:cNvPr>
@@ -6943,7 +6720,7 @@
                 <a:ea typeface="Arial"/>
                 <a:cs typeface="Arial"/>
               </a:rPr>
-              <a:t>Keep failures at the scope actually tested</a:t>
+              <a:t>Model criticism limits interpretation</a:t>
             </a:r>
           </a:p>
         </p:txBody>
@@ -6953,7 +6730,7 @@
           <p:cNvPr id="2" name="">
             <a:extLst xmlns:a="http://schemas.openxmlformats.org/drawingml/2006/main">
               <a:ext uri="{FF2B5EF4-FFF2-40B4-BE49-F238E27FC236}">
-                <a16:creationId xmlns:a16="http://schemas.microsoft.com/office/drawing/2014/main" id="{302B1037-4C0D-43A3-830A-B180CA0B3BF8}"/>
+                <a16:creationId xmlns:a16="http://schemas.microsoft.com/office/drawing/2014/main" id="{DEBCACC2-8B0A-4912-99FD-0B691C1586C6}"/>
               </a:ext>
             </a:extLst>
           </p:cNvPr>
@@ -6965,7 +6742,7 @@
         <p:spPr>
           <a:xfrm xmlns:a="http://schemas.openxmlformats.org/drawingml/2006/main">
             <a:off x="609600" y="6448425"/>
-            <a:ext cx="6953250" cy="209550"/>
+            <a:ext cx="8572500" cy="209550"/>
           </a:xfrm>
           <a:prstGeom xmlns:a="http://schemas.openxmlformats.org/drawingml/2006/main" prst="rect">
             <a:avLst/>
@@ -7000,7 +6777,7 @@
                 <a:ea typeface="Arial"/>
                 <a:cs typeface="Arial"/>
               </a:rPr>
-              <a:t>LAIDLAW · INTERNAL RESEARCH STATE · 2 OCT 2026</a:t>
+              <a:t>LAIDLAW  INTERNAL RESEARCH STATE  2 OCT 2026</a:t>
             </a:r>
           </a:p>
         </p:txBody>
@@ -7010,7 +6787,7 @@
           <p:cNvPr id="3" name="">
             <a:extLst xmlns:a="http://schemas.openxmlformats.org/drawingml/2006/main">
               <a:ext uri="{FF2B5EF4-FFF2-40B4-BE49-F238E27FC236}">
-                <a16:creationId xmlns:a16="http://schemas.microsoft.com/office/drawing/2014/main" id="{5212B177-7C1C-4FCA-9A5A-7E7D95173B27}"/>
+                <a16:creationId xmlns:a16="http://schemas.microsoft.com/office/drawing/2014/main" id="{51D4E1C1-0FC7-4764-878C-4A7E2AC37D9B}"/>
               </a:ext>
             </a:extLst>
           </p:cNvPr>
@@ -7067,7 +6844,7 @@
           <p:cNvPr id="4" name="">
             <a:extLst xmlns:a="http://schemas.openxmlformats.org/drawingml/2006/main">
               <a:ext uri="{FF2B5EF4-FFF2-40B4-BE49-F238E27FC236}">
-                <a16:creationId xmlns:a16="http://schemas.microsoft.com/office/drawing/2014/main" id="{E69A5644-A759-45D2-91D3-09DC17314426}"/>
+                <a16:creationId xmlns:a16="http://schemas.microsoft.com/office/drawing/2014/main" id="{BAA26B8E-52D7-4D42-BE0F-F5490FE27F33}"/>
               </a:ext>
             </a:extLst>
           </p:cNvPr>
@@ -7114,17 +6891,410 @@
                 <a:ea typeface="Arial"/>
                 <a:cs typeface="Arial"/>
               </a:rPr>
-              <a:t>Sources: C09, C10, C12, C18, C20 · source links and limits in notes/register</a:t>
-            </a:r>
-          </a:p>
-        </p:txBody>
-      </p:sp>
-      <p:sp>
-        <p:nvSpPr>
-          <p:cNvPr id="5" name="">
+              <a:t>Sources: sensitivity, core. Links and scientific limits in notes.</a:t>
+            </a:r>
+          </a:p>
+        </p:txBody>
+      </p:sp>
+      <p:graphicFrame>
+        <p:nvGraphicFramePr>
+          <p:cNvPr id="11" name=""/>
+          <p:cNvGraphicFramePr/>
+          <p:nvPr/>
+        </p:nvGraphicFramePr>
+        <p:xfrm>
+          <a:off xmlns:a="http://schemas.openxmlformats.org/drawingml/2006/main" x="609600" y="1571625"/>
+          <a:ext xmlns:a="http://schemas.openxmlformats.org/drawingml/2006/main" cx="10972800" cy="3857625"/>
+        </p:xfrm>
+        <a:graphic xmlns:a="http://schemas.openxmlformats.org/drawingml/2006/main">
+          <a:graphicData uri="http://schemas.openxmlformats.org/drawingml/2006/table">
+            <a:tbl>
+              <a:tblPr/>
+              <a:tblGrid>
+                <a:gridCol w="2381250"/>
+                <a:gridCol w="4686300"/>
+                <a:gridCol w="3905250"/>
+              </a:tblGrid>
+              <a:tr h="771525">
+                <a:tc>
+                  <a:txBody>
+                    <a:bodyPr/>
+                    <a:lstStyle/>
+                    <a:p>
+                      <a:r>
+                        <a:rPr sz="1875" b="1">
+                          <a:solidFill>
+                            <a:srgbClr val="FFFFFF"/>
+                          </a:solidFill>
+                          <a:latin typeface="Arial"/>
+                          <a:ea typeface="Arial"/>
+                          <a:cs typeface="Arial"/>
+                        </a:rPr>
+                        <a:t>Check</a:t>
+                      </a:r>
+                    </a:p>
+                  </a:txBody>
+                  <a:tcPr marL="133350" marR="133350" marT="114300" marB="95250" anchor="ctr">
+                    <a:solidFill>
+                      <a:srgbClr val="183343"/>
+                    </a:solidFill>
+                  </a:tcPr>
+                </a:tc>
+                <a:tc>
+                  <a:txBody>
+                    <a:bodyPr/>
+                    <a:lstStyle/>
+                    <a:p>
+                      <a:r>
+                        <a:rPr sz="1875" b="1">
+                          <a:solidFill>
+                            <a:srgbClr val="FFFFFF"/>
+                          </a:solidFill>
+                          <a:latin typeface="Arial"/>
+                          <a:ea typeface="Arial"/>
+                          <a:cs typeface="Arial"/>
+                        </a:rPr>
+                        <a:t>Observed issue</a:t>
+                      </a:r>
+                    </a:p>
+                  </a:txBody>
+                  <a:tcPr marL="133350" marR="133350" marT="114300" marB="95250" anchor="ctr">
+                    <a:solidFill>
+                      <a:srgbClr val="183343"/>
+                    </a:solidFill>
+                  </a:tcPr>
+                </a:tc>
+                <a:tc>
+                  <a:txBody>
+                    <a:bodyPr/>
+                    <a:lstStyle/>
+                    <a:p>
+                      <a:r>
+                        <a:rPr sz="1875" b="1">
+                          <a:solidFill>
+                            <a:srgbClr val="FFFFFF"/>
+                          </a:solidFill>
+                          <a:latin typeface="Arial"/>
+                          <a:ea typeface="Arial"/>
+                          <a:cs typeface="Arial"/>
+                        </a:rPr>
+                        <a:t>Consequence</a:t>
+                      </a:r>
+                    </a:p>
+                  </a:txBody>
+                  <a:tcPr marL="133350" marR="133350" marT="114300" marB="95250" anchor="ctr">
+                    <a:solidFill>
+                      <a:srgbClr val="183343"/>
+                    </a:solidFill>
+                  </a:tcPr>
+                </a:tc>
+              </a:tr>
+              <a:tr h="771525">
+                <a:tc>
+                  <a:txBody>
+                    <a:bodyPr/>
+                    <a:lstStyle/>
+                    <a:p>
+                      <a:r>
+                        <a:rPr sz="1875">
+                          <a:solidFill>
+                            <a:srgbClr val="283D47"/>
+                          </a:solidFill>
+                          <a:latin typeface="Arial"/>
+                          <a:ea typeface="Arial"/>
+                          <a:cs typeface="Arial"/>
+                        </a:rPr>
+                        <a:t>Calendar control</a:t>
+                      </a:r>
+                    </a:p>
+                  </a:txBody>
+                  <a:tcPr marL="133350" marR="133350" marT="114300" marB="95250" anchor="ctr">
+                    <a:solidFill>
+                      <a:srgbClr val="FFFFFF"/>
+                    </a:solidFill>
+                  </a:tcPr>
+                </a:tc>
+                <a:tc>
+                  <a:txBody>
+                    <a:bodyPr/>
+                    <a:lstStyle/>
+                    <a:p>
+                      <a:r>
+                        <a:rPr sz="1875">
+                          <a:solidFill>
+                            <a:srgbClr val="283D47"/>
+                          </a:solidFill>
+                          <a:latin typeface="Arial"/>
+                          <a:ea typeface="Arial"/>
+                          <a:cs typeface="Arial"/>
+                        </a:rPr>
+                        <a:t>HF cold-day interval includes 1 under 8 df and year effects</a:t>
+                      </a:r>
+                    </a:p>
+                  </a:txBody>
+                  <a:tcPr marL="133350" marR="133350" marT="114300" marB="95250" anchor="ctr">
+                    <a:solidFill>
+                      <a:srgbClr val="FFFFFF"/>
+                    </a:solidFill>
+                  </a:tcPr>
+                </a:tc>
+                <a:tc>
+                  <a:txBody>
+                    <a:bodyPr/>
+                    <a:lstStyle/>
+                    <a:p>
+                      <a:r>
+                        <a:rPr sz="1875">
+                          <a:solidFill>
+                            <a:srgbClr val="283D47"/>
+                          </a:solidFill>
+                          <a:latin typeface="Arial"/>
+                          <a:ea typeface="Arial"/>
+                          <a:cs typeface="Arial"/>
+                        </a:rPr>
+                        <a:t>Baseline interval exclusion is fragile</a:t>
+                      </a:r>
+                    </a:p>
+                  </a:txBody>
+                  <a:tcPr marL="133350" marR="133350" marT="114300" marB="95250" anchor="ctr">
+                    <a:solidFill>
+                      <a:srgbClr val="FFFFFF"/>
+                    </a:solidFill>
+                  </a:tcPr>
+                </a:tc>
+              </a:tr>
+              <a:tr h="771525">
+                <a:tc>
+                  <a:txBody>
+                    <a:bodyPr/>
+                    <a:lstStyle/>
+                    <a:p>
+                      <a:r>
+                        <a:rPr sz="1875">
+                          <a:solidFill>
+                            <a:srgbClr val="283D47"/>
+                          </a:solidFill>
+                          <a:latin typeface="Arial"/>
+                          <a:ea typeface="Arial"/>
+                          <a:cs typeface="Arial"/>
+                        </a:rPr>
+                        <a:t>Start-window control</a:t>
+                      </a:r>
+                    </a:p>
+                  </a:txBody>
+                  <a:tcPr marL="133350" marR="133350" marT="114300" marB="95250" anchor="ctr">
+                    <a:solidFill>
+                      <a:srgbClr val="FFFFFF"/>
+                    </a:solidFill>
+                  </a:tcPr>
+                </a:tc>
+                <a:tc>
+                  <a:txBody>
+                    <a:bodyPr/>
+                    <a:lstStyle/>
+                    <a:p>
+                      <a:r>
+                        <a:rPr sz="1875">
+                          <a:solidFill>
+                            <a:srgbClr val="283D47"/>
+                          </a:solidFill>
+                          <a:latin typeface="Arial"/>
+                          <a:ea typeface="Arial"/>
+                          <a:cs typeface="Arial"/>
+                        </a:rPr>
+                        <a:t>Omitting 24 initial months weakens the HF cold-day estimate</a:t>
+                      </a:r>
+                    </a:p>
+                  </a:txBody>
+                  <a:tcPr marL="133350" marR="133350" marT="114300" marB="95250" anchor="ctr">
+                    <a:solidFill>
+                      <a:srgbClr val="FFFFFF"/>
+                    </a:solidFill>
+                  </a:tcPr>
+                </a:tc>
+                <a:tc>
+                  <a:txBody>
+                    <a:bodyPr/>
+                    <a:lstStyle/>
+                    <a:p>
+                      <a:r>
+                        <a:rPr sz="1875">
+                          <a:solidFill>
+                            <a:srgbClr val="283D47"/>
+                          </a:solidFill>
+                          <a:latin typeface="Arial"/>
+                          <a:ea typeface="Arial"/>
+                          <a:cs typeface="Arial"/>
+                        </a:rPr>
+                        <a:t>Entry or early extraction remains a rival</a:t>
+                      </a:r>
+                    </a:p>
+                  </a:txBody>
+                  <a:tcPr marL="133350" marR="133350" marT="114300" marB="95250" anchor="ctr">
+                    <a:solidFill>
+                      <a:srgbClr val="FFFFFF"/>
+                    </a:solidFill>
+                  </a:tcPr>
+                </a:tc>
+              </a:tr>
+              <a:tr h="771525">
+                <a:tc>
+                  <a:txBody>
+                    <a:bodyPr/>
+                    <a:lstStyle/>
+                    <a:p>
+                      <a:r>
+                        <a:rPr sz="1875">
+                          <a:solidFill>
+                            <a:srgbClr val="283D47"/>
+                          </a:solidFill>
+                          <a:latin typeface="Arial"/>
+                          <a:ea typeface="Arial"/>
+                          <a:cs typeface="Arial"/>
+                        </a:rPr>
+                        <a:t>Covariance and multiplicity</a:t>
+                      </a:r>
+                    </a:p>
+                  </a:txBody>
+                  <a:tcPr marL="133350" marR="133350" marT="114300" marB="95250" anchor="ctr">
+                    <a:solidFill>
+                      <a:srgbClr val="FFFFFF"/>
+                    </a:solidFill>
+                  </a:tcPr>
+                </a:tc>
+                <a:tc>
+                  <a:txBody>
+                    <a:bodyPr/>
+                    <a:lstStyle/>
+                    <a:p>
+                      <a:r>
+                        <a:rPr sz="1875">
+                          <a:solidFill>
+                            <a:srgbClr val="283D47"/>
+                          </a:solidFill>
+                          <a:latin typeface="Arial"/>
+                          <a:ea typeface="Arial"/>
+                          <a:cs typeface="Arial"/>
+                        </a:rPr>
+                        <a:t>CHD hot nights depends on SE method. All core BH q &gt; 0.19</a:t>
+                      </a:r>
+                    </a:p>
+                  </a:txBody>
+                  <a:tcPr marL="133350" marR="133350" marT="114300" marB="95250" anchor="ctr">
+                    <a:solidFill>
+                      <a:srgbClr val="FFFFFF"/>
+                    </a:solidFill>
+                  </a:tcPr>
+                </a:tc>
+                <a:tc>
+                  <a:txBody>
+                    <a:bodyPr/>
+                    <a:lstStyle/>
+                    <a:p>
+                      <a:r>
+                        <a:rPr sz="1875">
+                          <a:solidFill>
+                            <a:srgbClr val="283D47"/>
+                          </a:solidFill>
+                          <a:latin typeface="Arial"/>
+                          <a:ea typeface="Arial"/>
+                          <a:cs typeface="Arial"/>
+                        </a:rPr>
+                        <a:t>No protected thermal discovery</a:t>
+                      </a:r>
+                    </a:p>
+                  </a:txBody>
+                  <a:tcPr marL="133350" marR="133350" marT="114300" marB="95250" anchor="ctr">
+                    <a:solidFill>
+                      <a:srgbClr val="FFFFFF"/>
+                    </a:solidFill>
+                  </a:tcPr>
+                </a:tc>
+              </a:tr>
+              <a:tr h="771525">
+                <a:tc>
+                  <a:txBody>
+                    <a:bodyPr/>
+                    <a:lstStyle/>
+                    <a:p>
+                      <a:r>
+                        <a:rPr sz="1875">
+                          <a:solidFill>
+                            <a:srgbClr val="283D47"/>
+                          </a:solidFill>
+                          <a:latin typeface="Arial"/>
+                          <a:ea typeface="Arial"/>
+                          <a:cs typeface="Arial"/>
+                        </a:rPr>
+                        <a:t>Design</a:t>
+                      </a:r>
+                    </a:p>
+                  </a:txBody>
+                  <a:tcPr marL="133350" marR="133350" marT="114300" marB="95250" anchor="ctr">
+                    <a:solidFill>
+                      <a:srgbClr val="FFFFFF"/>
+                    </a:solidFill>
+                  </a:tcPr>
+                </a:tc>
+                <a:tc>
+                  <a:txBody>
+                    <a:bodyPr/>
+                    <a:lstStyle/>
+                    <a:p>
+                      <a:r>
+                        <a:rPr sz="1875">
+                          <a:solidFill>
+                            <a:srgbClr val="283D47"/>
+                          </a:solidFill>
+                          <a:latin typeface="Arial"/>
+                          <a:ea typeface="Arial"/>
+                          <a:cs typeface="Arial"/>
+                        </a:rPr>
+                        <a:t>Nested window changes mix support, trend and period</a:t>
+                      </a:r>
+                    </a:p>
+                  </a:txBody>
+                  <a:tcPr marL="133350" marR="133350" marT="114300" marB="95250" anchor="ctr">
+                    <a:solidFill>
+                      <a:srgbClr val="FFFFFF"/>
+                    </a:solidFill>
+                  </a:tcPr>
+                </a:tc>
+                <a:tc>
+                  <a:txBody>
+                    <a:bodyPr/>
+                    <a:lstStyle/>
+                    <a:p>
+                      <a:r>
+                        <a:rPr sz="1875">
+                          <a:solidFill>
+                            <a:srgbClr val="283D47"/>
+                          </a:solidFill>
+                          <a:latin typeface="Arial"/>
+                          <a:ea typeface="Arial"/>
+                          <a:cs typeface="Arial"/>
+                        </a:rPr>
+                        <a:t>A common-basis interaction still needs new execution</a:t>
+                      </a:r>
+                    </a:p>
+                  </a:txBody>
+                  <a:tcPr marL="133350" marR="133350" marT="114300" marB="95250" anchor="ctr">
+                    <a:solidFill>
+                      <a:srgbClr val="FFFFFF"/>
+                    </a:solidFill>
+                  </a:tcPr>
+                </a:tc>
+              </a:tr>
+            </a:tbl>
+          </a:graphicData>
+        </a:graphic>
+      </p:graphicFrame>
+      <p:sp>
+        <p:nvSpPr>
+          <p:cNvPr id="6" name="">
             <a:extLst xmlns:a="http://schemas.openxmlformats.org/drawingml/2006/main">
               <a:ext uri="{FF2B5EF4-FFF2-40B4-BE49-F238E27FC236}">
-                <a16:creationId xmlns:a16="http://schemas.microsoft.com/office/drawing/2014/main" id="{8536017B-63EB-4EA9-85C4-DF938810FDC8}"/>
+                <a16:creationId xmlns:a16="http://schemas.microsoft.com/office/drawing/2014/main" id="{F7A59E7F-2561-4BF2-83C8-68A0B9A39E1D}"/>
               </a:ext>
             </a:extLst>
           </p:cNvPr>
@@ -7135,8 +7305,8 @@
         </p:nvSpPr>
         <p:spPr>
           <a:xfrm xmlns:a="http://schemas.openxmlformats.org/drawingml/2006/main">
-            <a:off x="609600" y="1571625"/>
-            <a:ext cx="10972800" cy="361950"/>
+            <a:off x="609600" y="5686425"/>
+            <a:ext cx="10972800" cy="323850"/>
           </a:xfrm>
           <a:prstGeom xmlns:a="http://schemas.openxmlformats.org/drawingml/2006/main" prst="rect">
             <a:avLst/>
@@ -7153,9 +7323,9 @@
           <a:lstStyle xmlns:a="http://schemas.openxmlformats.org/drawingml/2006/main"/>
           <a:p xmlns:a="http://schemas.openxmlformats.org/drawingml/2006/main">
             <a:pPr>
-              <a:defRPr sz="2250" b="1">
-                <a:solidFill>
-                  <a:srgbClr val="8C4052"/>
+              <a:defRPr sz="1875" b="0">
+                <a:solidFill>
+                  <a:srgbClr val="14685F"/>
                 </a:solidFill>
                 <a:latin typeface="Arial"/>
                 <a:ea typeface="Arial"/>
@@ -7163,369 +7333,15 @@
               </a:defRPr>
             </a:pPr>
             <a:r>
-              <a:rPr sz="2250" b="1">
-                <a:solidFill>
-                  <a:srgbClr val="8C4052"/>
+              <a:rPr sz="1875" b="0">
+                <a:solidFill>
+                  <a:srgbClr val="14685F"/>
                 </a:solidFill>
                 <a:latin typeface="Arial"/>
                 <a:ea typeface="Arial"/>
                 <a:cs typeface="Arial"/>
               </a:rPr>
-              <a:t>Method admission failed</a:t>
-            </a:r>
-          </a:p>
-        </p:txBody>
-      </p:sp>
-      <p:sp>
-        <p:nvSpPr>
-          <p:cNvPr id="6" name="">
-            <a:extLst xmlns:a="http://schemas.openxmlformats.org/drawingml/2006/main">
-              <a:ext uri="{FF2B5EF4-FFF2-40B4-BE49-F238E27FC236}">
-                <a16:creationId xmlns:a16="http://schemas.microsoft.com/office/drawing/2014/main" id="{36C65959-36BC-419C-ADA2-261BAFEC4E40}"/>
-              </a:ext>
-            </a:extLst>
-          </p:cNvPr>
-          <p:cNvSpPr>
-            <a:spLocks xmlns:a="http://schemas.openxmlformats.org/drawingml/2006/main" noGrp="1"/>
-          </p:cNvSpPr>
-          <p:nvPr/>
-        </p:nvSpPr>
-        <p:spPr>
-          <a:xfrm xmlns:a="http://schemas.openxmlformats.org/drawingml/2006/main">
-            <a:off x="609600" y="2038350"/>
-            <a:ext cx="10972800" cy="819150"/>
-          </a:xfrm>
-          <a:prstGeom xmlns:a="http://schemas.openxmlformats.org/drawingml/2006/main" prst="rect">
-            <a:avLst/>
-          </a:prstGeom>
-          <a:noFill xmlns:a="http://schemas.openxmlformats.org/drawingml/2006/main"/>
-          <a:ln xmlns:a="http://schemas.openxmlformats.org/drawingml/2006/main" w="0">
-            <a:noFill/>
-          </a:ln>
-        </p:spPr>
-        <p:txBody>
-          <a:bodyPr xmlns:a="http://schemas.openxmlformats.org/drawingml/2006/main">
-            <a:noAutofit/>
-          </a:bodyPr>
-          <a:lstStyle xmlns:a="http://schemas.openxmlformats.org/drawingml/2006/main"/>
-          <a:p xmlns:a="http://schemas.openxmlformats.org/drawingml/2006/main">
-            <a:pPr>
-              <a:defRPr sz="2025" b="0">
-                <a:solidFill>
-                  <a:srgbClr val="283D47"/>
-                </a:solidFill>
-                <a:latin typeface="Arial"/>
-                <a:ea typeface="Arial"/>
-                <a:cs typeface="Arial"/>
-              </a:defRPr>
-            </a:pPr>
-            <a:r>
-              <a:rPr sz="2025" b="0">
-                <a:solidFill>
-                  <a:srgbClr val="283D47"/>
-                </a:solidFill>
-                <a:latin typeface="Arial"/>
-                <a:ea typeface="Arial"/>
-                <a:cs typeface="Arial"/>
-              </a:rPr>
-              <a:t>Synthetic daily-recovery calibration: Type I error reached 0.150; coverage fell to 0.840.</a:t>
-            </a:r>
-          </a:p>
-          <a:p xmlns:a="http://schemas.openxmlformats.org/drawingml/2006/main">
-            <a:pPr>
-              <a:defRPr sz="2025" b="0">
-                <a:solidFill>
-                  <a:srgbClr val="283D47"/>
-                </a:solidFill>
-                <a:latin typeface="Arial"/>
-                <a:ea typeface="Arial"/>
-                <a:cs typeface="Arial"/>
-              </a:defRPr>
-            </a:pPr>
-            <a:r>
-              <a:rPr sz="2025" b="0">
-                <a:solidFill>
-                  <a:srgbClr val="283D47"/>
-                </a:solidFill>
-                <a:latin typeface="Arial"/>
-                <a:ea typeface="Arial"/>
-                <a:cs typeface="Arial"/>
-              </a:rPr>
-              <a:t>A failure of the tested implementation/scenarios, not a universal aggregation theorem.</a:t>
-            </a:r>
-          </a:p>
-        </p:txBody>
-      </p:sp>
-      <p:sp>
-        <p:nvSpPr>
-          <p:cNvPr id="7" name="">
-            <a:extLst xmlns:a="http://schemas.openxmlformats.org/drawingml/2006/main">
-              <a:ext uri="{FF2B5EF4-FFF2-40B4-BE49-F238E27FC236}">
-                <a16:creationId xmlns:a16="http://schemas.microsoft.com/office/drawing/2014/main" id="{00F1DB28-B1AE-4BA6-B3A2-1D84FDA09FB3}"/>
-              </a:ext>
-            </a:extLst>
-          </p:cNvPr>
-          <p:cNvSpPr>
-            <a:spLocks xmlns:a="http://schemas.openxmlformats.org/drawingml/2006/main" noGrp="1"/>
-          </p:cNvSpPr>
-          <p:nvPr/>
-        </p:nvSpPr>
-        <p:spPr>
-          <a:xfrm xmlns:a="http://schemas.openxmlformats.org/drawingml/2006/main">
-            <a:off x="609600" y="3095625"/>
-            <a:ext cx="10972800" cy="361950"/>
-          </a:xfrm>
-          <a:prstGeom xmlns:a="http://schemas.openxmlformats.org/drawingml/2006/main" prst="rect">
-            <a:avLst/>
-          </a:prstGeom>
-          <a:noFill xmlns:a="http://schemas.openxmlformats.org/drawingml/2006/main"/>
-          <a:ln xmlns:a="http://schemas.openxmlformats.org/drawingml/2006/main" w="0">
-            <a:noFill/>
-          </a:ln>
-        </p:spPr>
-        <p:txBody>
-          <a:bodyPr xmlns:a="http://schemas.openxmlformats.org/drawingml/2006/main">
-            <a:noAutofit/>
-          </a:bodyPr>
-          <a:lstStyle xmlns:a="http://schemas.openxmlformats.org/drawingml/2006/main"/>
-          <a:p xmlns:a="http://schemas.openxmlformats.org/drawingml/2006/main">
-            <a:pPr>
-              <a:defRPr sz="2250" b="1">
-                <a:solidFill>
-                  <a:srgbClr val="8C4052"/>
-                </a:solidFill>
-                <a:latin typeface="Arial"/>
-                <a:ea typeface="Arial"/>
-                <a:cs typeface="Arial"/>
-              </a:defRPr>
-            </a:pPr>
-            <a:r>
-              <a:rPr sz="2250" b="1">
-                <a:solidFill>
-                  <a:srgbClr val="8C4052"/>
-                </a:solidFill>
-                <a:latin typeface="Arial"/>
-                <a:ea typeface="Arial"/>
-                <a:cs typeface="Arial"/>
-              </a:rPr>
-              <a:t>Discovery and mechanism claims remain unlicensed</a:t>
-            </a:r>
-          </a:p>
-        </p:txBody>
-      </p:sp>
-      <p:sp>
-        <p:nvSpPr>
-          <p:cNvPr id="8" name="">
-            <a:extLst xmlns:a="http://schemas.openxmlformats.org/drawingml/2006/main">
-              <a:ext uri="{FF2B5EF4-FFF2-40B4-BE49-F238E27FC236}">
-                <a16:creationId xmlns:a16="http://schemas.microsoft.com/office/drawing/2014/main" id="{65A94D34-DAD3-4D3D-AD52-6172914CF1F9}"/>
-              </a:ext>
-            </a:extLst>
-          </p:cNvPr>
-          <p:cNvSpPr>
-            <a:spLocks xmlns:a="http://schemas.openxmlformats.org/drawingml/2006/main" noGrp="1"/>
-          </p:cNvSpPr>
-          <p:nvPr/>
-        </p:nvSpPr>
-        <p:spPr>
-          <a:xfrm xmlns:a="http://schemas.openxmlformats.org/drawingml/2006/main">
-            <a:off x="609600" y="3571875"/>
-            <a:ext cx="10972800" cy="819150"/>
-          </a:xfrm>
-          <a:prstGeom xmlns:a="http://schemas.openxmlformats.org/drawingml/2006/main" prst="rect">
-            <a:avLst/>
-          </a:prstGeom>
-          <a:noFill xmlns:a="http://schemas.openxmlformats.org/drawingml/2006/main"/>
-          <a:ln xmlns:a="http://schemas.openxmlformats.org/drawingml/2006/main" w="0">
-            <a:noFill/>
-          </a:ln>
-        </p:spPr>
-        <p:txBody>
-          <a:bodyPr xmlns:a="http://schemas.openxmlformats.org/drawingml/2006/main">
-            <a:noAutofit/>
-          </a:bodyPr>
-          <a:lstStyle xmlns:a="http://schemas.openxmlformats.org/drawingml/2006/main"/>
-          <a:p xmlns:a="http://schemas.openxmlformats.org/drawingml/2006/main">
-            <a:pPr>
-              <a:defRPr sz="2025" b="0">
-                <a:solidFill>
-                  <a:srgbClr val="283D47"/>
-                </a:solidFill>
-                <a:latin typeface="Arial"/>
-                <a:ea typeface="Arial"/>
-                <a:cs typeface="Arial"/>
-              </a:defRPr>
-            </a:pPr>
-            <a:r>
-              <a:rPr sz="2025" b="0">
-                <a:solidFill>
-                  <a:srgbClr val="283D47"/>
-                </a:solidFill>
-                <a:latin typeface="Arial"/>
-                <a:ea typeface="Arial"/>
-                <a:cs typeface="Arial"/>
-              </a:rPr>
-              <a:t>No protected thermal discovery does not prove no effect. Missing clinical measures</a:t>
-            </a:r>
-          </a:p>
-          <a:p xmlns:a="http://schemas.openxmlformats.org/drawingml/2006/main">
-            <a:pPr>
-              <a:defRPr sz="2025" b="0">
-                <a:solidFill>
-                  <a:srgbClr val="283D47"/>
-                </a:solidFill>
-                <a:latin typeface="Arial"/>
-                <a:ea typeface="Arial"/>
-                <a:cs typeface="Arial"/>
-              </a:defRPr>
-            </a:pPr>
-            <a:r>
-              <a:rPr sz="2025" b="0">
-                <a:solidFill>
-                  <a:srgbClr val="283D47"/>
-                </a:solidFill>
-                <a:latin typeface="Arial"/>
-                <a:ea typeface="Arial"/>
-                <a:cs typeface="Arial"/>
-              </a:rPr>
-              <a:t>do not falsify every biological explanation. The 6-df crown is result-dependent.</a:t>
-            </a:r>
-          </a:p>
-        </p:txBody>
-      </p:sp>
-      <p:sp>
-        <p:nvSpPr>
-          <p:cNvPr id="9" name="">
-            <a:extLst xmlns:a="http://schemas.openxmlformats.org/drawingml/2006/main">
-              <a:ext uri="{FF2B5EF4-FFF2-40B4-BE49-F238E27FC236}">
-                <a16:creationId xmlns:a16="http://schemas.microsoft.com/office/drawing/2014/main" id="{24071EDC-97FB-484F-8BBC-758C98440787}"/>
-              </a:ext>
-            </a:extLst>
-          </p:cNvPr>
-          <p:cNvSpPr>
-            <a:spLocks xmlns:a="http://schemas.openxmlformats.org/drawingml/2006/main" noGrp="1"/>
-          </p:cNvSpPr>
-          <p:nvPr/>
-        </p:nvSpPr>
-        <p:spPr>
-          <a:xfrm xmlns:a="http://schemas.openxmlformats.org/drawingml/2006/main">
-            <a:off x="609600" y="4629150"/>
-            <a:ext cx="10972800" cy="361950"/>
-          </a:xfrm>
-          <a:prstGeom xmlns:a="http://schemas.openxmlformats.org/drawingml/2006/main" prst="rect">
-            <a:avLst/>
-          </a:prstGeom>
-          <a:noFill xmlns:a="http://schemas.openxmlformats.org/drawingml/2006/main"/>
-          <a:ln xmlns:a="http://schemas.openxmlformats.org/drawingml/2006/main" w="0">
-            <a:noFill/>
-          </a:ln>
-        </p:spPr>
-        <p:txBody>
-          <a:bodyPr xmlns:a="http://schemas.openxmlformats.org/drawingml/2006/main">
-            <a:noAutofit/>
-          </a:bodyPr>
-          <a:lstStyle xmlns:a="http://schemas.openxmlformats.org/drawingml/2006/main"/>
-          <a:p xmlns:a="http://schemas.openxmlformats.org/drawingml/2006/main">
-            <a:pPr>
-              <a:defRPr sz="2250" b="1">
-                <a:solidFill>
-                  <a:srgbClr val="14685F"/>
-                </a:solidFill>
-                <a:latin typeface="Arial"/>
-                <a:ea typeface="Arial"/>
-                <a:cs typeface="Arial"/>
-              </a:defRPr>
-            </a:pPr>
-            <a:r>
-              <a:rPr sz="2250" b="1">
-                <a:solidFill>
-                  <a:srgbClr val="14685F"/>
-                </a:solidFill>
-                <a:latin typeface="Arial"/>
-                <a:ea typeface="Arial"/>
-                <a:cs typeface="Arial"/>
-              </a:rPr>
-              <a:t>Checks need semantic inspection</a:t>
-            </a:r>
-          </a:p>
-        </p:txBody>
-      </p:sp>
-      <p:sp>
-        <p:nvSpPr>
-          <p:cNvPr id="10" name="">
-            <a:extLst xmlns:a="http://schemas.openxmlformats.org/drawingml/2006/main">
-              <a:ext uri="{FF2B5EF4-FFF2-40B4-BE49-F238E27FC236}">
-                <a16:creationId xmlns:a16="http://schemas.microsoft.com/office/drawing/2014/main" id="{875FFD02-3E7D-4F4C-ABE1-A37706503EC9}"/>
-              </a:ext>
-            </a:extLst>
-          </p:cNvPr>
-          <p:cNvSpPr>
-            <a:spLocks xmlns:a="http://schemas.openxmlformats.org/drawingml/2006/main" noGrp="1"/>
-          </p:cNvSpPr>
-          <p:nvPr/>
-        </p:nvSpPr>
-        <p:spPr>
-          <a:xfrm xmlns:a="http://schemas.openxmlformats.org/drawingml/2006/main">
-            <a:off x="609600" y="5095875"/>
-            <a:ext cx="10972800" cy="819150"/>
-          </a:xfrm>
-          <a:prstGeom xmlns:a="http://schemas.openxmlformats.org/drawingml/2006/main" prst="rect">
-            <a:avLst/>
-          </a:prstGeom>
-          <a:noFill xmlns:a="http://schemas.openxmlformats.org/drawingml/2006/main"/>
-          <a:ln xmlns:a="http://schemas.openxmlformats.org/drawingml/2006/main" w="0">
-            <a:noFill/>
-          </a:ln>
-        </p:spPr>
-        <p:txBody>
-          <a:bodyPr xmlns:a="http://schemas.openxmlformats.org/drawingml/2006/main">
-            <a:noAutofit/>
-          </a:bodyPr>
-          <a:lstStyle xmlns:a="http://schemas.openxmlformats.org/drawingml/2006/main"/>
-          <a:p xmlns:a="http://schemas.openxmlformats.org/drawingml/2006/main">
-            <a:pPr>
-              <a:defRPr sz="2025" b="0">
-                <a:solidFill>
-                  <a:srgbClr val="283D47"/>
-                </a:solidFill>
-                <a:latin typeface="Arial"/>
-                <a:ea typeface="Arial"/>
-                <a:cs typeface="Arial"/>
-              </a:defRPr>
-            </a:pPr>
-            <a:r>
-              <a:rPr sz="2025" b="0">
-                <a:solidFill>
-                  <a:srgbClr val="283D47"/>
-                </a:solidFill>
-                <a:latin typeface="Arial"/>
-                <a:ea typeface="Arial"/>
-                <a:cs typeface="Arial"/>
-              </a:rPr>
-              <a:t>Legacy auditor: one-check pass on the wrong schema. Dedicated rails verify display,</a:t>
-            </a:r>
-          </a:p>
-          <a:p xmlns:a="http://schemas.openxmlformats.org/drawingml/2006/main">
-            <a:pPr>
-              <a:defRPr sz="2025" b="0">
-                <a:solidFill>
-                  <a:srgbClr val="283D47"/>
-                </a:solidFill>
-                <a:latin typeface="Arial"/>
-                <a:ea typeface="Arial"/>
-                <a:cs typeface="Arial"/>
-              </a:defRPr>
-            </a:pPr>
-            <a:r>
-              <a:rPr sz="2025" b="0">
-                <a:solidFill>
-                  <a:srgbClr val="283D47"/>
-                </a:solidFill>
-                <a:latin typeface="Arial"/>
-                <a:ea typeface="Arial"/>
-                <a:cs typeface="Arial"/>
-              </a:rPr>
-              <a:t>sources and document contracts; numerical agreement does not identify causes.</a:t>
+              <a:t>The complete released panel remains visible. No preferred fit rescues a headline.</a:t>
             </a:r>
           </a:p>
         </p:txBody>
@@ -7533,7 +7349,7 @@
     </p:spTree>
     <p:extLst>
       <p:ext uri="{BB962C8B-B14F-4D97-AF65-F5344CB8AC3E}">
-        <p14:creationId xmlns:p14="http://schemas.microsoft.com/office/powerpoint/2010/main" val="579361497"/>
+        <p14:creationId xmlns:p14="http://schemas.microsoft.com/office/powerpoint/2010/main" val="582051292"/>
       </p:ext>
     </p:extLst>
   </p:cSld>
@@ -7564,7 +7380,7 @@
           <p:cNvPr id="7" name="">
             <a:extLst xmlns:a="http://schemas.openxmlformats.org/drawingml/2006/main">
               <a:ext uri="{FF2B5EF4-FFF2-40B4-BE49-F238E27FC236}">
-                <a16:creationId xmlns:a16="http://schemas.microsoft.com/office/drawing/2014/main" id="{722F8536-9F61-42C6-B227-C3F6608CA86C}"/>
+                <a16:creationId xmlns:a16="http://schemas.microsoft.com/office/drawing/2014/main" id="{9DB9AD9C-AC8F-4137-9AEA-13DF35E9D3EA}"/>
               </a:ext>
             </a:extLst>
           </p:cNvPr>
@@ -7611,7 +7427,7 @@
                 <a:ea typeface="Arial"/>
                 <a:cs typeface="Arial"/>
               </a:rPr>
-              <a:t>Four rival families need different evidence</a:t>
+              <a:t>Rivals make different predictions</a:t>
             </a:r>
           </a:p>
         </p:txBody>
@@ -7621,7 +7437,7 @@
           <p:cNvPr id="2" name="">
             <a:extLst xmlns:a="http://schemas.openxmlformats.org/drawingml/2006/main">
               <a:ext uri="{FF2B5EF4-FFF2-40B4-BE49-F238E27FC236}">
-                <a16:creationId xmlns:a16="http://schemas.microsoft.com/office/drawing/2014/main" id="{B73B3D16-394E-471A-8ADC-3A32B527D92F}"/>
+                <a16:creationId xmlns:a16="http://schemas.microsoft.com/office/drawing/2014/main" id="{1D3CE24A-E89D-408E-A267-89B60E7A53B0}"/>
               </a:ext>
             </a:extLst>
           </p:cNvPr>
@@ -7633,7 +7449,7 @@
         <p:spPr>
           <a:xfrm xmlns:a="http://schemas.openxmlformats.org/drawingml/2006/main">
             <a:off x="609600" y="6448425"/>
-            <a:ext cx="6953250" cy="209550"/>
+            <a:ext cx="8572500" cy="209550"/>
           </a:xfrm>
           <a:prstGeom xmlns:a="http://schemas.openxmlformats.org/drawingml/2006/main" prst="rect">
             <a:avLst/>
@@ -7668,7 +7484,7 @@
                 <a:ea typeface="Arial"/>
                 <a:cs typeface="Arial"/>
               </a:rPr>
-              <a:t>LAIDLAW · INTERNAL RESEARCH STATE · 2 OCT 2026</a:t>
+              <a:t>LAIDLAW  INTERNAL RESEARCH STATE  2 OCT 2026</a:t>
             </a:r>
           </a:p>
         </p:txBody>
@@ -7678,7 +7494,7 @@
           <p:cNvPr id="3" name="">
             <a:extLst xmlns:a="http://schemas.openxmlformats.org/drawingml/2006/main">
               <a:ext uri="{FF2B5EF4-FFF2-40B4-BE49-F238E27FC236}">
-                <a16:creationId xmlns:a16="http://schemas.microsoft.com/office/drawing/2014/main" id="{B492B4E0-640E-4D42-961A-DECAA12E5789}"/>
+                <a16:creationId xmlns:a16="http://schemas.microsoft.com/office/drawing/2014/main" id="{4BD0EE26-5ACF-4FBD-A7E1-723A69F08D62}"/>
               </a:ext>
             </a:extLst>
           </p:cNvPr>
@@ -7735,7 +7551,7 @@
           <p:cNvPr id="4" name="">
             <a:extLst xmlns:a="http://schemas.openxmlformats.org/drawingml/2006/main">
               <a:ext uri="{FF2B5EF4-FFF2-40B4-BE49-F238E27FC236}">
-                <a16:creationId xmlns:a16="http://schemas.microsoft.com/office/drawing/2014/main" id="{69A17BA5-8AF8-41C5-8F14-EA93790F63F9}"/>
+                <a16:creationId xmlns:a16="http://schemas.microsoft.com/office/drawing/2014/main" id="{24A96101-7F96-4179-9D30-5FD8E2638F2E}"/>
               </a:ext>
             </a:extLst>
           </p:cNvPr>
@@ -7782,7 +7598,7 @@
                 <a:ea typeface="Arial"/>
                 <a:cs typeface="Arial"/>
               </a:rPr>
-              <a:t>Sources: C13, C14, C19, C08 · source links and limits in notes/register</a:t>
+              <a:t>Sources: receipt, continuity. Links and scientific limits in notes.</a:t>
             </a:r>
           </a:p>
         </p:txBody>
@@ -7794,19 +7610,19 @@
           <p:nvPr/>
         </p:nvGraphicFramePr>
         <p:xfrm>
-          <a:off xmlns:a="http://schemas.openxmlformats.org/drawingml/2006/main" x="609600" y="1514475"/>
-          <a:ext xmlns:a="http://schemas.openxmlformats.org/drawingml/2006/main" cx="10972800" cy="4267200"/>
+          <a:off xmlns:a="http://schemas.openxmlformats.org/drawingml/2006/main" x="609600" y="1543050"/>
+          <a:ext xmlns:a="http://schemas.openxmlformats.org/drawingml/2006/main" cx="10972800" cy="4019550"/>
         </p:xfrm>
         <a:graphic xmlns:a="http://schemas.openxmlformats.org/drawingml/2006/main">
           <a:graphicData uri="http://schemas.openxmlformats.org/drawingml/2006/table">
             <a:tbl>
               <a:tblPr/>
               <a:tblGrid>
-                <a:gridCol w="2781300"/>
-                <a:gridCol w="4781550"/>
-                <a:gridCol w="3409950"/>
+                <a:gridCol w="2533650"/>
+                <a:gridCol w="4695825"/>
+                <a:gridCol w="3743325"/>
               </a:tblGrid>
-              <a:tr h="853440">
+              <a:tr h="803910">
                 <a:tc>
                   <a:txBody>
                     <a:bodyPr/>
@@ -7821,7 +7637,7 @@
                           <a:ea typeface="Arial"/>
                           <a:cs typeface="Arial"/>
                         </a:rPr>
-                        <a:t>Rival family</a:t>
+                        <a:t>Explanation</a:t>
                       </a:r>
                     </a:p>
                   </a:txBody>
@@ -7845,7 +7661,7 @@
                           <a:ea typeface="Arial"/>
                           <a:cs typeface="Arial"/>
                         </a:rPr>
-                        <a:t>Pattern that would help distinguish it</a:t>
+                        <a:t>Discriminating evidence</a:t>
                       </a:r>
                     </a:p>
                   </a:txBody>
@@ -7869,7 +7685,7 @@
                           <a:ea typeface="Arial"/>
                           <a:cs typeface="Arial"/>
                         </a:rPr>
-                        <a:t>Evidence needed</a:t>
+                        <a:t>Failure mode</a:t>
                       </a:r>
                     </a:p>
                   </a:txBody>
@@ -7880,7 +7696,7 @@
                   </a:tcPr>
                 </a:tc>
               </a:tr>
-              <a:tr h="853440">
+              <a:tr h="803910">
                 <a:tc>
                   <a:txBody>
                     <a:bodyPr/>
@@ -7895,7 +7711,7 @@
                           <a:ea typeface="Arial"/>
                           <a:cs typeface="Arial"/>
                         </a:rPr>
-                        <a:t>Entry / risk set / extraction</a:t>
+                        <a:t>Improved underlying health</a:t>
                       </a:r>
                     </a:p>
                   </a:txBody>
@@ -7919,7 +7735,7 @@
                           <a:ea typeface="Arial"/>
                           <a:cs typeface="Arial"/>
                         </a:rPr>
-                        <a:t>Movement follows eligibility, look-back or cohort entry/exit</a:t>
+                        <a:t>Validated event rates and clinical change beyond selected attendance</a:t>
                       </a:r>
                     </a:p>
                   </a:txBody>
@@ -7943,7 +7759,7 @@
                           <a:ea typeface="Arial"/>
                           <a:cs typeface="Arial"/>
                         </a:rPr>
-                        <a:t>Query provenance; dynamic denominators</a:t>
+                        <a:t>Retained attenders alone can create apparent improvement</a:t>
                       </a:r>
                     </a:p>
                   </a:txBody>
@@ -7954,7 +7770,7 @@
                   </a:tcPr>
                 </a:tc>
               </a:tr>
-              <a:tr h="853440">
+              <a:tr h="803910">
                 <a:tc>
                   <a:txBody>
                     <a:bodyPr/>
@@ -7969,7 +7785,7 @@
                           <a:ea typeface="Arial"/>
                           <a:cs typeface="Arial"/>
                         </a:rPr>
-                        <a:t>Utilisation / competing death</a:t>
+                        <a:t>Reduced or delayed care</a:t>
                       </a:r>
                     </a:p>
                   </a:txBody>
@@ -7993,7 +7809,7 @@
                           <a:ea typeface="Arial"/>
                           <a:cs typeface="Arial"/>
                         </a:rPr>
-                        <a:t>Fewer contacts with delayed care or increased out-of-hospital death</a:t>
+                        <a:t>Contacts, delayed presentation and mortality linkage</a:t>
                       </a:r>
                     </a:p>
                   </a:txBody>
@@ -8017,7 +7833,7 @@
                           <a:ea typeface="Arial"/>
                           <a:cs typeface="Arial"/>
                         </a:rPr>
-                        <a:t>Service, diagnosis and mortality linkage</a:t>
+                        <a:t>Fewer admissions alone cannot distinguish care from disease</a:t>
                       </a:r>
                     </a:p>
                   </a:txBody>
@@ -8028,7 +7844,7 @@
                   </a:tcPr>
                 </a:tc>
               </a:tr>
-              <a:tr h="853440">
+              <a:tr h="803910">
                 <a:tc>
                   <a:txBody>
                     <a:bodyPr/>
@@ -8043,7 +7859,7 @@
                           <a:ea typeface="Arial"/>
                           <a:cs typeface="Arial"/>
                         </a:rPr>
-                        <a:t>Biology / co-exposures</a:t>
+                        <a:t>Changed risk set or recording</a:t>
                       </a:r>
                     </a:p>
                   </a:txBody>
@@ -8067,7 +7883,7 @@
                           <a:ea typeface="Arial"/>
                           <a:cs typeface="Arial"/>
                         </a:rPr>
-                        <a:t>Clinical risk or infection/pollution changes beyond recording effects</a:t>
+                        <a:t>Entry, prior events, exits and stable event construction</a:t>
                       </a:r>
                     </a:p>
                   </a:txBody>
@@ -8091,7 +7907,7 @@
                           <a:ea typeface="Arial"/>
                           <a:cs typeface="Arial"/>
                         </a:rPr>
-                        <a:t>Specified clinical measures and comparison</a:t>
+                        <a:t>Counts can move without a change in event propensity</a:t>
                       </a:r>
                     </a:p>
                   </a:txBody>
@@ -8102,7 +7918,7 @@
                   </a:tcPr>
                 </a:tc>
               </a:tr>
-              <a:tr h="853440">
+              <a:tr h="803910">
                 <a:tc>
                   <a:txBody>
                     <a:bodyPr/>
@@ -8117,7 +7933,7 @@
                           <a:ea typeface="Arial"/>
                           <a:cs typeface="Arial"/>
                         </a:rPr>
-                        <a:t>Model / support / uncertainty</a:t>
+                        <a:t>Respiratory or thermal context</a:t>
                       </a:r>
                     </a:p>
                   </a:txBody>
@@ -8141,7 +7957,7 @@
                           <a:ea typeface="Arial"/>
                           <a:cs typeface="Arial"/>
                         </a:rPr>
-                        <a:t>Movement follows knots, support, influence or covariance choice</a:t>
+                        <a:t>Matched coverage and formal common-basis contrasts</a:t>
                       </a:r>
                     </a:p>
                   </a:txBody>
@@ -8165,7 +7981,7 @@
                           <a:ea typeface="Arial"/>
                           <a:cs typeface="Arial"/>
                         </a:rPr>
-                        <a:t>Bounded, prespecified diagnostics</a:t>
+                        <a:t>Adjustment alone does not establish mediation</a:t>
                       </a:r>
                     </a:p>
                   </a:txBody>
@@ -8185,7 +8001,7 @@
           <p:cNvPr id="6" name="">
             <a:extLst xmlns:a="http://schemas.openxmlformats.org/drawingml/2006/main">
               <a:ext uri="{FF2B5EF4-FFF2-40B4-BE49-F238E27FC236}">
-                <a16:creationId xmlns:a16="http://schemas.microsoft.com/office/drawing/2014/main" id="{0A420E44-F601-49A6-96D1-13DC5BE37FD5}"/>
+                <a16:creationId xmlns:a16="http://schemas.microsoft.com/office/drawing/2014/main" id="{8BC6EAAA-1A6A-4A53-ABAC-0B215AE29422}"/>
               </a:ext>
             </a:extLst>
           </p:cNvPr>
@@ -8196,8 +8012,8 @@
         </p:nvSpPr>
         <p:spPr>
           <a:xfrm xmlns:a="http://schemas.openxmlformats.org/drawingml/2006/main">
-            <a:off x="609600" y="5810250"/>
-            <a:ext cx="10972800" cy="276225"/>
+            <a:off x="609600" y="5734050"/>
+            <a:ext cx="10972800" cy="257175"/>
           </a:xfrm>
           <a:prstGeom xmlns:a="http://schemas.openxmlformats.org/drawingml/2006/main" prst="rect">
             <a:avLst/>
@@ -8232,7 +8048,7 @@
                 <a:ea typeface="Arial"/>
                 <a:cs typeface="Arial"/>
               </a:rPr>
-              <a:t>These explanations can coexist. Current counts do not discriminate them.</a:t>
+              <a:t>Multiple explanations may coexist. Severe tests need power to distinguish them.</a:t>
             </a:r>
           </a:p>
         </p:txBody>
@@ -8240,7 +8056,7 @@
     </p:spTree>
     <p:extLst>
       <p:ext uri="{BB962C8B-B14F-4D97-AF65-F5344CB8AC3E}">
-        <p14:creationId xmlns:p14="http://schemas.microsoft.com/office/powerpoint/2010/main" val="1287026025"/>
+        <p14:creationId xmlns:p14="http://schemas.microsoft.com/office/powerpoint/2010/main" val="357153664"/>
       </p:ext>
     </p:extLst>
   </p:cSld>
@@ -8268,10 +8084,10 @@
       </p:grpSpPr>
       <p:sp>
         <p:nvSpPr>
-          <p:cNvPr id="15" name="">
+          <p:cNvPr id="10" name="">
             <a:extLst xmlns:a="http://schemas.openxmlformats.org/drawingml/2006/main">
               <a:ext uri="{FF2B5EF4-FFF2-40B4-BE49-F238E27FC236}">
-                <a16:creationId xmlns:a16="http://schemas.microsoft.com/office/drawing/2014/main" id="{F64721B5-F60E-40ED-8610-C7A66F60E374}"/>
+                <a16:creationId xmlns:a16="http://schemas.microsoft.com/office/drawing/2014/main" id="{D72B216A-526C-44D0-BBE0-B95C678532E3}"/>
               </a:ext>
             </a:extLst>
           </p:cNvPr>
@@ -8318,7 +8134,7 @@
                 <a:ea typeface="Arial"/>
                 <a:cs typeface="Arial"/>
               </a:rPr>
-              <a:t>Five questions change the next research decision</a:t>
+              <a:t>The expanded study has a feasibility gate</a:t>
             </a:r>
           </a:p>
         </p:txBody>
@@ -8328,7 +8144,7 @@
           <p:cNvPr id="2" name="">
             <a:extLst xmlns:a="http://schemas.openxmlformats.org/drawingml/2006/main">
               <a:ext uri="{FF2B5EF4-FFF2-40B4-BE49-F238E27FC236}">
-                <a16:creationId xmlns:a16="http://schemas.microsoft.com/office/drawing/2014/main" id="{33E8DFD7-9B97-4F6F-B237-130A711A8483}"/>
+                <a16:creationId xmlns:a16="http://schemas.microsoft.com/office/drawing/2014/main" id="{47505B22-4271-45DB-BB79-EAFF3D8928AE}"/>
               </a:ext>
             </a:extLst>
           </p:cNvPr>
@@ -8340,7 +8156,7 @@
         <p:spPr>
           <a:xfrm xmlns:a="http://schemas.openxmlformats.org/drawingml/2006/main">
             <a:off x="609600" y="6448425"/>
-            <a:ext cx="6953250" cy="209550"/>
+            <a:ext cx="8572500" cy="209550"/>
           </a:xfrm>
           <a:prstGeom xmlns:a="http://schemas.openxmlformats.org/drawingml/2006/main" prst="rect">
             <a:avLst/>
@@ -8375,7 +8191,7 @@
                 <a:ea typeface="Arial"/>
                 <a:cs typeface="Arial"/>
               </a:rPr>
-              <a:t>LAIDLAW · INTERNAL RESEARCH STATE · 2 OCT 2026</a:t>
+              <a:t>LAIDLAW  INTERNAL RESEARCH STATE  2 OCT 2026</a:t>
             </a:r>
           </a:p>
         </p:txBody>
@@ -8385,7 +8201,7 @@
           <p:cNvPr id="3" name="">
             <a:extLst xmlns:a="http://schemas.openxmlformats.org/drawingml/2006/main">
               <a:ext uri="{FF2B5EF4-FFF2-40B4-BE49-F238E27FC236}">
-                <a16:creationId xmlns:a16="http://schemas.microsoft.com/office/drawing/2014/main" id="{0D371C01-C32E-4A5C-A79F-8094E72F0880}"/>
+                <a16:creationId xmlns:a16="http://schemas.microsoft.com/office/drawing/2014/main" id="{EEA2C824-796D-4036-978D-3A0BDA8A83D6}"/>
               </a:ext>
             </a:extLst>
           </p:cNvPr>
@@ -8442,7 +8258,7 @@
           <p:cNvPr id="4" name="">
             <a:extLst xmlns:a="http://schemas.openxmlformats.org/drawingml/2006/main">
               <a:ext uri="{FF2B5EF4-FFF2-40B4-BE49-F238E27FC236}">
-                <a16:creationId xmlns:a16="http://schemas.microsoft.com/office/drawing/2014/main" id="{B8E1F070-818C-4187-8D56-1BF657B30AE3}"/>
+                <a16:creationId xmlns:a16="http://schemas.microsoft.com/office/drawing/2014/main" id="{8710E9AE-FAAC-4E02-9656-224B6E9B3E0B}"/>
               </a:ext>
             </a:extLst>
           </p:cNvPr>
@@ -8489,7 +8305,7 @@
                 <a:ea typeface="Arial"/>
                 <a:cs typeface="Arial"/>
               </a:rPr>
-              <a:t>Sources: C02, C05, C06, C07, C13, C14 · source links and limits in notes/register</a:t>
+              <a:t>Sources: receipt, journal, workflows. Links and scientific limits in notes.</a:t>
             </a:r>
           </a:p>
         </p:txBody>
@@ -8499,7 +8315,7 @@
           <p:cNvPr id="5" name="">
             <a:extLst xmlns:a="http://schemas.openxmlformats.org/drawingml/2006/main">
               <a:ext uri="{FF2B5EF4-FFF2-40B4-BE49-F238E27FC236}">
-                <a16:creationId xmlns:a16="http://schemas.microsoft.com/office/drawing/2014/main" id="{CCC7004C-FA53-4BC3-8027-2F505BCBF7F9}"/>
+                <a16:creationId xmlns:a16="http://schemas.microsoft.com/office/drawing/2014/main" id="{D676BFBB-B47F-4094-9FDC-99292DE8AC74}"/>
               </a:ext>
             </a:extLst>
           </p:cNvPr>
@@ -8510,8 +8326,8 @@
         </p:nvSpPr>
         <p:spPr>
           <a:xfrm xmlns:a="http://schemas.openxmlformats.org/drawingml/2006/main">
-            <a:off x="609600" y="1504950"/>
-            <a:ext cx="10972800" cy="285750"/>
+            <a:off x="609600" y="1581150"/>
+            <a:ext cx="5238750" cy="333375"/>
           </a:xfrm>
           <a:prstGeom xmlns:a="http://schemas.openxmlformats.org/drawingml/2006/main" prst="rect">
             <a:avLst/>
@@ -8528,7 +8344,7 @@
           <a:lstStyle xmlns:a="http://schemas.openxmlformats.org/drawingml/2006/main"/>
           <a:p xmlns:a="http://schemas.openxmlformats.org/drawingml/2006/main">
             <a:pPr>
-              <a:defRPr sz="1650" b="1">
+              <a:defRPr sz="1875" b="1">
                 <a:solidFill>
                   <a:srgbClr val="14685F"/>
                 </a:solidFill>
@@ -8538,7 +8354,7 @@
               </a:defRPr>
             </a:pPr>
             <a:r>
-              <a:rPr sz="1650" b="1">
+              <a:rPr sz="1875" b="1">
                 <a:solidFill>
                   <a:srgbClr val="14685F"/>
                 </a:solidFill>
@@ -8546,7 +8362,7 @@
                 <a:ea typeface="Arial"/>
                 <a:cs typeface="Arial"/>
               </a:rPr>
-              <a:t>1 · WHAT IS A FIRST EVENT?</a:t>
+              <a:t>READY NOW</a:t>
             </a:r>
           </a:p>
         </p:txBody>
@@ -8556,7 +8372,7 @@
           <p:cNvPr id="6" name="">
             <a:extLst xmlns:a="http://schemas.openxmlformats.org/drawingml/2006/main">
               <a:ext uri="{FF2B5EF4-FFF2-40B4-BE49-F238E27FC236}">
-                <a16:creationId xmlns:a16="http://schemas.microsoft.com/office/drawing/2014/main" id="{AB8CC7CA-1E93-4437-A7C9-9B28F2107430}"/>
+                <a16:creationId xmlns:a16="http://schemas.microsoft.com/office/drawing/2014/main" id="{7F0450CF-8220-4B1E-8838-D798656666B3}"/>
               </a:ext>
             </a:extLst>
           </p:cNvPr>
@@ -8567,8 +8383,8 @@
         </p:nvSpPr>
         <p:spPr>
           <a:xfrm xmlns:a="http://schemas.openxmlformats.org/drawingml/2006/main">
-            <a:off x="609600" y="1838325"/>
-            <a:ext cx="10972800" cy="514350"/>
+            <a:off x="609600" y="2057400"/>
+            <a:ext cx="5238750" cy="1619250"/>
           </a:xfrm>
           <a:prstGeom xmlns:a="http://schemas.openxmlformats.org/drawingml/2006/main" prst="rect">
             <a:avLst/>
@@ -8585,7 +8401,7 @@
           <a:lstStyle xmlns:a="http://schemas.openxmlformats.org/drawingml/2006/main"/>
           <a:p xmlns:a="http://schemas.openxmlformats.org/drawingml/2006/main">
             <a:pPr>
-              <a:defRPr sz="1950" b="0">
+              <a:defRPr sz="2175" b="0">
                 <a:solidFill>
                   <a:srgbClr val="283D47"/>
                 </a:solidFill>
@@ -8595,7 +8411,7 @@
               </a:defRPr>
             </a:pPr>
             <a:r>
-              <a:rPr sz="1950" b="0">
+              <a:rPr sz="2175" b="0">
                 <a:solidFill>
                   <a:srgbClr val="283D47"/>
                 </a:solidFill>
@@ -8603,7 +8419,53 @@
                 <a:ea typeface="Arial"/>
                 <a:cs typeface="Arial"/>
               </a:rPr>
-              <a:t>Roro/DAE: confirm query, dates, entry/exit, washout, ICD and inpatient definition.</a:t>
+              <a:t>Exploratory manuscript and source-linked figures</a:t>
+            </a:r>
+          </a:p>
+          <a:p xmlns:a="http://schemas.openxmlformats.org/drawingml/2006/main">
+            <a:pPr>
+              <a:defRPr sz="2175" b="0">
+                <a:solidFill>
+                  <a:srgbClr val="283D47"/>
+                </a:solidFill>
+                <a:latin typeface="Arial"/>
+                <a:ea typeface="Arial"/>
+                <a:cs typeface="Arial"/>
+              </a:defRPr>
+            </a:pPr>
+            <a:r>
+              <a:rPr sz="2175" b="0">
+                <a:solidFill>
+                  <a:srgbClr val="283D47"/>
+                </a:solidFill>
+                <a:latin typeface="Arial"/>
+                <a:ea typeface="Arial"/>
+                <a:cs typeface="Arial"/>
+              </a:rPr>
+              <a:t>Novelty and measurement audit</a:t>
+            </a:r>
+          </a:p>
+          <a:p xmlns:a="http://schemas.openxmlformats.org/drawingml/2006/main">
+            <a:pPr>
+              <a:defRPr sz="2175" b="0">
+                <a:solidFill>
+                  <a:srgbClr val="283D47"/>
+                </a:solidFill>
+                <a:latin typeface="Arial"/>
+                <a:ea typeface="Arial"/>
+                <a:cs typeface="Arial"/>
+              </a:defRPr>
+            </a:pPr>
+            <a:r>
+              <a:rPr sz="2175" b="0">
+                <a:solidFill>
+                  <a:srgbClr val="283D47"/>
+                </a:solidFill>
+                <a:latin typeface="Arial"/>
+                <a:ea typeface="Arial"/>
+                <a:cs typeface="Arial"/>
+              </a:rPr>
+              <a:t>Draft governed request and rival predictions</a:t>
             </a:r>
           </a:p>
         </p:txBody>
@@ -8613,7 +8475,7 @@
           <p:cNvPr id="7" name="">
             <a:extLst xmlns:a="http://schemas.openxmlformats.org/drawingml/2006/main">
               <a:ext uri="{FF2B5EF4-FFF2-40B4-BE49-F238E27FC236}">
-                <a16:creationId xmlns:a16="http://schemas.microsoft.com/office/drawing/2014/main" id="{4C026F63-EC3B-4CCA-9D97-F8ECA1A445B7}"/>
+                <a16:creationId xmlns:a16="http://schemas.microsoft.com/office/drawing/2014/main" id="{9B063FD2-D951-4AC9-A22E-1FC7E95151DC}"/>
               </a:ext>
             </a:extLst>
           </p:cNvPr>
@@ -8624,8 +8486,8 @@
         </p:nvSpPr>
         <p:spPr>
           <a:xfrm xmlns:a="http://schemas.openxmlformats.org/drawingml/2006/main">
-            <a:off x="609600" y="2390775"/>
-            <a:ext cx="10972800" cy="285750"/>
+            <a:off x="6362700" y="1581150"/>
+            <a:ext cx="5219700" cy="333375"/>
           </a:xfrm>
           <a:prstGeom xmlns:a="http://schemas.openxmlformats.org/drawingml/2006/main" prst="rect">
             <a:avLst/>
@@ -8642,9 +8504,9 @@
           <a:lstStyle xmlns:a="http://schemas.openxmlformats.org/drawingml/2006/main"/>
           <a:p xmlns:a="http://schemas.openxmlformats.org/drawingml/2006/main">
             <a:pPr>
-              <a:defRPr sz="1650" b="1">
-                <a:solidFill>
-                  <a:srgbClr val="14685F"/>
+              <a:defRPr sz="1875" b="1">
+                <a:solidFill>
+                  <a:srgbClr val="8C4052"/>
                 </a:solidFill>
                 <a:latin typeface="Arial"/>
                 <a:ea typeface="Arial"/>
@@ -8652,15 +8514,15 @@
               </a:defRPr>
             </a:pPr>
             <a:r>
-              <a:rPr sz="1650" b="1">
-                <a:solidFill>
-                  <a:srgbClr val="14685F"/>
+              <a:rPr sz="1875" b="1">
+                <a:solidFill>
+                  <a:srgbClr val="8C4052"/>
                 </a:solidFill>
                 <a:latin typeface="Arial"/>
                 <a:ea typeface="Arial"/>
                 <a:cs typeface="Arial"/>
               </a:rPr>
-              <a:t>2 · WHAT CHANGED IN THE PANDEMIC ERA?</a:t>
+              <a:t>NOT READY FOR A MECHANISM CLAIM</a:t>
             </a:r>
           </a:p>
         </p:txBody>
@@ -8670,7 +8532,7 @@
           <p:cNvPr id="8" name="">
             <a:extLst xmlns:a="http://schemas.openxmlformats.org/drawingml/2006/main">
               <a:ext uri="{FF2B5EF4-FFF2-40B4-BE49-F238E27FC236}">
-                <a16:creationId xmlns:a16="http://schemas.microsoft.com/office/drawing/2014/main" id="{5279E18F-4CDC-4B8F-ADD0-92A23CEE612E}"/>
+                <a16:creationId xmlns:a16="http://schemas.microsoft.com/office/drawing/2014/main" id="{34DB86CA-0DB0-4AD5-8A18-237BA21C767E}"/>
               </a:ext>
             </a:extLst>
           </p:cNvPr>
@@ -8681,8 +8543,8 @@
         </p:nvSpPr>
         <p:spPr>
           <a:xfrm xmlns:a="http://schemas.openxmlformats.org/drawingml/2006/main">
-            <a:off x="609600" y="2724150"/>
-            <a:ext cx="10972800" cy="514350"/>
+            <a:off x="6362700" y="2057400"/>
+            <a:ext cx="5219700" cy="1619250"/>
           </a:xfrm>
           <a:prstGeom xmlns:a="http://schemas.openxmlformats.org/drawingml/2006/main" prst="rect">
             <a:avLst/>
@@ -8699,7 +8561,7 @@
           <a:lstStyle xmlns:a="http://schemas.openxmlformats.org/drawingml/2006/main"/>
           <a:p xmlns:a="http://schemas.openxmlformats.org/drawingml/2006/main">
             <a:pPr>
-              <a:defRPr sz="1950" b="0">
+              <a:defRPr sz="2175" b="0">
                 <a:solidFill>
                   <a:srgbClr val="283D47"/>
                 </a:solidFill>
@@ -8709,7 +8571,7 @@
               </a:defRPr>
             </a:pPr>
             <a:r>
-              <a:rPr sz="1950" b="0">
+              <a:rPr sz="2175" b="0">
                 <a:solidFill>
                   <a:srgbClr val="283D47"/>
                 </a:solidFill>
@@ -8717,7 +8579,53 @@
                 <a:ea typeface="Arial"/>
                 <a:cs typeface="Arial"/>
               </a:rPr>
-              <a:t>Agent + Hogan: specify a deviation beyond the earlier decline and its counterfactual.</a:t>
+              <a:t>No new transfer or approved model output</a:t>
+            </a:r>
+          </a:p>
+          <a:p xmlns:a="http://schemas.openxmlformats.org/drawingml/2006/main">
+            <a:pPr>
+              <a:defRPr sz="2175" b="0">
+                <a:solidFill>
+                  <a:srgbClr val="283D47"/>
+                </a:solidFill>
+                <a:latin typeface="Arial"/>
+                <a:ea typeface="Arial"/>
+                <a:cs typeface="Arial"/>
+              </a:defRPr>
+            </a:pPr>
+            <a:r>
+              <a:rPr sz="2175" b="0">
+                <a:solidFill>
+                  <a:srgbClr val="283D47"/>
+                </a:solidFill>
+                <a:latin typeface="Arial"/>
+                <a:ea typeface="Arial"/>
+                <a:cs typeface="Arial"/>
+              </a:rPr>
+              <a:t>No cohort person-time or clinical linkage</a:t>
+            </a:r>
+          </a:p>
+          <a:p xmlns:a="http://schemas.openxmlformats.org/drawingml/2006/main">
+            <a:pPr>
+              <a:defRPr sz="2175" b="0">
+                <a:solidFill>
+                  <a:srgbClr val="283D47"/>
+                </a:solidFill>
+                <a:latin typeface="Arial"/>
+                <a:ea typeface="Arial"/>
+                <a:cs typeface="Arial"/>
+              </a:defRPr>
+            </a:pPr>
+            <a:r>
+              <a:rPr sz="2175" b="0">
+                <a:solidFill>
+                  <a:srgbClr val="283D47"/>
+                </a:solidFill>
+                <a:latin typeface="Arial"/>
+                <a:ea typeface="Arial"/>
+                <a:cs typeface="Arial"/>
+              </a:rPr>
+              <a:t>No independent validation cohort</a:t>
             </a:r>
           </a:p>
         </p:txBody>
@@ -8727,7 +8635,7 @@
           <p:cNvPr id="9" name="">
             <a:extLst xmlns:a="http://schemas.openxmlformats.org/drawingml/2006/main">
               <a:ext uri="{FF2B5EF4-FFF2-40B4-BE49-F238E27FC236}">
-                <a16:creationId xmlns:a16="http://schemas.microsoft.com/office/drawing/2014/main" id="{41078CA7-B558-475A-A6B9-CBE02ADBD395}"/>
+                <a16:creationId xmlns:a16="http://schemas.microsoft.com/office/drawing/2014/main" id="{75A3B0B7-247D-465E-996D-C819E07AAF62}"/>
               </a:ext>
             </a:extLst>
           </p:cNvPr>
@@ -8738,8 +8646,8 @@
         </p:nvSpPr>
         <p:spPr>
           <a:xfrm xmlns:a="http://schemas.openxmlformats.org/drawingml/2006/main">
-            <a:off x="609600" y="3276600"/>
-            <a:ext cx="10972800" cy="285750"/>
+            <a:off x="609600" y="4514850"/>
+            <a:ext cx="10972800" cy="1209675"/>
           </a:xfrm>
           <a:prstGeom xmlns:a="http://schemas.openxmlformats.org/drawingml/2006/main" prst="rect">
             <a:avLst/>
@@ -8756,9 +8664,9 @@
           <a:lstStyle xmlns:a="http://schemas.openxmlformats.org/drawingml/2006/main"/>
           <a:p xmlns:a="http://schemas.openxmlformats.org/drawingml/2006/main">
             <a:pPr>
-              <a:defRPr sz="1650" b="1">
-                <a:solidFill>
-                  <a:srgbClr val="14685F"/>
+              <a:defRPr sz="2175" b="0">
+                <a:solidFill>
+                  <a:srgbClr val="283D47"/>
                 </a:solidFill>
                 <a:latin typeface="Arial"/>
                 <a:ea typeface="Arial"/>
@@ -8766,54 +8674,20 @@
               </a:defRPr>
             </a:pPr>
             <a:r>
-              <a:rPr sz="1650" b="1">
-                <a:solidFill>
-                  <a:srgbClr val="14685F"/>
+              <a:rPr sz="2175" b="0">
+                <a:solidFill>
+                  <a:srgbClr val="283D47"/>
                 </a:solidFill>
                 <a:latin typeface="Arial"/>
                 <a:ea typeface="Arial"/>
                 <a:cs typeface="Arial"/>
               </a:rPr>
-              <a:t>3 · CAN HEALTH AND OBSERVATION BE SEPARATED?</a:t>
-            </a:r>
-          </a:p>
-        </p:txBody>
-      </p:sp>
-      <p:sp>
-        <p:nvSpPr>
-          <p:cNvPr id="10" name="">
-            <a:extLst xmlns:a="http://schemas.openxmlformats.org/drawingml/2006/main">
-              <a:ext uri="{FF2B5EF4-FFF2-40B4-BE49-F238E27FC236}">
-                <a16:creationId xmlns:a16="http://schemas.microsoft.com/office/drawing/2014/main" id="{01CF56C9-EF2C-4D97-B6E6-0BCA145BD2AE}"/>
-              </a:ext>
-            </a:extLst>
-          </p:cNvPr>
-          <p:cNvSpPr>
-            <a:spLocks xmlns:a="http://schemas.openxmlformats.org/drawingml/2006/main" noGrp="1"/>
-          </p:cNvSpPr>
-          <p:nvPr/>
-        </p:nvSpPr>
-        <p:spPr>
-          <a:xfrm xmlns:a="http://schemas.openxmlformats.org/drawingml/2006/main">
-            <a:off x="609600" y="3609975"/>
-            <a:ext cx="10972800" cy="514350"/>
-          </a:xfrm>
-          <a:prstGeom xmlns:a="http://schemas.openxmlformats.org/drawingml/2006/main" prst="rect">
-            <a:avLst/>
-          </a:prstGeom>
-          <a:noFill xmlns:a="http://schemas.openxmlformats.org/drawingml/2006/main"/>
-          <a:ln xmlns:a="http://schemas.openxmlformats.org/drawingml/2006/main" w="0">
-            <a:noFill/>
-          </a:ln>
-        </p:spPr>
-        <p:txBody>
-          <a:bodyPr xmlns:a="http://schemas.openxmlformats.org/drawingml/2006/main">
-            <a:noAutofit/>
-          </a:bodyPr>
-          <a:lstStyle xmlns:a="http://schemas.openxmlformats.org/drawingml/2006/main"/>
+              <a:t>Proceed only if verified fields can separate the explanations and the question</a:t>
+            </a:r>
+          </a:p>
           <a:p xmlns:a="http://schemas.openxmlformats.org/drawingml/2006/main">
             <a:pPr>
-              <a:defRPr sz="1950" b="0">
+              <a:defRPr sz="2175" b="0">
                 <a:solidFill>
                   <a:srgbClr val="283D47"/>
                 </a:solidFill>
@@ -8823,7 +8697,7 @@
               </a:defRPr>
             </a:pPr>
             <a:r>
-              <a:rPr sz="1950" b="0">
+              <a:rPr sz="2175" b="0">
                 <a:solidFill>
                   <a:srgbClr val="283D47"/>
                 </a:solidFill>
@@ -8831,235 +8705,7 @@
                 <a:ea typeface="Arial"/>
                 <a:cs typeface="Arial"/>
               </a:rPr>
-              <a:t>Roro/Bishai: assess risk-set, service, diagnosis and mortality evidence feasibility.</a:t>
-            </a:r>
-          </a:p>
-        </p:txBody>
-      </p:sp>
-      <p:sp>
-        <p:nvSpPr>
-          <p:cNvPr id="11" name="">
-            <a:extLst xmlns:a="http://schemas.openxmlformats.org/drawingml/2006/main">
-              <a:ext uri="{FF2B5EF4-FFF2-40B4-BE49-F238E27FC236}">
-                <a16:creationId xmlns:a16="http://schemas.microsoft.com/office/drawing/2014/main" id="{ECCF88A1-C83B-4063-934E-B9F1FD4BF975}"/>
-              </a:ext>
-            </a:extLst>
-          </p:cNvPr>
-          <p:cNvSpPr>
-            <a:spLocks xmlns:a="http://schemas.openxmlformats.org/drawingml/2006/main" noGrp="1"/>
-          </p:cNvSpPr>
-          <p:nvPr/>
-        </p:nvSpPr>
-        <p:spPr>
-          <a:xfrm xmlns:a="http://schemas.openxmlformats.org/drawingml/2006/main">
-            <a:off x="609600" y="4162425"/>
-            <a:ext cx="10972800" cy="285750"/>
-          </a:xfrm>
-          <a:prstGeom xmlns:a="http://schemas.openxmlformats.org/drawingml/2006/main" prst="rect">
-            <a:avLst/>
-          </a:prstGeom>
-          <a:noFill xmlns:a="http://schemas.openxmlformats.org/drawingml/2006/main"/>
-          <a:ln xmlns:a="http://schemas.openxmlformats.org/drawingml/2006/main" w="0">
-            <a:noFill/>
-          </a:ln>
-        </p:spPr>
-        <p:txBody>
-          <a:bodyPr xmlns:a="http://schemas.openxmlformats.org/drawingml/2006/main">
-            <a:noAutofit/>
-          </a:bodyPr>
-          <a:lstStyle xmlns:a="http://schemas.openxmlformats.org/drawingml/2006/main"/>
-          <a:p xmlns:a="http://schemas.openxmlformats.org/drawingml/2006/main">
-            <a:pPr>
-              <a:defRPr sz="1650" b="1">
-                <a:solidFill>
-                  <a:srgbClr val="14685F"/>
-                </a:solidFill>
-                <a:latin typeface="Arial"/>
-                <a:ea typeface="Arial"/>
-                <a:cs typeface="Arial"/>
-              </a:defRPr>
-            </a:pPr>
-            <a:r>
-              <a:rPr sz="1650" b="1">
-                <a:solidFill>
-                  <a:srgbClr val="14685F"/>
-                </a:solidFill>
-                <a:latin typeface="Arial"/>
-                <a:ea typeface="Arial"/>
-                <a:cs typeface="Arial"/>
-              </a:rPr>
-              <a:t>4 · WHY DO COEFFICIENTS MOVE?</a:t>
-            </a:r>
-          </a:p>
-        </p:txBody>
-      </p:sp>
-      <p:sp>
-        <p:nvSpPr>
-          <p:cNvPr id="12" name="">
-            <a:extLst xmlns:a="http://schemas.openxmlformats.org/drawingml/2006/main">
-              <a:ext uri="{FF2B5EF4-FFF2-40B4-BE49-F238E27FC236}">
-                <a16:creationId xmlns:a16="http://schemas.microsoft.com/office/drawing/2014/main" id="{11A0B756-700E-4C5F-90A0-B554A606682A}"/>
-              </a:ext>
-            </a:extLst>
-          </p:cNvPr>
-          <p:cNvSpPr>
-            <a:spLocks xmlns:a="http://schemas.openxmlformats.org/drawingml/2006/main" noGrp="1"/>
-          </p:cNvSpPr>
-          <p:nvPr/>
-        </p:nvSpPr>
-        <p:spPr>
-          <a:xfrm xmlns:a="http://schemas.openxmlformats.org/drawingml/2006/main">
-            <a:off x="609600" y="4495800"/>
-            <a:ext cx="10972800" cy="514350"/>
-          </a:xfrm>
-          <a:prstGeom xmlns:a="http://schemas.openxmlformats.org/drawingml/2006/main" prst="rect">
-            <a:avLst/>
-          </a:prstGeom>
-          <a:noFill xmlns:a="http://schemas.openxmlformats.org/drawingml/2006/main"/>
-          <a:ln xmlns:a="http://schemas.openxmlformats.org/drawingml/2006/main" w="0">
-            <a:noFill/>
-          </a:ln>
-        </p:spPr>
-        <p:txBody>
-          <a:bodyPr xmlns:a="http://schemas.openxmlformats.org/drawingml/2006/main">
-            <a:noAutofit/>
-          </a:bodyPr>
-          <a:lstStyle xmlns:a="http://schemas.openxmlformats.org/drawingml/2006/main"/>
-          <a:p xmlns:a="http://schemas.openxmlformats.org/drawingml/2006/main">
-            <a:pPr>
-              <a:defRPr sz="1950" b="0">
-                <a:solidFill>
-                  <a:srgbClr val="283D47"/>
-                </a:solidFill>
-                <a:latin typeface="Arial"/>
-                <a:ea typeface="Arial"/>
-                <a:cs typeface="Arial"/>
-              </a:defRPr>
-            </a:pPr>
-            <a:r>
-              <a:rPr sz="1950" b="0">
-                <a:solidFill>
-                  <a:srgbClr val="283D47"/>
-                </a:solidFill>
-                <a:latin typeface="Arial"/>
-                <a:ea typeface="Arial"/>
-                <a:cs typeface="Arial"/>
-              </a:rPr>
-              <a:t>Agent: separate spline basis, support, influence, uncertainty and effect modification.</a:t>
-            </a:r>
-          </a:p>
-        </p:txBody>
-      </p:sp>
-      <p:sp>
-        <p:nvSpPr>
-          <p:cNvPr id="13" name="">
-            <a:extLst xmlns:a="http://schemas.openxmlformats.org/drawingml/2006/main">
-              <a:ext uri="{FF2B5EF4-FFF2-40B4-BE49-F238E27FC236}">
-                <a16:creationId xmlns:a16="http://schemas.microsoft.com/office/drawing/2014/main" id="{B0BF736D-0A28-4E8E-95AB-A596128ABFFC}"/>
-              </a:ext>
-            </a:extLst>
-          </p:cNvPr>
-          <p:cNvSpPr>
-            <a:spLocks xmlns:a="http://schemas.openxmlformats.org/drawingml/2006/main" noGrp="1"/>
-          </p:cNvSpPr>
-          <p:nvPr/>
-        </p:nvSpPr>
-        <p:spPr>
-          <a:xfrm xmlns:a="http://schemas.openxmlformats.org/drawingml/2006/main">
-            <a:off x="609600" y="5048250"/>
-            <a:ext cx="10972800" cy="285750"/>
-          </a:xfrm>
-          <a:prstGeom xmlns:a="http://schemas.openxmlformats.org/drawingml/2006/main" prst="rect">
-            <a:avLst/>
-          </a:prstGeom>
-          <a:noFill xmlns:a="http://schemas.openxmlformats.org/drawingml/2006/main"/>
-          <a:ln xmlns:a="http://schemas.openxmlformats.org/drawingml/2006/main" w="0">
-            <a:noFill/>
-          </a:ln>
-        </p:spPr>
-        <p:txBody>
-          <a:bodyPr xmlns:a="http://schemas.openxmlformats.org/drawingml/2006/main">
-            <a:noAutofit/>
-          </a:bodyPr>
-          <a:lstStyle xmlns:a="http://schemas.openxmlformats.org/drawingml/2006/main"/>
-          <a:p xmlns:a="http://schemas.openxmlformats.org/drawingml/2006/main">
-            <a:pPr>
-              <a:defRPr sz="1650" b="1">
-                <a:solidFill>
-                  <a:srgbClr val="14685F"/>
-                </a:solidFill>
-                <a:latin typeface="Arial"/>
-                <a:ea typeface="Arial"/>
-                <a:cs typeface="Arial"/>
-              </a:defRPr>
-            </a:pPr>
-            <a:r>
-              <a:rPr sz="1650" b="1">
-                <a:solidFill>
-                  <a:srgbClr val="14685F"/>
-                </a:solidFill>
-                <a:latin typeface="Arial"/>
-                <a:ea typeface="Arial"/>
-                <a:cs typeface="Arial"/>
-              </a:rPr>
-              <a:t>5 · WHICH TARGET AND DOCUMENT DOES THE TEAM ENDORSE?</a:t>
-            </a:r>
-          </a:p>
-        </p:txBody>
-      </p:sp>
-      <p:sp>
-        <p:nvSpPr>
-          <p:cNvPr id="14" name="">
-            <a:extLst xmlns:a="http://schemas.openxmlformats.org/drawingml/2006/main">
-              <a:ext uri="{FF2B5EF4-FFF2-40B4-BE49-F238E27FC236}">
-                <a16:creationId xmlns:a16="http://schemas.microsoft.com/office/drawing/2014/main" id="{3E842F69-8BDA-4CCD-BA65-DD6B399945E7}"/>
-              </a:ext>
-            </a:extLst>
-          </p:cNvPr>
-          <p:cNvSpPr>
-            <a:spLocks xmlns:a="http://schemas.openxmlformats.org/drawingml/2006/main" noGrp="1"/>
-          </p:cNvSpPr>
-          <p:nvPr/>
-        </p:nvSpPr>
-        <p:spPr>
-          <a:xfrm xmlns:a="http://schemas.openxmlformats.org/drawingml/2006/main">
-            <a:off x="609600" y="5381625"/>
-            <a:ext cx="10972800" cy="514350"/>
-          </a:xfrm>
-          <a:prstGeom xmlns:a="http://schemas.openxmlformats.org/drawingml/2006/main" prst="rect">
-            <a:avLst/>
-          </a:prstGeom>
-          <a:noFill xmlns:a="http://schemas.openxmlformats.org/drawingml/2006/main"/>
-          <a:ln xmlns:a="http://schemas.openxmlformats.org/drawingml/2006/main" w="0">
-            <a:noFill/>
-          </a:ln>
-        </p:spPr>
-        <p:txBody>
-          <a:bodyPr xmlns:a="http://schemas.openxmlformats.org/drawingml/2006/main">
-            <a:noAutofit/>
-          </a:bodyPr>
-          <a:lstStyle xmlns:a="http://schemas.openxmlformats.org/drawingml/2006/main"/>
-          <a:p xmlns:a="http://schemas.openxmlformats.org/drawingml/2006/main">
-            <a:pPr>
-              <a:defRPr sz="1950" b="0">
-                <a:solidFill>
-                  <a:srgbClr val="283D47"/>
-                </a:solidFill>
-                <a:latin typeface="Arial"/>
-                <a:ea typeface="Arial"/>
-                <a:cs typeface="Arial"/>
-              </a:defRPr>
-            </a:pPr>
-            <a:r>
-              <a:rPr sz="1950" b="0">
-                <a:solidFill>
-                  <a:srgbClr val="283D47"/>
-                </a:solidFill>
-                <a:latin typeface="Arial"/>
-                <a:ea typeface="Arial"/>
-                <a:cs typeface="Arial"/>
-              </a:rPr>
-              <a:t>Bob/Hogan/Bishai: resolve authority; choose narrowing, evidence acquisition, pivot or stop.</a:t>
+              <a:t>adds to the closest studies. Otherwise narrow the claim and reconsider journal fit.</a:t>
             </a:r>
           </a:p>
         </p:txBody>
@@ -9067,7 +8713,7 @@
     </p:spTree>
     <p:extLst>
       <p:ext uri="{BB962C8B-B14F-4D97-AF65-F5344CB8AC3E}">
-        <p14:creationId xmlns:p14="http://schemas.microsoft.com/office/powerpoint/2010/main" val="1059083937"/>
+        <p14:creationId xmlns:p14="http://schemas.microsoft.com/office/powerpoint/2010/main" val="47347050"/>
       </p:ext>
     </p:extLst>
   </p:cSld>
